--- a/Лекции/ООП 2 лек 1.pptx
+++ b/Лекции/ООП 2 лек 1.pptx
@@ -5,23 +5,18 @@
     <p:sldMasterId id="2147483674" r:id="rId1"/>
   </p:sldMasterIdLst>
   <p:notesMasterIdLst>
-    <p:notesMasterId r:id="rId16"/>
+    <p:notesMasterId r:id="rId11"/>
   </p:notesMasterIdLst>
   <p:sldIdLst>
     <p:sldId id="273" r:id="rId2"/>
-    <p:sldId id="1147" r:id="rId3"/>
-    <p:sldId id="1179" r:id="rId4"/>
-    <p:sldId id="1180" r:id="rId5"/>
-    <p:sldId id="1181" r:id="rId6"/>
-    <p:sldId id="1182" r:id="rId7"/>
-    <p:sldId id="1183" r:id="rId8"/>
-    <p:sldId id="1184" r:id="rId9"/>
-    <p:sldId id="1185" r:id="rId10"/>
-    <p:sldId id="1186" r:id="rId11"/>
-    <p:sldId id="1187" r:id="rId12"/>
-    <p:sldId id="1188" r:id="rId13"/>
-    <p:sldId id="1189" r:id="rId14"/>
-    <p:sldId id="1190" r:id="rId15"/>
+    <p:sldId id="274" r:id="rId3"/>
+    <p:sldId id="275" r:id="rId4"/>
+    <p:sldId id="276" r:id="rId5"/>
+    <p:sldId id="278" r:id="rId6"/>
+    <p:sldId id="282" r:id="rId7"/>
+    <p:sldId id="283" r:id="rId8"/>
+    <p:sldId id="285" r:id="rId9"/>
+    <p:sldId id="286" r:id="rId10"/>
   </p:sldIdLst>
   <p:sldSz cx="12192000" cy="6858000"/>
   <p:notesSz cx="6858000" cy="9144000"/>
@@ -225,7 +220,7 @@
             <a:fld id="{AA2F9473-F066-431E-A6E8-1D478C995A6B}" type="datetimeFigureOut">
               <a:rPr lang="en-US" smtClean="0"/>
               <a:pPr/>
-              <a:t>5/2/2025</a:t>
+              <a:t>2/14/2026</a:t>
             </a:fld>
             <a:endParaRPr lang="en-US"/>
           </a:p>
@@ -584,456 +579,6 @@
 </p:notes>
 </file>
 
-<file path=ppt/notesSlides/notesSlide10.xml><?xml version="1.0" encoding="utf-8"?>
-<p:notes xmlns:a="http://schemas.openxmlformats.org/drawingml/2006/main" xmlns:r="http://schemas.openxmlformats.org/officeDocument/2006/relationships" xmlns:p="http://schemas.openxmlformats.org/presentationml/2006/main">
-  <p:cSld>
-    <p:spTree>
-      <p:nvGrpSpPr>
-        <p:cNvPr id="1" name=""/>
-        <p:cNvGrpSpPr/>
-        <p:nvPr/>
-      </p:nvGrpSpPr>
-      <p:grpSpPr>
-        <a:xfrm>
-          <a:off x="0" y="0"/>
-          <a:ext cx="0" cy="0"/>
-          <a:chOff x="0" y="0"/>
-          <a:chExt cx="0" cy="0"/>
-        </a:xfrm>
-      </p:grpSpPr>
-      <p:sp>
-        <p:nvSpPr>
-          <p:cNvPr id="2" name="Образ слайда 1"/>
-          <p:cNvSpPr>
-            <a:spLocks noGrp="1" noRot="1" noChangeAspect="1"/>
-          </p:cNvSpPr>
-          <p:nvPr>
-            <p:ph type="sldImg"/>
-          </p:nvPr>
-        </p:nvSpPr>
-        <p:spPr>
-          <a:xfrm>
-            <a:off x="685800" y="1143000"/>
-            <a:ext cx="5486400" cy="3086100"/>
-          </a:xfrm>
-        </p:spPr>
-      </p:sp>
-      <p:sp>
-        <p:nvSpPr>
-          <p:cNvPr id="3" name="Заметки 2"/>
-          <p:cNvSpPr>
-            <a:spLocks noGrp="1"/>
-          </p:cNvSpPr>
-          <p:nvPr>
-            <p:ph type="body" idx="1"/>
-          </p:nvPr>
-        </p:nvSpPr>
-        <p:spPr/>
-        <p:txBody>
-          <a:bodyPr/>
-          <a:lstStyle/>
-          <a:p>
-            <a:endParaRPr lang="ru-RU"/>
-          </a:p>
-        </p:txBody>
-      </p:sp>
-      <p:sp>
-        <p:nvSpPr>
-          <p:cNvPr id="4" name="Номер слайда 3"/>
-          <p:cNvSpPr>
-            <a:spLocks noGrp="1"/>
-          </p:cNvSpPr>
-          <p:nvPr>
-            <p:ph type="sldNum" sz="quarter" idx="10"/>
-          </p:nvPr>
-        </p:nvSpPr>
-        <p:spPr/>
-        <p:txBody>
-          <a:bodyPr/>
-          <a:lstStyle/>
-          <a:p>
-            <a:fld id="{F0F4E2F1-1521-4C3A-A563-2F7D19AB6E0B}" type="slidenum">
-              <a:rPr lang="en-US" smtClean="0"/>
-              <a:pPr/>
-              <a:t>10</a:t>
-            </a:fld>
-            <a:endParaRPr lang="en-US"/>
-          </a:p>
-        </p:txBody>
-      </p:sp>
-    </p:spTree>
-    <p:extLst>
-      <p:ext uri="{BB962C8B-B14F-4D97-AF65-F5344CB8AC3E}">
-        <p14:creationId xmlns:p14="http://schemas.microsoft.com/office/powerpoint/2010/main" val="735001687"/>
-      </p:ext>
-    </p:extLst>
-  </p:cSld>
-  <p:clrMapOvr>
-    <a:masterClrMapping/>
-  </p:clrMapOvr>
-</p:notes>
-</file>
-
-<file path=ppt/notesSlides/notesSlide11.xml><?xml version="1.0" encoding="utf-8"?>
-<p:notes xmlns:a="http://schemas.openxmlformats.org/drawingml/2006/main" xmlns:r="http://schemas.openxmlformats.org/officeDocument/2006/relationships" xmlns:p="http://schemas.openxmlformats.org/presentationml/2006/main">
-  <p:cSld>
-    <p:spTree>
-      <p:nvGrpSpPr>
-        <p:cNvPr id="1" name=""/>
-        <p:cNvGrpSpPr/>
-        <p:nvPr/>
-      </p:nvGrpSpPr>
-      <p:grpSpPr>
-        <a:xfrm>
-          <a:off x="0" y="0"/>
-          <a:ext cx="0" cy="0"/>
-          <a:chOff x="0" y="0"/>
-          <a:chExt cx="0" cy="0"/>
-        </a:xfrm>
-      </p:grpSpPr>
-      <p:sp>
-        <p:nvSpPr>
-          <p:cNvPr id="2" name="Образ слайда 1"/>
-          <p:cNvSpPr>
-            <a:spLocks noGrp="1" noRot="1" noChangeAspect="1"/>
-          </p:cNvSpPr>
-          <p:nvPr>
-            <p:ph type="sldImg"/>
-          </p:nvPr>
-        </p:nvSpPr>
-        <p:spPr>
-          <a:xfrm>
-            <a:off x="685800" y="1143000"/>
-            <a:ext cx="5486400" cy="3086100"/>
-          </a:xfrm>
-        </p:spPr>
-      </p:sp>
-      <p:sp>
-        <p:nvSpPr>
-          <p:cNvPr id="3" name="Заметки 2"/>
-          <p:cNvSpPr>
-            <a:spLocks noGrp="1"/>
-          </p:cNvSpPr>
-          <p:nvPr>
-            <p:ph type="body" idx="1"/>
-          </p:nvPr>
-        </p:nvSpPr>
-        <p:spPr/>
-        <p:txBody>
-          <a:bodyPr/>
-          <a:lstStyle/>
-          <a:p>
-            <a:endParaRPr lang="ru-RU"/>
-          </a:p>
-        </p:txBody>
-      </p:sp>
-      <p:sp>
-        <p:nvSpPr>
-          <p:cNvPr id="4" name="Номер слайда 3"/>
-          <p:cNvSpPr>
-            <a:spLocks noGrp="1"/>
-          </p:cNvSpPr>
-          <p:nvPr>
-            <p:ph type="sldNum" sz="quarter" idx="10"/>
-          </p:nvPr>
-        </p:nvSpPr>
-        <p:spPr/>
-        <p:txBody>
-          <a:bodyPr/>
-          <a:lstStyle/>
-          <a:p>
-            <a:fld id="{F0F4E2F1-1521-4C3A-A563-2F7D19AB6E0B}" type="slidenum">
-              <a:rPr lang="en-US" smtClean="0"/>
-              <a:pPr/>
-              <a:t>11</a:t>
-            </a:fld>
-            <a:endParaRPr lang="en-US"/>
-          </a:p>
-        </p:txBody>
-      </p:sp>
-    </p:spTree>
-    <p:extLst>
-      <p:ext uri="{BB962C8B-B14F-4D97-AF65-F5344CB8AC3E}">
-        <p14:creationId xmlns:p14="http://schemas.microsoft.com/office/powerpoint/2010/main" val="3465378823"/>
-      </p:ext>
-    </p:extLst>
-  </p:cSld>
-  <p:clrMapOvr>
-    <a:masterClrMapping/>
-  </p:clrMapOvr>
-</p:notes>
-</file>
-
-<file path=ppt/notesSlides/notesSlide12.xml><?xml version="1.0" encoding="utf-8"?>
-<p:notes xmlns:a="http://schemas.openxmlformats.org/drawingml/2006/main" xmlns:r="http://schemas.openxmlformats.org/officeDocument/2006/relationships" xmlns:p="http://schemas.openxmlformats.org/presentationml/2006/main">
-  <p:cSld>
-    <p:spTree>
-      <p:nvGrpSpPr>
-        <p:cNvPr id="1" name=""/>
-        <p:cNvGrpSpPr/>
-        <p:nvPr/>
-      </p:nvGrpSpPr>
-      <p:grpSpPr>
-        <a:xfrm>
-          <a:off x="0" y="0"/>
-          <a:ext cx="0" cy="0"/>
-          <a:chOff x="0" y="0"/>
-          <a:chExt cx="0" cy="0"/>
-        </a:xfrm>
-      </p:grpSpPr>
-      <p:sp>
-        <p:nvSpPr>
-          <p:cNvPr id="2" name="Образ слайда 1"/>
-          <p:cNvSpPr>
-            <a:spLocks noGrp="1" noRot="1" noChangeAspect="1"/>
-          </p:cNvSpPr>
-          <p:nvPr>
-            <p:ph type="sldImg"/>
-          </p:nvPr>
-        </p:nvSpPr>
-        <p:spPr>
-          <a:xfrm>
-            <a:off x="685800" y="1143000"/>
-            <a:ext cx="5486400" cy="3086100"/>
-          </a:xfrm>
-        </p:spPr>
-      </p:sp>
-      <p:sp>
-        <p:nvSpPr>
-          <p:cNvPr id="3" name="Заметки 2"/>
-          <p:cNvSpPr>
-            <a:spLocks noGrp="1"/>
-          </p:cNvSpPr>
-          <p:nvPr>
-            <p:ph type="body" idx="1"/>
-          </p:nvPr>
-        </p:nvSpPr>
-        <p:spPr/>
-        <p:txBody>
-          <a:bodyPr/>
-          <a:lstStyle/>
-          <a:p>
-            <a:endParaRPr lang="ru-RU"/>
-          </a:p>
-        </p:txBody>
-      </p:sp>
-      <p:sp>
-        <p:nvSpPr>
-          <p:cNvPr id="4" name="Номер слайда 3"/>
-          <p:cNvSpPr>
-            <a:spLocks noGrp="1"/>
-          </p:cNvSpPr>
-          <p:nvPr>
-            <p:ph type="sldNum" sz="quarter" idx="10"/>
-          </p:nvPr>
-        </p:nvSpPr>
-        <p:spPr/>
-        <p:txBody>
-          <a:bodyPr/>
-          <a:lstStyle/>
-          <a:p>
-            <a:fld id="{F0F4E2F1-1521-4C3A-A563-2F7D19AB6E0B}" type="slidenum">
-              <a:rPr lang="en-US" smtClean="0"/>
-              <a:pPr/>
-              <a:t>12</a:t>
-            </a:fld>
-            <a:endParaRPr lang="en-US"/>
-          </a:p>
-        </p:txBody>
-      </p:sp>
-    </p:spTree>
-    <p:extLst>
-      <p:ext uri="{BB962C8B-B14F-4D97-AF65-F5344CB8AC3E}">
-        <p14:creationId xmlns:p14="http://schemas.microsoft.com/office/powerpoint/2010/main" val="3261283980"/>
-      </p:ext>
-    </p:extLst>
-  </p:cSld>
-  <p:clrMapOvr>
-    <a:masterClrMapping/>
-  </p:clrMapOvr>
-</p:notes>
-</file>
-
-<file path=ppt/notesSlides/notesSlide13.xml><?xml version="1.0" encoding="utf-8"?>
-<p:notes xmlns:a="http://schemas.openxmlformats.org/drawingml/2006/main" xmlns:r="http://schemas.openxmlformats.org/officeDocument/2006/relationships" xmlns:p="http://schemas.openxmlformats.org/presentationml/2006/main">
-  <p:cSld>
-    <p:spTree>
-      <p:nvGrpSpPr>
-        <p:cNvPr id="1" name=""/>
-        <p:cNvGrpSpPr/>
-        <p:nvPr/>
-      </p:nvGrpSpPr>
-      <p:grpSpPr>
-        <a:xfrm>
-          <a:off x="0" y="0"/>
-          <a:ext cx="0" cy="0"/>
-          <a:chOff x="0" y="0"/>
-          <a:chExt cx="0" cy="0"/>
-        </a:xfrm>
-      </p:grpSpPr>
-      <p:sp>
-        <p:nvSpPr>
-          <p:cNvPr id="2" name="Образ слайда 1"/>
-          <p:cNvSpPr>
-            <a:spLocks noGrp="1" noRot="1" noChangeAspect="1"/>
-          </p:cNvSpPr>
-          <p:nvPr>
-            <p:ph type="sldImg"/>
-          </p:nvPr>
-        </p:nvSpPr>
-        <p:spPr>
-          <a:xfrm>
-            <a:off x="685800" y="1143000"/>
-            <a:ext cx="5486400" cy="3086100"/>
-          </a:xfrm>
-        </p:spPr>
-      </p:sp>
-      <p:sp>
-        <p:nvSpPr>
-          <p:cNvPr id="3" name="Заметки 2"/>
-          <p:cNvSpPr>
-            <a:spLocks noGrp="1"/>
-          </p:cNvSpPr>
-          <p:nvPr>
-            <p:ph type="body" idx="1"/>
-          </p:nvPr>
-        </p:nvSpPr>
-        <p:spPr/>
-        <p:txBody>
-          <a:bodyPr/>
-          <a:lstStyle/>
-          <a:p>
-            <a:endParaRPr lang="ru-RU"/>
-          </a:p>
-        </p:txBody>
-      </p:sp>
-      <p:sp>
-        <p:nvSpPr>
-          <p:cNvPr id="4" name="Номер слайда 3"/>
-          <p:cNvSpPr>
-            <a:spLocks noGrp="1"/>
-          </p:cNvSpPr>
-          <p:nvPr>
-            <p:ph type="sldNum" sz="quarter" idx="10"/>
-          </p:nvPr>
-        </p:nvSpPr>
-        <p:spPr/>
-        <p:txBody>
-          <a:bodyPr/>
-          <a:lstStyle/>
-          <a:p>
-            <a:fld id="{F0F4E2F1-1521-4C3A-A563-2F7D19AB6E0B}" type="slidenum">
-              <a:rPr lang="en-US" smtClean="0"/>
-              <a:pPr/>
-              <a:t>13</a:t>
-            </a:fld>
-            <a:endParaRPr lang="en-US"/>
-          </a:p>
-        </p:txBody>
-      </p:sp>
-    </p:spTree>
-    <p:extLst>
-      <p:ext uri="{BB962C8B-B14F-4D97-AF65-F5344CB8AC3E}">
-        <p14:creationId xmlns:p14="http://schemas.microsoft.com/office/powerpoint/2010/main" val="1246490530"/>
-      </p:ext>
-    </p:extLst>
-  </p:cSld>
-  <p:clrMapOvr>
-    <a:masterClrMapping/>
-  </p:clrMapOvr>
-</p:notes>
-</file>
-
-<file path=ppt/notesSlides/notesSlide14.xml><?xml version="1.0" encoding="utf-8"?>
-<p:notes xmlns:a="http://schemas.openxmlformats.org/drawingml/2006/main" xmlns:r="http://schemas.openxmlformats.org/officeDocument/2006/relationships" xmlns:p="http://schemas.openxmlformats.org/presentationml/2006/main">
-  <p:cSld>
-    <p:spTree>
-      <p:nvGrpSpPr>
-        <p:cNvPr id="1" name=""/>
-        <p:cNvGrpSpPr/>
-        <p:nvPr/>
-      </p:nvGrpSpPr>
-      <p:grpSpPr>
-        <a:xfrm>
-          <a:off x="0" y="0"/>
-          <a:ext cx="0" cy="0"/>
-          <a:chOff x="0" y="0"/>
-          <a:chExt cx="0" cy="0"/>
-        </a:xfrm>
-      </p:grpSpPr>
-      <p:sp>
-        <p:nvSpPr>
-          <p:cNvPr id="2" name="Образ слайда 1"/>
-          <p:cNvSpPr>
-            <a:spLocks noGrp="1" noRot="1" noChangeAspect="1"/>
-          </p:cNvSpPr>
-          <p:nvPr>
-            <p:ph type="sldImg"/>
-          </p:nvPr>
-        </p:nvSpPr>
-        <p:spPr>
-          <a:xfrm>
-            <a:off x="685800" y="1143000"/>
-            <a:ext cx="5486400" cy="3086100"/>
-          </a:xfrm>
-        </p:spPr>
-      </p:sp>
-      <p:sp>
-        <p:nvSpPr>
-          <p:cNvPr id="3" name="Заметки 2"/>
-          <p:cNvSpPr>
-            <a:spLocks noGrp="1"/>
-          </p:cNvSpPr>
-          <p:nvPr>
-            <p:ph type="body" idx="1"/>
-          </p:nvPr>
-        </p:nvSpPr>
-        <p:spPr/>
-        <p:txBody>
-          <a:bodyPr/>
-          <a:lstStyle/>
-          <a:p>
-            <a:endParaRPr lang="ru-RU"/>
-          </a:p>
-        </p:txBody>
-      </p:sp>
-      <p:sp>
-        <p:nvSpPr>
-          <p:cNvPr id="4" name="Номер слайда 3"/>
-          <p:cNvSpPr>
-            <a:spLocks noGrp="1"/>
-          </p:cNvSpPr>
-          <p:nvPr>
-            <p:ph type="sldNum" sz="quarter" idx="10"/>
-          </p:nvPr>
-        </p:nvSpPr>
-        <p:spPr/>
-        <p:txBody>
-          <a:bodyPr/>
-          <a:lstStyle/>
-          <a:p>
-            <a:fld id="{F0F4E2F1-1521-4C3A-A563-2F7D19AB6E0B}" type="slidenum">
-              <a:rPr lang="en-US" smtClean="0"/>
-              <a:pPr/>
-              <a:t>14</a:t>
-            </a:fld>
-            <a:endParaRPr lang="en-US"/>
-          </a:p>
-        </p:txBody>
-      </p:sp>
-    </p:spTree>
-    <p:extLst>
-      <p:ext uri="{BB962C8B-B14F-4D97-AF65-F5344CB8AC3E}">
-        <p14:creationId xmlns:p14="http://schemas.microsoft.com/office/powerpoint/2010/main" val="3555616237"/>
-      </p:ext>
-    </p:extLst>
-  </p:cSld>
-  <p:clrMapOvr>
-    <a:masterClrMapping/>
-  </p:clrMapOvr>
-</p:notes>
-</file>
-
 <file path=ppt/notesSlides/notesSlide2.xml><?xml version="1.0" encoding="utf-8"?>
 <p:notes xmlns:a="http://schemas.openxmlformats.org/drawingml/2006/main" xmlns:r="http://schemas.openxmlformats.org/officeDocument/2006/relationships" xmlns:p="http://schemas.openxmlformats.org/presentationml/2006/main">
   <p:cSld>
@@ -1114,7 +659,7 @@
     </p:spTree>
     <p:extLst>
       <p:ext uri="{BB962C8B-B14F-4D97-AF65-F5344CB8AC3E}">
-        <p14:creationId xmlns:p14="http://schemas.microsoft.com/office/powerpoint/2010/main" val="1801506385"/>
+        <p14:creationId xmlns:p14="http://schemas.microsoft.com/office/powerpoint/2010/main" val="3841282228"/>
       </p:ext>
     </p:extLst>
   </p:cSld>
@@ -1204,7 +749,7 @@
     </p:spTree>
     <p:extLst>
       <p:ext uri="{BB962C8B-B14F-4D97-AF65-F5344CB8AC3E}">
-        <p14:creationId xmlns:p14="http://schemas.microsoft.com/office/powerpoint/2010/main" val="2543653713"/>
+        <p14:creationId xmlns:p14="http://schemas.microsoft.com/office/powerpoint/2010/main" val="3074666715"/>
       </p:ext>
     </p:extLst>
   </p:cSld>
@@ -1294,7 +839,7 @@
     </p:spTree>
     <p:extLst>
       <p:ext uri="{BB962C8B-B14F-4D97-AF65-F5344CB8AC3E}">
-        <p14:creationId xmlns:p14="http://schemas.microsoft.com/office/powerpoint/2010/main" val="2781367484"/>
+        <p14:creationId xmlns:p14="http://schemas.microsoft.com/office/powerpoint/2010/main" val="1680714541"/>
       </p:ext>
     </p:extLst>
   </p:cSld>
@@ -1384,7 +929,7 @@
     </p:spTree>
     <p:extLst>
       <p:ext uri="{BB962C8B-B14F-4D97-AF65-F5344CB8AC3E}">
-        <p14:creationId xmlns:p14="http://schemas.microsoft.com/office/powerpoint/2010/main" val="2012440189"/>
+        <p14:creationId xmlns:p14="http://schemas.microsoft.com/office/powerpoint/2010/main" val="3410562378"/>
       </p:ext>
     </p:extLst>
   </p:cSld>
@@ -1474,7 +1019,7 @@
     </p:spTree>
     <p:extLst>
       <p:ext uri="{BB962C8B-B14F-4D97-AF65-F5344CB8AC3E}">
-        <p14:creationId xmlns:p14="http://schemas.microsoft.com/office/powerpoint/2010/main" val="2522140104"/>
+        <p14:creationId xmlns:p14="http://schemas.microsoft.com/office/powerpoint/2010/main" val="911061345"/>
       </p:ext>
     </p:extLst>
   </p:cSld>
@@ -1533,7 +1078,331 @@
           <a:bodyPr/>
           <a:lstStyle/>
           <a:p>
-            <a:endParaRPr lang="ru-RU"/>
+            <a:r>
+              <a:rPr lang="ru-RU" sz="1200" b="0" i="0" kern="1200" dirty="0" smtClean="0">
+                <a:solidFill>
+                  <a:schemeClr val="tx1"/>
+                </a:solidFill>
+                <a:effectLst/>
+                <a:latin typeface="+mn-lt"/>
+                <a:ea typeface="+mn-ea"/>
+                <a:cs typeface="+mn-cs"/>
+              </a:rPr>
+              <a:t>Хотя идея паттернов как способ описания решения распространенных проблем в области проектирования появилась довольно давно, но их популярность стала расти во многом благодаря известной работе четырех авторов Эриха Гаммы, Ричарда </a:t>
+            </a:r>
+            <a:r>
+              <a:rPr lang="ru-RU" sz="1200" b="0" i="0" kern="1200" dirty="0" err="1" smtClean="0">
+                <a:solidFill>
+                  <a:schemeClr val="tx1"/>
+                </a:solidFill>
+                <a:effectLst/>
+                <a:latin typeface="+mn-lt"/>
+                <a:ea typeface="+mn-ea"/>
+                <a:cs typeface="+mn-cs"/>
+              </a:rPr>
+              <a:t>Хелма</a:t>
+            </a:r>
+            <a:r>
+              <a:rPr lang="ru-RU" sz="1200" b="0" i="0" kern="1200" dirty="0" smtClean="0">
+                <a:solidFill>
+                  <a:schemeClr val="tx1"/>
+                </a:solidFill>
+                <a:effectLst/>
+                <a:latin typeface="+mn-lt"/>
+                <a:ea typeface="+mn-ea"/>
+                <a:cs typeface="+mn-cs"/>
+              </a:rPr>
+              <a:t>, Ральфа Джонсона, Джона </a:t>
+            </a:r>
+            <a:r>
+              <a:rPr lang="ru-RU" sz="1200" b="0" i="0" kern="1200" dirty="0" err="1" smtClean="0">
+                <a:solidFill>
+                  <a:schemeClr val="tx1"/>
+                </a:solidFill>
+                <a:effectLst/>
+                <a:latin typeface="+mn-lt"/>
+                <a:ea typeface="+mn-ea"/>
+                <a:cs typeface="+mn-cs"/>
+              </a:rPr>
+              <a:t>Влиссидеса</a:t>
+            </a:r>
+            <a:r>
+              <a:rPr lang="ru-RU" sz="1200" b="0" i="0" kern="1200" dirty="0" smtClean="0">
+                <a:solidFill>
+                  <a:schemeClr val="tx1"/>
+                </a:solidFill>
+                <a:effectLst/>
+                <a:latin typeface="+mn-lt"/>
+                <a:ea typeface="+mn-ea"/>
+                <a:cs typeface="+mn-cs"/>
+              </a:rPr>
+              <a:t>, которая называлась "</a:t>
+            </a:r>
+            <a:r>
+              <a:rPr lang="ru-RU" sz="1200" b="0" i="0" kern="1200" dirty="0" err="1" smtClean="0">
+                <a:solidFill>
+                  <a:schemeClr val="tx1"/>
+                </a:solidFill>
+                <a:effectLst/>
+                <a:latin typeface="+mn-lt"/>
+                <a:ea typeface="+mn-ea"/>
+                <a:cs typeface="+mn-cs"/>
+              </a:rPr>
+              <a:t>Design</a:t>
+            </a:r>
+            <a:r>
+              <a:rPr lang="ru-RU" sz="1200" b="0" i="0" kern="1200" dirty="0" smtClean="0">
+                <a:solidFill>
+                  <a:schemeClr val="tx1"/>
+                </a:solidFill>
+                <a:effectLst/>
+                <a:latin typeface="+mn-lt"/>
+                <a:ea typeface="+mn-ea"/>
+                <a:cs typeface="+mn-cs"/>
+              </a:rPr>
+              <a:t> </a:t>
+            </a:r>
+            <a:r>
+              <a:rPr lang="ru-RU" sz="1200" b="0" i="0" kern="1200" dirty="0" err="1" smtClean="0">
+                <a:solidFill>
+                  <a:schemeClr val="tx1"/>
+                </a:solidFill>
+                <a:effectLst/>
+                <a:latin typeface="+mn-lt"/>
+                <a:ea typeface="+mn-ea"/>
+                <a:cs typeface="+mn-cs"/>
+              </a:rPr>
+              <a:t>Patterns</a:t>
+            </a:r>
+            <a:r>
+              <a:rPr lang="ru-RU" sz="1200" b="0" i="0" kern="1200" dirty="0" smtClean="0">
+                <a:solidFill>
+                  <a:schemeClr val="tx1"/>
+                </a:solidFill>
+                <a:effectLst/>
+                <a:latin typeface="+mn-lt"/>
+                <a:ea typeface="+mn-ea"/>
+                <a:cs typeface="+mn-cs"/>
+              </a:rPr>
+              <a:t>: </a:t>
+            </a:r>
+            <a:r>
+              <a:rPr lang="ru-RU" sz="1200" b="0" i="0" kern="1200" dirty="0" err="1" smtClean="0">
+                <a:solidFill>
+                  <a:schemeClr val="tx1"/>
+                </a:solidFill>
+                <a:effectLst/>
+                <a:latin typeface="+mn-lt"/>
+                <a:ea typeface="+mn-ea"/>
+                <a:cs typeface="+mn-cs"/>
+              </a:rPr>
+              <a:t>Elements</a:t>
+            </a:r>
+            <a:r>
+              <a:rPr lang="ru-RU" sz="1200" b="0" i="0" kern="1200" dirty="0" smtClean="0">
+                <a:solidFill>
+                  <a:schemeClr val="tx1"/>
+                </a:solidFill>
+                <a:effectLst/>
+                <a:latin typeface="+mn-lt"/>
+                <a:ea typeface="+mn-ea"/>
+                <a:cs typeface="+mn-cs"/>
+              </a:rPr>
+              <a:t> </a:t>
+            </a:r>
+            <a:r>
+              <a:rPr lang="ru-RU" sz="1200" b="0" i="0" kern="1200" dirty="0" err="1" smtClean="0">
+                <a:solidFill>
+                  <a:schemeClr val="tx1"/>
+                </a:solidFill>
+                <a:effectLst/>
+                <a:latin typeface="+mn-lt"/>
+                <a:ea typeface="+mn-ea"/>
+                <a:cs typeface="+mn-cs"/>
+              </a:rPr>
+              <a:t>of</a:t>
+            </a:r>
+            <a:r>
+              <a:rPr lang="ru-RU" sz="1200" b="0" i="0" kern="1200" dirty="0" smtClean="0">
+                <a:solidFill>
+                  <a:schemeClr val="tx1"/>
+                </a:solidFill>
+                <a:effectLst/>
+                <a:latin typeface="+mn-lt"/>
+                <a:ea typeface="+mn-ea"/>
+                <a:cs typeface="+mn-cs"/>
+              </a:rPr>
+              <a:t> </a:t>
+            </a:r>
+            <a:r>
+              <a:rPr lang="ru-RU" sz="1200" b="0" i="0" kern="1200" dirty="0" err="1" smtClean="0">
+                <a:solidFill>
+                  <a:schemeClr val="tx1"/>
+                </a:solidFill>
+                <a:effectLst/>
+                <a:latin typeface="+mn-lt"/>
+                <a:ea typeface="+mn-ea"/>
+                <a:cs typeface="+mn-cs"/>
+              </a:rPr>
+              <a:t>Reusable</a:t>
+            </a:r>
+            <a:r>
+              <a:rPr lang="ru-RU" sz="1200" b="0" i="0" kern="1200" dirty="0" smtClean="0">
+                <a:solidFill>
+                  <a:schemeClr val="tx1"/>
+                </a:solidFill>
+                <a:effectLst/>
+                <a:latin typeface="+mn-lt"/>
+                <a:ea typeface="+mn-ea"/>
+                <a:cs typeface="+mn-cs"/>
+              </a:rPr>
+              <a:t> </a:t>
+            </a:r>
+            <a:r>
+              <a:rPr lang="ru-RU" sz="1200" b="0" i="0" kern="1200" dirty="0" err="1" smtClean="0">
+                <a:solidFill>
+                  <a:schemeClr val="tx1"/>
+                </a:solidFill>
+                <a:effectLst/>
+                <a:latin typeface="+mn-lt"/>
+                <a:ea typeface="+mn-ea"/>
+                <a:cs typeface="+mn-cs"/>
+              </a:rPr>
+              <a:t>Object-Oriented</a:t>
+            </a:r>
+            <a:r>
+              <a:rPr lang="ru-RU" sz="1200" b="0" i="0" kern="1200" dirty="0" smtClean="0">
+                <a:solidFill>
+                  <a:schemeClr val="tx1"/>
+                </a:solidFill>
+                <a:effectLst/>
+                <a:latin typeface="+mn-lt"/>
+                <a:ea typeface="+mn-ea"/>
+                <a:cs typeface="+mn-cs"/>
+              </a:rPr>
+              <a:t> </a:t>
+            </a:r>
+            <a:r>
+              <a:rPr lang="ru-RU" sz="1200" b="0" i="0" kern="1200" dirty="0" err="1" smtClean="0">
+                <a:solidFill>
+                  <a:schemeClr val="tx1"/>
+                </a:solidFill>
+                <a:effectLst/>
+                <a:latin typeface="+mn-lt"/>
+                <a:ea typeface="+mn-ea"/>
+                <a:cs typeface="+mn-cs"/>
+              </a:rPr>
+              <a:t>Software</a:t>
+            </a:r>
+            <a:r>
+              <a:rPr lang="ru-RU" sz="1200" b="0" i="0" kern="1200" dirty="0" smtClean="0">
+                <a:solidFill>
+                  <a:schemeClr val="tx1"/>
+                </a:solidFill>
+                <a:effectLst/>
+                <a:latin typeface="+mn-lt"/>
+                <a:ea typeface="+mn-ea"/>
+                <a:cs typeface="+mn-cs"/>
+              </a:rPr>
+              <a:t>" (на русском языке известна как "Приемы объектно-ориентированного проектирования. Паттерны проектирования") и которая вышла в свет в 1994 году. А сам коллектив авторов нередко называют "Банда четырёх" или </a:t>
+            </a:r>
+            <a:r>
+              <a:rPr lang="ru-RU" sz="1200" b="0" i="0" kern="1200" dirty="0" err="1" smtClean="0">
+                <a:solidFill>
+                  <a:schemeClr val="tx1"/>
+                </a:solidFill>
+                <a:effectLst/>
+                <a:latin typeface="+mn-lt"/>
+                <a:ea typeface="+mn-ea"/>
+                <a:cs typeface="+mn-cs"/>
+              </a:rPr>
+              <a:t>Gang</a:t>
+            </a:r>
+            <a:r>
+              <a:rPr lang="ru-RU" sz="1200" b="0" i="0" kern="1200" dirty="0" smtClean="0">
+                <a:solidFill>
+                  <a:schemeClr val="tx1"/>
+                </a:solidFill>
+                <a:effectLst/>
+                <a:latin typeface="+mn-lt"/>
+                <a:ea typeface="+mn-ea"/>
+                <a:cs typeface="+mn-cs"/>
+              </a:rPr>
+              <a:t> </a:t>
+            </a:r>
+            <a:r>
+              <a:rPr lang="ru-RU" sz="1200" b="0" i="0" kern="1200" dirty="0" err="1" smtClean="0">
+                <a:solidFill>
+                  <a:schemeClr val="tx1"/>
+                </a:solidFill>
+                <a:effectLst/>
+                <a:latin typeface="+mn-lt"/>
+                <a:ea typeface="+mn-ea"/>
+                <a:cs typeface="+mn-cs"/>
+              </a:rPr>
+              <a:t>of</a:t>
+            </a:r>
+            <a:r>
+              <a:rPr lang="ru-RU" sz="1200" b="0" i="0" kern="1200" dirty="0" smtClean="0">
+                <a:solidFill>
+                  <a:schemeClr val="tx1"/>
+                </a:solidFill>
+                <a:effectLst/>
+                <a:latin typeface="+mn-lt"/>
+                <a:ea typeface="+mn-ea"/>
+                <a:cs typeface="+mn-cs"/>
+              </a:rPr>
+              <a:t> </a:t>
+            </a:r>
+            <a:r>
+              <a:rPr lang="ru-RU" sz="1200" b="0" i="0" kern="1200" dirty="0" err="1" smtClean="0">
+                <a:solidFill>
+                  <a:schemeClr val="tx1"/>
+                </a:solidFill>
+                <a:effectLst/>
+                <a:latin typeface="+mn-lt"/>
+                <a:ea typeface="+mn-ea"/>
+                <a:cs typeface="+mn-cs"/>
+              </a:rPr>
+              <a:t>Four</a:t>
+            </a:r>
+            <a:r>
+              <a:rPr lang="ru-RU" sz="1200" b="0" i="0" kern="1200" dirty="0" smtClean="0">
+                <a:solidFill>
+                  <a:schemeClr val="tx1"/>
+                </a:solidFill>
+                <a:effectLst/>
+                <a:latin typeface="+mn-lt"/>
+                <a:ea typeface="+mn-ea"/>
+                <a:cs typeface="+mn-cs"/>
+              </a:rPr>
+              <a:t> или сокращенно </a:t>
+            </a:r>
+            <a:r>
+              <a:rPr lang="ru-RU" sz="1200" b="0" i="0" kern="1200" dirty="0" err="1" smtClean="0">
+                <a:solidFill>
+                  <a:schemeClr val="tx1"/>
+                </a:solidFill>
+                <a:effectLst/>
+                <a:latin typeface="+mn-lt"/>
+                <a:ea typeface="+mn-ea"/>
+                <a:cs typeface="+mn-cs"/>
+              </a:rPr>
+              <a:t>GoF</a:t>
+            </a:r>
+            <a:r>
+              <a:rPr lang="ru-RU" sz="1200" b="0" i="0" kern="1200" dirty="0" smtClean="0">
+                <a:solidFill>
+                  <a:schemeClr val="tx1"/>
+                </a:solidFill>
+                <a:effectLst/>
+                <a:latin typeface="+mn-lt"/>
+                <a:ea typeface="+mn-ea"/>
+                <a:cs typeface="+mn-cs"/>
+              </a:rPr>
+              <a:t>. Данная книга по сути являлась первой масштабной попыткой описать распространенные способы проектирования программ. И со временем применение паттернов стало считаться хорошей практикой программирования.</a:t>
+            </a:r>
+            <a:endParaRPr lang="ru-RU" dirty="0"/>
           </a:p>
         </p:txBody>
       </p:sp>
@@ -1564,7 +1433,7 @@
     </p:spTree>
     <p:extLst>
       <p:ext uri="{BB962C8B-B14F-4D97-AF65-F5344CB8AC3E}">
-        <p14:creationId xmlns:p14="http://schemas.microsoft.com/office/powerpoint/2010/main" val="3734861573"/>
+        <p14:creationId xmlns:p14="http://schemas.microsoft.com/office/powerpoint/2010/main" val="2909007269"/>
       </p:ext>
     </p:extLst>
   </p:cSld>
@@ -1623,7 +1492,7 @@
           <a:bodyPr/>
           <a:lstStyle/>
           <a:p>
-            <a:endParaRPr lang="ru-RU"/>
+            <a:endParaRPr lang="ru-RU" dirty="0"/>
           </a:p>
         </p:txBody>
       </p:sp>
@@ -1654,7 +1523,7 @@
     </p:spTree>
     <p:extLst>
       <p:ext uri="{BB962C8B-B14F-4D97-AF65-F5344CB8AC3E}">
-        <p14:creationId xmlns:p14="http://schemas.microsoft.com/office/powerpoint/2010/main" val="2384211239"/>
+        <p14:creationId xmlns:p14="http://schemas.microsoft.com/office/powerpoint/2010/main" val="2703720360"/>
       </p:ext>
     </p:extLst>
   </p:cSld>
@@ -1713,7 +1582,7 @@
           <a:bodyPr/>
           <a:lstStyle/>
           <a:p>
-            <a:endParaRPr lang="ru-RU"/>
+            <a:endParaRPr lang="ru-RU" dirty="0"/>
           </a:p>
         </p:txBody>
       </p:sp>
@@ -1744,7 +1613,7 @@
     </p:spTree>
     <p:extLst>
       <p:ext uri="{BB962C8B-B14F-4D97-AF65-F5344CB8AC3E}">
-        <p14:creationId xmlns:p14="http://schemas.microsoft.com/office/powerpoint/2010/main" val="214693987"/>
+        <p14:creationId xmlns:p14="http://schemas.microsoft.com/office/powerpoint/2010/main" val="3453798331"/>
       </p:ext>
     </p:extLst>
   </p:cSld>
@@ -2123,7 +1992,7 @@
     </p:spTree>
     <p:extLst>
       <p:ext uri="{BB962C8B-B14F-4D97-AF65-F5344CB8AC3E}">
-        <p14:creationId xmlns:p14="http://schemas.microsoft.com/office/powerpoint/2010/main" val="3562214736"/>
+        <p14:creationId xmlns:p14="http://schemas.microsoft.com/office/powerpoint/2010/main" val="4290522804"/>
       </p:ext>
     </p:extLst>
   </p:cSld>
@@ -2412,7 +2281,7 @@
   <p:clrMap bg1="lt1" tx1="dk1" bg2="lt2" tx2="dk2" accent1="accent1" accent2="accent2" accent3="accent3" accent4="accent4" accent5="accent5" accent6="accent6" hlink="hlink" folHlink="folHlink"/>
   <p:sldLayoutIdLst>
     <p:sldLayoutId id="2147483675" r:id="rId1"/>
-    <p:sldLayoutId id="2147483686" r:id="rId2"/>
+    <p:sldLayoutId id="2147483676" r:id="rId2"/>
   </p:sldLayoutIdLst>
   <p:hf sldNum="0" hdr="0" ftr="0" dt="0"/>
   <p:txStyles>
@@ -2826,22 +2695,10 @@
                 <a:latin typeface="Bookman Old Style" panose="02050604050505020204" pitchFamily="18" charset="0"/>
                 <a:cs typeface="Times New Roman" panose="02020603050405020304" pitchFamily="18" charset="0"/>
               </a:rPr>
-              <a:t>Лекция </a:t>
-            </a:r>
-            <a:r>
-              <a:rPr lang="ru-RU" sz="2800" b="1" smtClean="0">
-                <a:solidFill>
-                  <a:schemeClr val="tx2">
-                    <a:lumMod val="50000"/>
-                  </a:schemeClr>
-                </a:solidFill>
-                <a:latin typeface="Bookman Old Style" panose="02050604050505020204" pitchFamily="18" charset="0"/>
-                <a:cs typeface="Times New Roman" panose="02020603050405020304" pitchFamily="18" charset="0"/>
-              </a:rPr>
-              <a:t>1.</a:t>
+              <a:t>Лекция 1.</a:t>
             </a:r>
             <a:br>
-              <a:rPr lang="ru-RU" sz="2800" b="1" smtClean="0">
+              <a:rPr lang="ru-RU" sz="2800" b="1" dirty="0" smtClean="0">
                 <a:solidFill>
                   <a:schemeClr val="tx2">
                     <a:lumMod val="50000"/>
@@ -3024,7 +2881,7 @@
         <p:spPr>
           <a:xfrm>
             <a:off x="877031" y="4490853"/>
-            <a:ext cx="11041341" cy="523220"/>
+            <a:ext cx="11041341" cy="1815882"/>
           </a:xfrm>
           <a:prstGeom prst="rect">
             <a:avLst/>
@@ -3051,7 +2908,121 @@
                 <a:latin typeface="Bookman Old Style" panose="02050604050505020204" pitchFamily="18" charset="0"/>
                 <a:cs typeface="Times New Roman" panose="02020603050405020304" pitchFamily="18" charset="0"/>
               </a:rPr>
-              <a:t>Классификация ПО</a:t>
+              <a:t>Классификация ПО </a:t>
+            </a:r>
+            <a:r>
+              <a:rPr lang="ru-RU" sz="2800" dirty="0" err="1">
+                <a:solidFill>
+                  <a:schemeClr val="tx2">
+                    <a:lumMod val="50000"/>
+                  </a:schemeClr>
+                </a:solidFill>
+                <a:latin typeface="Bookman Old Style" panose="02050604050505020204" pitchFamily="18" charset="0"/>
+                <a:cs typeface="Times New Roman" panose="02020603050405020304" pitchFamily="18" charset="0"/>
+              </a:rPr>
+              <a:t>по</a:t>
+            </a:r>
+            <a:r>
+              <a:rPr lang="ru-RU" sz="2800" dirty="0">
+                <a:solidFill>
+                  <a:schemeClr val="tx2">
+                    <a:lumMod val="50000"/>
+                  </a:schemeClr>
+                </a:solidFill>
+                <a:latin typeface="Bookman Old Style" panose="02050604050505020204" pitchFamily="18" charset="0"/>
+                <a:cs typeface="Times New Roman" panose="02020603050405020304" pitchFamily="18" charset="0"/>
+              </a:rPr>
+              <a:t> среде </a:t>
+            </a:r>
+            <a:r>
+              <a:rPr lang="ru-RU" sz="2800" dirty="0" smtClean="0">
+                <a:solidFill>
+                  <a:schemeClr val="tx2">
+                    <a:lumMod val="50000"/>
+                  </a:schemeClr>
+                </a:solidFill>
+                <a:latin typeface="Bookman Old Style" panose="02050604050505020204" pitchFamily="18" charset="0"/>
+                <a:cs typeface="Times New Roman" panose="02020603050405020304" pitchFamily="18" charset="0"/>
+              </a:rPr>
+              <a:t>исполнения</a:t>
+            </a:r>
+          </a:p>
+          <a:p>
+            <a:pPr marL="285750" indent="-285750">
+              <a:buFont typeface="Arial" panose="020B0604020202020204" pitchFamily="34" charset="0"/>
+              <a:buChar char="•"/>
+            </a:pPr>
+            <a:r>
+              <a:rPr lang="ru-RU" sz="2800" dirty="0">
+                <a:solidFill>
+                  <a:schemeClr val="tx2">
+                    <a:lumMod val="50000"/>
+                  </a:schemeClr>
+                </a:solidFill>
+                <a:latin typeface="Bookman Old Style" panose="02050604050505020204" pitchFamily="18" charset="0"/>
+                <a:cs typeface="Times New Roman" panose="02020603050405020304" pitchFamily="18" charset="0"/>
+              </a:rPr>
+              <a:t>Клиент-серверное </a:t>
+            </a:r>
+            <a:r>
+              <a:rPr lang="ru-RU" sz="2800" dirty="0" smtClean="0">
+                <a:solidFill>
+                  <a:schemeClr val="tx2">
+                    <a:lumMod val="50000"/>
+                  </a:schemeClr>
+                </a:solidFill>
+                <a:latin typeface="Bookman Old Style" panose="02050604050505020204" pitchFamily="18" charset="0"/>
+                <a:cs typeface="Times New Roman" panose="02020603050405020304" pitchFamily="18" charset="0"/>
+              </a:rPr>
+              <a:t>взаимодействие</a:t>
+            </a:r>
+          </a:p>
+          <a:p>
+            <a:pPr marL="285750" indent="-285750">
+              <a:buFont typeface="Arial" panose="020B0604020202020204" pitchFamily="34" charset="0"/>
+              <a:buChar char="•"/>
+            </a:pPr>
+            <a:r>
+              <a:rPr lang="ru-RU" sz="2800" dirty="0">
+                <a:solidFill>
+                  <a:schemeClr val="tx2">
+                    <a:lumMod val="50000"/>
+                  </a:schemeClr>
+                </a:solidFill>
+                <a:latin typeface="Bookman Old Style" panose="02050604050505020204" pitchFamily="18" charset="0"/>
+                <a:cs typeface="Times New Roman" panose="02020603050405020304" pitchFamily="18" charset="0"/>
+              </a:rPr>
+              <a:t>Проблема сложности и роль </a:t>
+            </a:r>
+            <a:r>
+              <a:rPr lang="ru-RU" sz="2800" dirty="0" smtClean="0">
+                <a:solidFill>
+                  <a:schemeClr val="tx2">
+                    <a:lumMod val="50000"/>
+                  </a:schemeClr>
+                </a:solidFill>
+                <a:latin typeface="Bookman Old Style" panose="02050604050505020204" pitchFamily="18" charset="0"/>
+                <a:cs typeface="Times New Roman" panose="02020603050405020304" pitchFamily="18" charset="0"/>
+              </a:rPr>
+              <a:t>архитектуры</a:t>
+            </a:r>
+          </a:p>
+          <a:p>
+            <a:pPr marL="285750" indent="-285750">
+              <a:buFont typeface="Arial" panose="020B0604020202020204" pitchFamily="34" charset="0"/>
+              <a:buChar char="•"/>
+            </a:pPr>
+            <a:r>
+              <a:rPr lang="ru-RU" sz="2800" dirty="0">
+                <a:solidFill>
+                  <a:schemeClr val="tx2">
+                    <a:lumMod val="50000"/>
+                  </a:schemeClr>
+                </a:solidFill>
+                <a:latin typeface="Bookman Old Style" panose="02050604050505020204" pitchFamily="18" charset="0"/>
+                <a:cs typeface="Times New Roman" panose="02020603050405020304" pitchFamily="18" charset="0"/>
+              </a:rPr>
+              <a:t>Фундаментальные принципы проектирования</a:t>
             </a:r>
             <a:endParaRPr lang="en-US" sz="2800" dirty="0" smtClean="0">
               <a:solidFill>
@@ -3080,7 +3051,7 @@
 </p:sld>
 </file>
 
-<file path=ppt/slides/slide10.xml><?xml version="1.0" encoding="utf-8"?>
+<file path=ppt/slides/slide2.xml><?xml version="1.0" encoding="utf-8"?>
 <p:sld xmlns:a="http://schemas.openxmlformats.org/drawingml/2006/main" xmlns:r="http://schemas.openxmlformats.org/officeDocument/2006/relationships" xmlns:p="http://schemas.openxmlformats.org/presentationml/2006/main">
   <p:cSld>
     <p:spTree>
@@ -3155,7 +3126,7 @@
                 <a:latin typeface="Bookman Old Style" panose="02050604050505020204" pitchFamily="18" charset="0"/>
                 <a:cs typeface="Times New Roman" panose="02020603050405020304" pitchFamily="18" charset="0"/>
               </a:rPr>
-              <a:t>Языки в </a:t>
+              <a:t>Десктоп (</a:t>
             </a:r>
             <a:r>
               <a:rPr lang="en-US" sz="2800" b="1" dirty="0">
@@ -3167,747 +3138,7 @@
                 <a:latin typeface="Bookman Old Style" panose="02050604050505020204" pitchFamily="18" charset="0"/>
                 <a:cs typeface="Times New Roman" panose="02020603050405020304" pitchFamily="18" charset="0"/>
               </a:rPr>
-              <a:t>Web</a:t>
-            </a:r>
-            <a:endParaRPr lang="ru-RU" sz="2800" b="1" dirty="0">
-              <a:solidFill>
-                <a:schemeClr val="tx2">
-                  <a:lumMod val="50000"/>
-                </a:schemeClr>
-              </a:solidFill>
-              <a:latin typeface="Bookman Old Style" panose="02050604050505020204" pitchFamily="18" charset="0"/>
-              <a:cs typeface="Times New Roman" panose="02020603050405020304" pitchFamily="18" charset="0"/>
-            </a:endParaRPr>
-          </a:p>
-        </p:txBody>
-      </p:sp>
-      <p:sp>
-        <p:nvSpPr>
-          <p:cNvPr id="7" name="Прямоугольник 6"/>
-          <p:cNvSpPr/>
-          <p:nvPr/>
-        </p:nvSpPr>
-        <p:spPr>
-          <a:xfrm>
-            <a:off x="0" y="654355"/>
-            <a:ext cx="12192000" cy="3970318"/>
-          </a:xfrm>
-          <a:prstGeom prst="rect">
-            <a:avLst/>
-          </a:prstGeom>
-        </p:spPr>
-        <p:txBody>
-          <a:bodyPr wrap="square" lIns="360000" rIns="360000">
-            <a:spAutoFit/>
-          </a:bodyPr>
-          <a:lstStyle/>
-          <a:p>
-            <a:pPr algn="just">
-              <a:lnSpc>
-                <a:spcPct val="150000"/>
-              </a:lnSpc>
-            </a:pPr>
-            <a:r>
-              <a:rPr lang="ru-RU" sz="2400" dirty="0">
-                <a:latin typeface="Bookman Old Style" panose="02050604050505020204" pitchFamily="18" charset="0"/>
-              </a:rPr>
-              <a:t>Веб делится на 2 подраздела: </a:t>
-            </a:r>
-            <a:r>
-              <a:rPr lang="ru-RU" sz="2400" b="1" dirty="0" err="1">
-                <a:latin typeface="Bookman Old Style" panose="02050604050505020204" pitchFamily="18" charset="0"/>
-              </a:rPr>
-              <a:t>бэкенд</a:t>
-            </a:r>
-            <a:r>
-              <a:rPr lang="ru-RU" sz="2400" dirty="0">
-                <a:latin typeface="Bookman Old Style" panose="02050604050505020204" pitchFamily="18" charset="0"/>
-              </a:rPr>
-              <a:t> и </a:t>
-            </a:r>
-            <a:r>
-              <a:rPr lang="ru-RU" sz="2400" b="1" dirty="0" err="1">
-                <a:latin typeface="Bookman Old Style" panose="02050604050505020204" pitchFamily="18" charset="0"/>
-              </a:rPr>
-              <a:t>фронтенд</a:t>
-            </a:r>
-            <a:r>
-              <a:rPr lang="ru-RU" sz="2400" dirty="0">
-                <a:latin typeface="Bookman Old Style" panose="02050604050505020204" pitchFamily="18" charset="0"/>
-              </a:rPr>
-              <a:t>. Любое веб-приложение в конечном итоге имеет ту часть, которая взаимодействует с пользователем, и почти всегда это тонкий клиент — браузер, в котором крутятся приложения. Если раньше это был просто </a:t>
-            </a:r>
-            <a:r>
-              <a:rPr lang="ru-RU" sz="2400" b="1" dirty="0">
-                <a:latin typeface="Bookman Old Style" panose="02050604050505020204" pitchFamily="18" charset="0"/>
-              </a:rPr>
-              <a:t>HTML</a:t>
-            </a:r>
-            <a:r>
-              <a:rPr lang="ru-RU" sz="2400" dirty="0">
-                <a:latin typeface="Bookman Old Style" panose="02050604050505020204" pitchFamily="18" charset="0"/>
-              </a:rPr>
-              <a:t>, и вся логика происходила на сервере, то сейчас логики в браузере становится все больше и больше, и он становится по-настоящему "толстым" и "тяжелым".</a:t>
-            </a:r>
-          </a:p>
-        </p:txBody>
-      </p:sp>
-      <p:pic>
-        <p:nvPicPr>
-          <p:cNvPr id="2" name="Рисунок 1"/>
-          <p:cNvPicPr>
-            <a:picLocks noChangeAspect="1"/>
-          </p:cNvPicPr>
-          <p:nvPr/>
-        </p:nvPicPr>
-        <p:blipFill>
-          <a:blip r:embed="rId3">
-            <a:extLst>
-              <a:ext uri="{28A0092B-C50C-407E-A947-70E740481C1C}">
-                <a14:useLocalDpi xmlns:a14="http://schemas.microsoft.com/office/drawing/2010/main" val="0"/>
-              </a:ext>
-            </a:extLst>
-          </a:blip>
-          <a:stretch>
-            <a:fillRect/>
-          </a:stretch>
-        </p:blipFill>
-        <p:spPr>
-          <a:xfrm>
-            <a:off x="2576945" y="4097481"/>
-            <a:ext cx="2646218" cy="2646218"/>
-          </a:xfrm>
-          <a:prstGeom prst="rect">
-            <a:avLst/>
-          </a:prstGeom>
-        </p:spPr>
-      </p:pic>
-      <p:pic>
-        <p:nvPicPr>
-          <p:cNvPr id="3" name="Рисунок 2"/>
-          <p:cNvPicPr>
-            <a:picLocks noChangeAspect="1"/>
-          </p:cNvPicPr>
-          <p:nvPr/>
-        </p:nvPicPr>
-        <p:blipFill>
-          <a:blip r:embed="rId4" cstate="print">
-            <a:extLst>
-              <a:ext uri="{28A0092B-C50C-407E-A947-70E740481C1C}">
-                <a14:useLocalDpi xmlns:a14="http://schemas.microsoft.com/office/drawing/2010/main" val="0"/>
-              </a:ext>
-            </a:extLst>
-          </a:blip>
-          <a:stretch>
-            <a:fillRect/>
-          </a:stretch>
-        </p:blipFill>
-        <p:spPr>
-          <a:xfrm>
-            <a:off x="5369518" y="4097481"/>
-            <a:ext cx="1874297" cy="2646218"/>
-          </a:xfrm>
-          <a:prstGeom prst="rect">
-            <a:avLst/>
-          </a:prstGeom>
-        </p:spPr>
-      </p:pic>
-      <p:pic>
-        <p:nvPicPr>
-          <p:cNvPr id="6" name="Рисунок 5"/>
-          <p:cNvPicPr>
-            <a:picLocks noChangeAspect="1"/>
-          </p:cNvPicPr>
-          <p:nvPr/>
-        </p:nvPicPr>
-        <p:blipFill>
-          <a:blip r:embed="rId5" cstate="print">
-            <a:extLst>
-              <a:ext uri="{28A0092B-C50C-407E-A947-70E740481C1C}">
-                <a14:useLocalDpi xmlns:a14="http://schemas.microsoft.com/office/drawing/2010/main" val="0"/>
-              </a:ext>
-            </a:extLst>
-          </a:blip>
-          <a:stretch>
-            <a:fillRect/>
-          </a:stretch>
-        </p:blipFill>
-        <p:spPr>
-          <a:xfrm>
-            <a:off x="7640036" y="4097481"/>
-            <a:ext cx="2444651" cy="2646218"/>
-          </a:xfrm>
-          <a:prstGeom prst="rect">
-            <a:avLst/>
-          </a:prstGeom>
-        </p:spPr>
-      </p:pic>
-    </p:spTree>
-    <p:extLst>
-      <p:ext uri="{BB962C8B-B14F-4D97-AF65-F5344CB8AC3E}">
-        <p14:creationId xmlns:p14="http://schemas.microsoft.com/office/powerpoint/2010/main" val="4173968823"/>
-      </p:ext>
-    </p:extLst>
-  </p:cSld>
-  <p:clrMapOvr>
-    <a:masterClrMapping/>
-  </p:clrMapOvr>
-  <p:timing>
-    <p:tnLst>
-      <p:par>
-        <p:cTn id="1" dur="indefinite" restart="never" nodeType="tmRoot"/>
-      </p:par>
-    </p:tnLst>
-  </p:timing>
-</p:sld>
-</file>
-
-<file path=ppt/slides/slide11.xml><?xml version="1.0" encoding="utf-8"?>
-<p:sld xmlns:a="http://schemas.openxmlformats.org/drawingml/2006/main" xmlns:r="http://schemas.openxmlformats.org/officeDocument/2006/relationships" xmlns:p="http://schemas.openxmlformats.org/presentationml/2006/main">
-  <p:cSld>
-    <p:spTree>
-      <p:nvGrpSpPr>
-        <p:cNvPr id="1" name=""/>
-        <p:cNvGrpSpPr/>
-        <p:nvPr/>
-      </p:nvGrpSpPr>
-      <p:grpSpPr>
-        <a:xfrm>
-          <a:off x="0" y="0"/>
-          <a:ext cx="0" cy="0"/>
-          <a:chOff x="0" y="0"/>
-          <a:chExt cx="0" cy="0"/>
-        </a:xfrm>
-      </p:grpSpPr>
-      <p:sp>
-        <p:nvSpPr>
-          <p:cNvPr id="11" name="Rectangle 28" descr="Светлый диагональный 2"/>
-          <p:cNvSpPr>
-            <a:spLocks noChangeArrowheads="1"/>
-          </p:cNvSpPr>
-          <p:nvPr/>
-        </p:nvSpPr>
-        <p:spPr bwMode="auto">
-          <a:xfrm>
-            <a:off x="0" y="-1"/>
-            <a:ext cx="12192000" cy="654357"/>
-          </a:xfrm>
-          <a:prstGeom prst="rect">
-            <a:avLst/>
-          </a:prstGeom>
-          <a:pattFill prst="ltUpDiag">
-            <a:fgClr>
-              <a:schemeClr val="accent1">
-                <a:lumMod val="40000"/>
-                <a:lumOff val="60000"/>
-              </a:schemeClr>
-            </a:fgClr>
-            <a:bgClr>
-              <a:srgbClr val="FFFFFF"/>
-            </a:bgClr>
-          </a:pattFill>
-          <a:ln w="15875" algn="ctr">
-            <a:solidFill>
-              <a:schemeClr val="accent5">
-                <a:lumMod val="50000"/>
-              </a:schemeClr>
-            </a:solidFill>
-            <a:miter lim="800000"/>
-            <a:headEnd/>
-            <a:tailEnd/>
-          </a:ln>
-          <a:effectLst/>
-        </p:spPr>
-        <p:txBody>
-          <a:bodyPr vert="horz" wrap="square" lIns="18000" tIns="18000" rIns="18000" bIns="18000" numCol="1" anchor="ctr" anchorCtr="0" compatLnSpc="1">
-            <a:prstTxWarp prst="textNoShape">
-              <a:avLst/>
-            </a:prstTxWarp>
-          </a:bodyPr>
-          <a:lstStyle/>
-          <a:p>
-            <a:pPr algn="ctr"/>
-            <a:r>
-              <a:rPr lang="ru-RU" sz="2800" b="1" dirty="0">
-                <a:solidFill>
-                  <a:schemeClr val="tx2">
-                    <a:lumMod val="50000"/>
-                  </a:schemeClr>
-                </a:solidFill>
-                <a:latin typeface="Bookman Old Style" panose="02050604050505020204" pitchFamily="18" charset="0"/>
-                <a:cs typeface="Times New Roman" panose="02020603050405020304" pitchFamily="18" charset="0"/>
-              </a:rPr>
-              <a:t>Языки в </a:t>
-            </a:r>
-            <a:r>
-              <a:rPr lang="en-US" sz="2800" b="1" dirty="0">
-                <a:solidFill>
-                  <a:schemeClr val="tx2">
-                    <a:lumMod val="50000"/>
-                  </a:schemeClr>
-                </a:solidFill>
-                <a:latin typeface="Bookman Old Style" panose="02050604050505020204" pitchFamily="18" charset="0"/>
-                <a:cs typeface="Times New Roman" panose="02020603050405020304" pitchFamily="18" charset="0"/>
-              </a:rPr>
-              <a:t>Web</a:t>
-            </a:r>
-            <a:endParaRPr lang="ru-RU" sz="2800" b="1" dirty="0">
-              <a:solidFill>
-                <a:schemeClr val="tx2">
-                  <a:lumMod val="50000"/>
-                </a:schemeClr>
-              </a:solidFill>
-              <a:latin typeface="Bookman Old Style" panose="02050604050505020204" pitchFamily="18" charset="0"/>
-              <a:cs typeface="Times New Roman" panose="02020603050405020304" pitchFamily="18" charset="0"/>
-            </a:endParaRPr>
-          </a:p>
-        </p:txBody>
-      </p:sp>
-      <p:sp>
-        <p:nvSpPr>
-          <p:cNvPr id="7" name="Прямоугольник 6"/>
-          <p:cNvSpPr/>
-          <p:nvPr/>
-        </p:nvSpPr>
-        <p:spPr>
-          <a:xfrm>
-            <a:off x="0" y="654355"/>
-            <a:ext cx="12192000" cy="6186309"/>
-          </a:xfrm>
-          <a:prstGeom prst="rect">
-            <a:avLst/>
-          </a:prstGeom>
-        </p:spPr>
-        <p:txBody>
-          <a:bodyPr wrap="square" lIns="360000" rIns="360000">
-            <a:spAutoFit/>
-          </a:bodyPr>
-          <a:lstStyle/>
-          <a:p>
-            <a:pPr algn="just">
-              <a:lnSpc>
-                <a:spcPct val="150000"/>
-              </a:lnSpc>
-            </a:pPr>
-            <a:r>
-              <a:rPr lang="en-US" sz="2400" b="1" dirty="0">
-                <a:latin typeface="Bookman Old Style" panose="02050604050505020204" pitchFamily="18" charset="0"/>
-              </a:rPr>
-              <a:t>Backend</a:t>
-            </a:r>
-          </a:p>
-          <a:p>
-            <a:pPr algn="just">
-              <a:lnSpc>
-                <a:spcPct val="150000"/>
-              </a:lnSpc>
-            </a:pPr>
-            <a:r>
-              <a:rPr lang="en-US" sz="2400" dirty="0">
-                <a:latin typeface="Bookman Old Style" panose="02050604050505020204" pitchFamily="18" charset="0"/>
-              </a:rPr>
-              <a:t>PHP, Ruby, Python, JavaScript (Node), Perl</a:t>
-            </a:r>
-          </a:p>
-          <a:p>
-            <a:pPr algn="just">
-              <a:lnSpc>
-                <a:spcPct val="150000"/>
-              </a:lnSpc>
-            </a:pPr>
-            <a:r>
-              <a:rPr lang="en-US" sz="2400" dirty="0">
-                <a:latin typeface="Bookman Old Style" panose="02050604050505020204" pitchFamily="18" charset="0"/>
-              </a:rPr>
-              <a:t>Go, C#, Elixir, Rust, Java, </a:t>
-            </a:r>
-            <a:r>
-              <a:rPr lang="en-US" sz="2400" dirty="0" err="1">
-                <a:latin typeface="Bookman Old Style" panose="02050604050505020204" pitchFamily="18" charset="0"/>
-              </a:rPr>
-              <a:t>Clojure</a:t>
-            </a:r>
-            <a:r>
-              <a:rPr lang="en-US" sz="2400" dirty="0">
-                <a:latin typeface="Bookman Old Style" panose="02050604050505020204" pitchFamily="18" charset="0"/>
-              </a:rPr>
-              <a:t>, </a:t>
-            </a:r>
-            <a:r>
-              <a:rPr lang="en-US" sz="2400" dirty="0" err="1">
-                <a:latin typeface="Bookman Old Style" panose="02050604050505020204" pitchFamily="18" charset="0"/>
-              </a:rPr>
-              <a:t>Kotlin</a:t>
-            </a:r>
-            <a:r>
-              <a:rPr lang="en-US" sz="2400" dirty="0">
-                <a:latin typeface="Bookman Old Style" panose="02050604050505020204" pitchFamily="18" charset="0"/>
-              </a:rPr>
-              <a:t>, </a:t>
-            </a:r>
-            <a:r>
-              <a:rPr lang="en-US" sz="2400" dirty="0" smtClean="0">
-                <a:latin typeface="Bookman Old Style" panose="02050604050505020204" pitchFamily="18" charset="0"/>
-              </a:rPr>
-              <a:t>Scala</a:t>
-            </a:r>
-            <a:endParaRPr lang="ru-RU" sz="2400" dirty="0" smtClean="0">
-              <a:latin typeface="Bookman Old Style" panose="02050604050505020204" pitchFamily="18" charset="0"/>
-            </a:endParaRPr>
-          </a:p>
-          <a:p>
-            <a:pPr algn="just">
-              <a:lnSpc>
-                <a:spcPct val="150000"/>
-              </a:lnSpc>
-            </a:pPr>
-            <a:endParaRPr lang="ru-RU" sz="2400" dirty="0">
-              <a:latin typeface="Bookman Old Style" panose="02050604050505020204" pitchFamily="18" charset="0"/>
-            </a:endParaRPr>
-          </a:p>
-          <a:p>
-            <a:pPr algn="just">
-              <a:lnSpc>
-                <a:spcPct val="150000"/>
-              </a:lnSpc>
-            </a:pPr>
-            <a:r>
-              <a:rPr lang="ru-RU" sz="2400" dirty="0" err="1" smtClean="0">
-                <a:latin typeface="Bookman Old Style" panose="02050604050505020204" pitchFamily="18" charset="0"/>
-              </a:rPr>
-              <a:t>Бэкендеры</a:t>
-            </a:r>
-            <a:r>
-              <a:rPr lang="ru-RU" sz="2400" dirty="0" smtClean="0">
-                <a:latin typeface="Bookman Old Style" panose="02050604050505020204" pitchFamily="18" charset="0"/>
-              </a:rPr>
-              <a:t> ответственны </a:t>
-            </a:r>
-            <a:r>
-              <a:rPr lang="ru-RU" sz="2400" dirty="0">
-                <a:latin typeface="Bookman Old Style" panose="02050604050505020204" pitchFamily="18" charset="0"/>
-              </a:rPr>
-              <a:t>за </a:t>
-            </a:r>
-            <a:r>
-              <a:rPr lang="ru-RU" sz="2400" dirty="0" smtClean="0">
-                <a:latin typeface="Bookman Old Style" panose="02050604050505020204" pitchFamily="18" charset="0"/>
-              </a:rPr>
-              <a:t>серверную </a:t>
-            </a:r>
-            <a:r>
-              <a:rPr lang="ru-RU" sz="2400" dirty="0">
-                <a:latin typeface="Bookman Old Style" panose="02050604050505020204" pitchFamily="18" charset="0"/>
-              </a:rPr>
-              <a:t>часть, то есть за то, что обеспечивает работу сервиса — взаимодействие с базами данных, обработку информации и вычисления. Сейчас, учитывая обилие веб-сервисов, это один из самых популярных видов программистов</a:t>
-            </a:r>
-            <a:r>
-              <a:rPr lang="ru-RU" sz="2400" dirty="0" smtClean="0">
-                <a:latin typeface="Bookman Old Style" panose="02050604050505020204" pitchFamily="18" charset="0"/>
-              </a:rPr>
-              <a:t>.</a:t>
-            </a:r>
-            <a:endParaRPr lang="en-US" sz="2400" dirty="0">
-              <a:latin typeface="Bookman Old Style" panose="02050604050505020204" pitchFamily="18" charset="0"/>
-            </a:endParaRPr>
-          </a:p>
-          <a:p>
-            <a:pPr algn="just">
-              <a:lnSpc>
-                <a:spcPct val="150000"/>
-              </a:lnSpc>
-            </a:pPr>
-            <a:r>
-              <a:rPr lang="en-US" sz="2400" b="1" dirty="0" smtClean="0">
-                <a:latin typeface="Bookman Old Style" panose="02050604050505020204" pitchFamily="18" charset="0"/>
-              </a:rPr>
-              <a:t>Roadmap</a:t>
-            </a:r>
-            <a:r>
-              <a:rPr lang="en-US" sz="2400" dirty="0" smtClean="0">
-                <a:latin typeface="Bookman Old Style" panose="02050604050505020204" pitchFamily="18" charset="0"/>
-              </a:rPr>
-              <a:t> </a:t>
-            </a:r>
-            <a:r>
-              <a:rPr lang="ru-RU" sz="2400" dirty="0" smtClean="0">
-                <a:latin typeface="Bookman Old Style" panose="02050604050505020204" pitchFamily="18" charset="0"/>
-              </a:rPr>
-              <a:t>для </a:t>
-            </a:r>
-            <a:r>
-              <a:rPr lang="en-US" sz="2400" dirty="0" smtClean="0">
-                <a:latin typeface="Bookman Old Style" panose="02050604050505020204" pitchFamily="18" charset="0"/>
-              </a:rPr>
-              <a:t>C# ASP Net </a:t>
-            </a:r>
-            <a:r>
-              <a:rPr lang="ru-RU" sz="2400" dirty="0" smtClean="0">
-                <a:latin typeface="Bookman Old Style" panose="02050604050505020204" pitchFamily="18" charset="0"/>
-              </a:rPr>
-              <a:t>разработчика:</a:t>
-            </a:r>
-          </a:p>
-          <a:p>
-            <a:pPr algn="just">
-              <a:lnSpc>
-                <a:spcPct val="150000"/>
-              </a:lnSpc>
-            </a:pPr>
-            <a:r>
-              <a:rPr lang="en-US" sz="2400" dirty="0">
-                <a:latin typeface="Bookman Old Style" panose="02050604050505020204" pitchFamily="18" charset="0"/>
-                <a:hlinkClick r:id="rId3"/>
-              </a:rPr>
-              <a:t>https://</a:t>
-            </a:r>
-            <a:r>
-              <a:rPr lang="en-US" sz="2400" dirty="0" smtClean="0">
-                <a:latin typeface="Bookman Old Style" panose="02050604050505020204" pitchFamily="18" charset="0"/>
-                <a:hlinkClick r:id="rId3"/>
-              </a:rPr>
-              <a:t>github.com/MoienTajik/AspNetCore-Developer-Roadmap/blob/master/aspnetcore-developer-roadmap.png</a:t>
-            </a:r>
-            <a:r>
-              <a:rPr lang="ru-RU" sz="2400" dirty="0" smtClean="0">
-                <a:latin typeface="Bookman Old Style" panose="02050604050505020204" pitchFamily="18" charset="0"/>
-              </a:rPr>
-              <a:t> </a:t>
-            </a:r>
-            <a:endParaRPr lang="ru-RU" sz="2400" dirty="0">
-              <a:latin typeface="Bookman Old Style" panose="02050604050505020204" pitchFamily="18" charset="0"/>
-            </a:endParaRPr>
-          </a:p>
-        </p:txBody>
-      </p:sp>
-      <p:pic>
-        <p:nvPicPr>
-          <p:cNvPr id="2" name="Рисунок 1"/>
-          <p:cNvPicPr>
-            <a:picLocks noChangeAspect="1"/>
-          </p:cNvPicPr>
-          <p:nvPr/>
-        </p:nvPicPr>
-        <p:blipFill>
-          <a:blip r:embed="rId4" cstate="print">
-            <a:extLst>
-              <a:ext uri="{28A0092B-C50C-407E-A947-70E740481C1C}">
-                <a14:useLocalDpi xmlns:a14="http://schemas.microsoft.com/office/drawing/2010/main" val="0"/>
-              </a:ext>
-            </a:extLst>
-          </a:blip>
-          <a:stretch>
-            <a:fillRect/>
-          </a:stretch>
-        </p:blipFill>
-        <p:spPr>
-          <a:xfrm>
-            <a:off x="7808007" y="810028"/>
-            <a:ext cx="1732607" cy="1901536"/>
-          </a:xfrm>
-          <a:prstGeom prst="rect">
-            <a:avLst/>
-          </a:prstGeom>
-        </p:spPr>
-      </p:pic>
-      <p:pic>
-        <p:nvPicPr>
-          <p:cNvPr id="3" name="Рисунок 2"/>
-          <p:cNvPicPr>
-            <a:picLocks noChangeAspect="1"/>
-          </p:cNvPicPr>
-          <p:nvPr/>
-        </p:nvPicPr>
-        <p:blipFill>
-          <a:blip r:embed="rId5" cstate="print">
-            <a:extLst>
-              <a:ext uri="{28A0092B-C50C-407E-A947-70E740481C1C}">
-                <a14:useLocalDpi xmlns:a14="http://schemas.microsoft.com/office/drawing/2010/main" val="0"/>
-              </a:ext>
-            </a:extLst>
-          </a:blip>
-          <a:stretch>
-            <a:fillRect/>
-          </a:stretch>
-        </p:blipFill>
-        <p:spPr>
-          <a:xfrm>
-            <a:off x="9540614" y="657234"/>
-            <a:ext cx="2186150" cy="1180180"/>
-          </a:xfrm>
-          <a:prstGeom prst="rect">
-            <a:avLst/>
-          </a:prstGeom>
-        </p:spPr>
-      </p:pic>
-      <p:pic>
-        <p:nvPicPr>
-          <p:cNvPr id="4" name="Рисунок 3"/>
-          <p:cNvPicPr>
-            <a:picLocks noChangeAspect="1"/>
-          </p:cNvPicPr>
-          <p:nvPr/>
-        </p:nvPicPr>
-        <p:blipFill>
-          <a:blip r:embed="rId6" cstate="print">
-            <a:extLst>
-              <a:ext uri="{28A0092B-C50C-407E-A947-70E740481C1C}">
-                <a14:useLocalDpi xmlns:a14="http://schemas.microsoft.com/office/drawing/2010/main" val="0"/>
-              </a:ext>
-            </a:extLst>
-          </a:blip>
-          <a:stretch>
-            <a:fillRect/>
-          </a:stretch>
-        </p:blipFill>
-        <p:spPr>
-          <a:xfrm>
-            <a:off x="9690695" y="1837415"/>
-            <a:ext cx="1885988" cy="1155167"/>
-          </a:xfrm>
-          <a:prstGeom prst="rect">
-            <a:avLst/>
-          </a:prstGeom>
-        </p:spPr>
-      </p:pic>
-      <p:pic>
-        <p:nvPicPr>
-          <p:cNvPr id="5" name="Рисунок 4"/>
-          <p:cNvPicPr>
-            <a:picLocks noChangeAspect="1"/>
-          </p:cNvPicPr>
-          <p:nvPr/>
-        </p:nvPicPr>
-        <p:blipFill>
-          <a:blip r:embed="rId7" cstate="print">
-            <a:extLst>
-              <a:ext uri="{28A0092B-C50C-407E-A947-70E740481C1C}">
-                <a14:useLocalDpi xmlns:a14="http://schemas.microsoft.com/office/drawing/2010/main" val="0"/>
-              </a:ext>
-            </a:extLst>
-          </a:blip>
-          <a:stretch>
-            <a:fillRect/>
-          </a:stretch>
-        </p:blipFill>
-        <p:spPr>
-          <a:xfrm>
-            <a:off x="6889495" y="2328309"/>
-            <a:ext cx="768431" cy="766510"/>
-          </a:xfrm>
-          <a:prstGeom prst="rect">
-            <a:avLst/>
-          </a:prstGeom>
-        </p:spPr>
-      </p:pic>
-    </p:spTree>
-    <p:extLst>
-      <p:ext uri="{BB962C8B-B14F-4D97-AF65-F5344CB8AC3E}">
-        <p14:creationId xmlns:p14="http://schemas.microsoft.com/office/powerpoint/2010/main" val="3695028274"/>
-      </p:ext>
-    </p:extLst>
-  </p:cSld>
-  <p:clrMapOvr>
-    <a:masterClrMapping/>
-  </p:clrMapOvr>
-  <p:timing>
-    <p:tnLst>
-      <p:par>
-        <p:cTn id="1" dur="indefinite" restart="never" nodeType="tmRoot"/>
-      </p:par>
-    </p:tnLst>
-  </p:timing>
-</p:sld>
-</file>
-
-<file path=ppt/slides/slide12.xml><?xml version="1.0" encoding="utf-8"?>
-<p:sld xmlns:a="http://schemas.openxmlformats.org/drawingml/2006/main" xmlns:r="http://schemas.openxmlformats.org/officeDocument/2006/relationships" xmlns:p="http://schemas.openxmlformats.org/presentationml/2006/main">
-  <p:cSld>
-    <p:spTree>
-      <p:nvGrpSpPr>
-        <p:cNvPr id="1" name=""/>
-        <p:cNvGrpSpPr/>
-        <p:nvPr/>
-      </p:nvGrpSpPr>
-      <p:grpSpPr>
-        <a:xfrm>
-          <a:off x="0" y="0"/>
-          <a:ext cx="0" cy="0"/>
-          <a:chOff x="0" y="0"/>
-          <a:chExt cx="0" cy="0"/>
-        </a:xfrm>
-      </p:grpSpPr>
-      <p:sp>
-        <p:nvSpPr>
-          <p:cNvPr id="11" name="Rectangle 28" descr="Светлый диагональный 2"/>
-          <p:cNvSpPr>
-            <a:spLocks noChangeArrowheads="1"/>
-          </p:cNvSpPr>
-          <p:nvPr/>
-        </p:nvSpPr>
-        <p:spPr bwMode="auto">
-          <a:xfrm>
-            <a:off x="0" y="-1"/>
-            <a:ext cx="12192000" cy="654357"/>
-          </a:xfrm>
-          <a:prstGeom prst="rect">
-            <a:avLst/>
-          </a:prstGeom>
-          <a:pattFill prst="ltUpDiag">
-            <a:fgClr>
-              <a:schemeClr val="accent1">
-                <a:lumMod val="40000"/>
-                <a:lumOff val="60000"/>
-              </a:schemeClr>
-            </a:fgClr>
-            <a:bgClr>
-              <a:srgbClr val="FFFFFF"/>
-            </a:bgClr>
-          </a:pattFill>
-          <a:ln w="15875" algn="ctr">
-            <a:solidFill>
-              <a:schemeClr val="accent5">
-                <a:lumMod val="50000"/>
-              </a:schemeClr>
-            </a:solidFill>
-            <a:miter lim="800000"/>
-            <a:headEnd/>
-            <a:tailEnd/>
-          </a:ln>
-          <a:effectLst/>
-        </p:spPr>
-        <p:txBody>
-          <a:bodyPr vert="horz" wrap="square" lIns="18000" tIns="18000" rIns="18000" bIns="18000" numCol="1" anchor="ctr" anchorCtr="0" compatLnSpc="1">
-            <a:prstTxWarp prst="textNoShape">
-              <a:avLst/>
-            </a:prstTxWarp>
-          </a:bodyPr>
-          <a:lstStyle/>
-          <a:p>
-            <a:pPr algn="ctr"/>
-            <a:r>
-              <a:rPr lang="ru-RU" sz="2800" b="1" dirty="0">
-                <a:solidFill>
-                  <a:schemeClr val="tx2">
-                    <a:lumMod val="50000"/>
-                  </a:schemeClr>
-                </a:solidFill>
-                <a:latin typeface="Bookman Old Style" panose="02050604050505020204" pitchFamily="18" charset="0"/>
-                <a:cs typeface="Times New Roman" panose="02020603050405020304" pitchFamily="18" charset="0"/>
-              </a:rPr>
-              <a:t>Языки в </a:t>
-            </a:r>
-            <a:r>
-              <a:rPr lang="en-US" sz="2800" b="1" dirty="0">
-                <a:solidFill>
-                  <a:schemeClr val="tx2">
-                    <a:lumMod val="50000"/>
-                  </a:schemeClr>
-                </a:solidFill>
-                <a:latin typeface="Bookman Old Style" panose="02050604050505020204" pitchFamily="18" charset="0"/>
-                <a:cs typeface="Times New Roman" panose="02020603050405020304" pitchFamily="18" charset="0"/>
-              </a:rPr>
-              <a:t>Web</a:t>
+              <a:t>Desktop)</a:t>
             </a:r>
             <a:endParaRPr lang="ru-RU" sz="2800" b="1" dirty="0">
               <a:solidFill>
@@ -3948,12 +3179,24 @@
               </a:lnSpc>
             </a:pPr>
             <a:r>
-              <a:rPr lang="en-US" sz="2400" b="1" dirty="0" smtClean="0">
-                <a:latin typeface="Bookman Old Style" panose="02050604050505020204" pitchFamily="18" charset="0"/>
-              </a:rPr>
-              <a:t>Frontend</a:t>
-            </a:r>
-            <a:endParaRPr lang="ru-RU" sz="2400" b="1" dirty="0" smtClean="0">
+              <a:rPr lang="ru-RU" sz="2400" dirty="0">
+                <a:latin typeface="Bookman Old Style" panose="02050604050505020204" pitchFamily="18" charset="0"/>
+              </a:rPr>
+              <a:t>Теряющее популярность, но все еще очень активное направление — это десктоп. </a:t>
+            </a:r>
+            <a:r>
+              <a:rPr lang="ru-RU" sz="2400" dirty="0" smtClean="0">
+                <a:latin typeface="Bookman Old Style" panose="02050604050505020204" pitchFamily="18" charset="0"/>
+              </a:rPr>
+              <a:t>Это так называемые "толстые клиенты", </a:t>
+            </a:r>
+            <a:r>
+              <a:rPr lang="ru-RU" sz="2400" dirty="0" smtClean="0">
+                <a:latin typeface="Bookman Old Style" panose="02050604050505020204" pitchFamily="18" charset="0"/>
+              </a:rPr>
+              <a:t>— когда почти вся логика и обработка данных происходит на компьютере пользователя.</a:t>
+            </a:r>
+            <a:endParaRPr lang="en-US" sz="2400" dirty="0" smtClean="0">
               <a:latin typeface="Bookman Old Style" panose="02050604050505020204" pitchFamily="18" charset="0"/>
             </a:endParaRPr>
           </a:p>
@@ -3963,25 +3206,7 @@
                 <a:spcPct val="150000"/>
               </a:lnSpc>
             </a:pPr>
-            <a:r>
-              <a:rPr lang="ru-RU" sz="2400" dirty="0" err="1" smtClean="0">
-                <a:latin typeface="Bookman Old Style" panose="02050604050505020204" pitchFamily="18" charset="0"/>
-              </a:rPr>
-              <a:t>JavaScript</a:t>
-            </a:r>
-            <a:r>
-              <a:rPr lang="ru-RU" sz="2400" dirty="0" smtClean="0">
-                <a:latin typeface="Bookman Old Style" panose="02050604050505020204" pitchFamily="18" charset="0"/>
-              </a:rPr>
-              <a:t>, </a:t>
-            </a:r>
-            <a:r>
-              <a:rPr lang="ru-RU" sz="2400" dirty="0" err="1">
-                <a:latin typeface="Bookman Old Style" panose="02050604050505020204" pitchFamily="18" charset="0"/>
-              </a:rPr>
-              <a:t>TypeScript</a:t>
-            </a:r>
-            <a:endParaRPr lang="ru-RU" sz="2400" dirty="0">
+            <a:endParaRPr lang="en-US" sz="2400" dirty="0" smtClean="0">
               <a:latin typeface="Bookman Old Style" panose="02050604050505020204" pitchFamily="18" charset="0"/>
             </a:endParaRPr>
           </a:p>
@@ -3992,52 +3217,76 @@
               </a:lnSpc>
             </a:pPr>
             <a:r>
+              <a:rPr lang="ru-RU" sz="2400" dirty="0" smtClean="0">
+                <a:latin typeface="Bookman Old Style" panose="02050604050505020204" pitchFamily="18" charset="0"/>
+              </a:rPr>
+              <a:t>В </a:t>
+            </a:r>
+            <a:r>
+              <a:rPr lang="ru-RU" sz="2400" dirty="0">
+                <a:latin typeface="Bookman Old Style" panose="02050604050505020204" pitchFamily="18" charset="0"/>
+              </a:rPr>
+              <a:t>этом направлении всегда были популярны такие языки, как </a:t>
+            </a:r>
+            <a:r>
+              <a:rPr lang="ru-RU" sz="2400" b="1" dirty="0">
+                <a:latin typeface="Bookman Old Style" panose="02050604050505020204" pitchFamily="18" charset="0"/>
+              </a:rPr>
+              <a:t>С++</a:t>
+            </a:r>
+            <a:r>
+              <a:rPr lang="ru-RU" sz="2400" dirty="0">
+                <a:latin typeface="Bookman Old Style" panose="02050604050505020204" pitchFamily="18" charset="0"/>
+              </a:rPr>
+              <a:t>, </a:t>
+            </a:r>
+            <a:r>
               <a:rPr lang="ru-RU" sz="2400" b="1" dirty="0" err="1">
                 <a:latin typeface="Bookman Old Style" panose="02050604050505020204" pitchFamily="18" charset="0"/>
               </a:rPr>
-              <a:t>JavaScript</a:t>
+              <a:t>Java</a:t>
             </a:r>
             <a:r>
               <a:rPr lang="ru-RU" sz="2400" dirty="0">
                 <a:latin typeface="Bookman Old Style" panose="02050604050505020204" pitchFamily="18" charset="0"/>
               </a:rPr>
-              <a:t> присутствует и в </a:t>
-            </a:r>
-            <a:r>
-              <a:rPr lang="ru-RU" sz="2400" dirty="0" err="1">
-                <a:latin typeface="Bookman Old Style" panose="02050604050505020204" pitchFamily="18" charset="0"/>
-              </a:rPr>
-              <a:t>бэкенде</a:t>
+              <a:t> и </a:t>
+            </a:r>
+            <a:r>
+              <a:rPr lang="ru-RU" sz="2400" b="1" dirty="0">
+                <a:latin typeface="Bookman Old Style" panose="02050604050505020204" pitchFamily="18" charset="0"/>
+              </a:rPr>
+              <a:t>C#</a:t>
             </a:r>
             <a:r>
               <a:rPr lang="ru-RU" sz="2400" dirty="0">
                 <a:latin typeface="Bookman Old Style" panose="02050604050505020204" pitchFamily="18" charset="0"/>
               </a:rPr>
-              <a:t>, и во </a:t>
-            </a:r>
-            <a:r>
-              <a:rPr lang="ru-RU" sz="2400" dirty="0" err="1">
-                <a:latin typeface="Bookman Old Style" panose="02050604050505020204" pitchFamily="18" charset="0"/>
-              </a:rPr>
-              <a:t>фронтенде</a:t>
-            </a:r>
-            <a:r>
-              <a:rPr lang="ru-RU" sz="2400" dirty="0">
-                <a:latin typeface="Bookman Old Style" panose="02050604050505020204" pitchFamily="18" charset="0"/>
-              </a:rPr>
-              <a:t>, и он будет все больше проникать в незанятые ранее ниши. </a:t>
-            </a:r>
-            <a:r>
-              <a:rPr lang="ru-RU" sz="2400" dirty="0" err="1">
-                <a:latin typeface="Bookman Old Style" panose="02050604050505020204" pitchFamily="18" charset="0"/>
-              </a:rPr>
-              <a:t>JavaScript</a:t>
-            </a:r>
-            <a:r>
-              <a:rPr lang="ru-RU" sz="2400" dirty="0">
-                <a:latin typeface="Bookman Old Style" panose="02050604050505020204" pitchFamily="18" charset="0"/>
-              </a:rPr>
-              <a:t> сейчас очень активно развивается и становится всё более серьёзным и классным языком</a:t>
+              <a:t>, но на пятки признанным авторитетам наступают те языки, которые еще не так давно никто не планировал использовать для написания толстых клиентов</a:t>
+            </a:r>
+            <a:r>
+              <a:rPr lang="ru-RU" sz="2400" dirty="0" smtClean="0">
+                <a:latin typeface="Bookman Old Style" panose="02050604050505020204" pitchFamily="18" charset="0"/>
+              </a:rPr>
+              <a:t>.</a:t>
+            </a:r>
+            <a:r>
+              <a:rPr lang="en-US" sz="2400" dirty="0" smtClean="0">
+                <a:latin typeface="Bookman Old Style" panose="02050604050505020204" pitchFamily="18" charset="0"/>
+              </a:rPr>
+              <a:t> (</a:t>
+            </a:r>
+            <a:r>
+              <a:rPr lang="en-US" sz="2400" b="1" dirty="0" smtClean="0">
+                <a:latin typeface="Bookman Old Style" panose="02050604050505020204" pitchFamily="18" charset="0"/>
+              </a:rPr>
+              <a:t>Java Script</a:t>
+            </a:r>
+            <a:r>
+              <a:rPr lang="en-US" sz="2400" dirty="0" smtClean="0">
+                <a:latin typeface="Bookman Old Style" panose="02050604050505020204" pitchFamily="18" charset="0"/>
+              </a:rPr>
+              <a:t>)</a:t>
             </a:r>
             <a:r>
               <a:rPr lang="ru-RU" sz="2400" dirty="0" smtClean="0">
@@ -4052,43 +3301,47 @@
                 <a:spcPct val="150000"/>
               </a:lnSpc>
             </a:pPr>
-            <a:r>
-              <a:rPr lang="ru-RU" sz="2400" b="1" dirty="0" err="1" smtClean="0">
-                <a:latin typeface="Bookman Old Style" panose="02050604050505020204" pitchFamily="18" charset="0"/>
-              </a:rPr>
-              <a:t>TypeScript</a:t>
-            </a:r>
+            <a:endParaRPr lang="ru-RU" sz="2400" dirty="0">
+              <a:latin typeface="Bookman Old Style" panose="02050604050505020204" pitchFamily="18" charset="0"/>
+            </a:endParaRPr>
+          </a:p>
+          <a:p>
+            <a:pPr algn="just">
+              <a:lnSpc>
+                <a:spcPct val="150000"/>
+              </a:lnSpc>
+            </a:pPr>
             <a:r>
               <a:rPr lang="ru-RU" sz="2400" dirty="0" smtClean="0">
                 <a:latin typeface="Bookman Old Style" panose="02050604050505020204" pitchFamily="18" charset="0"/>
               </a:rPr>
-              <a:t> </a:t>
-            </a:r>
-            <a:r>
-              <a:rPr lang="ru-RU" sz="2400" dirty="0">
-                <a:latin typeface="Bookman Old Style" panose="02050604050505020204" pitchFamily="18" charset="0"/>
-              </a:rPr>
-              <a:t>— типизированный </a:t>
-            </a:r>
-            <a:r>
-              <a:rPr lang="ru-RU" sz="2400" dirty="0" err="1">
-                <a:latin typeface="Bookman Old Style" panose="02050604050505020204" pitchFamily="18" charset="0"/>
-              </a:rPr>
-              <a:t>JavaScript</a:t>
-            </a:r>
-            <a:r>
-              <a:rPr lang="ru-RU" sz="2400" dirty="0">
-                <a:latin typeface="Bookman Old Style" panose="02050604050505020204" pitchFamily="18" charset="0"/>
-              </a:rPr>
-              <a:t>. Облегчает разработку и уменьшает количество ошибок, потому что проверка соответствия указанных и используемых типов происходит перед запуском кода, а не во время его выполнения</a:t>
+              <a:t>На </a:t>
+            </a:r>
+            <a:r>
+              <a:rPr lang="en-US" sz="2400" dirty="0" smtClean="0">
+                <a:latin typeface="Bookman Old Style" panose="02050604050505020204" pitchFamily="18" charset="0"/>
+              </a:rPr>
+              <a:t>C# </a:t>
             </a:r>
             <a:r>
               <a:rPr lang="ru-RU" sz="2400" dirty="0" smtClean="0">
                 <a:latin typeface="Bookman Old Style" panose="02050604050505020204" pitchFamily="18" charset="0"/>
               </a:rPr>
-              <a:t>.</a:t>
-            </a:r>
-            <a:endParaRPr lang="ru-RU" sz="2400" dirty="0">
+              <a:t>удобно писать под </a:t>
+            </a:r>
+            <a:r>
+              <a:rPr lang="en-US" sz="2400" dirty="0" smtClean="0">
+                <a:latin typeface="Bookman Old Style" panose="02050604050505020204" pitchFamily="18" charset="0"/>
+              </a:rPr>
+              <a:t>Windows: </a:t>
+            </a:r>
+            <a:r>
+              <a:rPr lang="en-US" sz="2400" b="1" dirty="0" smtClean="0">
+                <a:latin typeface="Bookman Old Style" panose="02050604050505020204" pitchFamily="18" charset="0"/>
+              </a:rPr>
+              <a:t>Windows Forms, WPF.</a:t>
+            </a:r>
+            <a:endParaRPr lang="ru-RU" sz="2400" b="1" dirty="0">
               <a:latin typeface="Bookman Old Style" panose="02050604050505020204" pitchFamily="18" charset="0"/>
             </a:endParaRPr>
           </a:p>
@@ -4096,7 +3349,7 @@
       </p:sp>
       <p:pic>
         <p:nvPicPr>
-          <p:cNvPr id="4" name="Рисунок 3"/>
+          <p:cNvPr id="2" name="Рисунок 1"/>
           <p:cNvPicPr>
             <a:picLocks noChangeAspect="1"/>
           </p:cNvPicPr>
@@ -4116,98 +3369,8 @@
         </p:blipFill>
         <p:spPr>
           <a:xfrm>
-            <a:off x="4079891" y="765191"/>
-            <a:ext cx="1157127" cy="1157127"/>
-          </a:xfrm>
-          <a:prstGeom prst="rect">
-            <a:avLst/>
-          </a:prstGeom>
-        </p:spPr>
-      </p:pic>
-      <p:pic>
-        <p:nvPicPr>
-          <p:cNvPr id="5" name="Рисунок 4"/>
-          <p:cNvPicPr>
-            <a:picLocks noChangeAspect="1"/>
-          </p:cNvPicPr>
-          <p:nvPr/>
-        </p:nvPicPr>
-        <p:blipFill>
-          <a:blip r:embed="rId4" cstate="print">
-            <a:extLst>
-              <a:ext uri="{28A0092B-C50C-407E-A947-70E740481C1C}">
-                <a14:useLocalDpi xmlns:a14="http://schemas.microsoft.com/office/drawing/2010/main" val="0"/>
-              </a:ext>
-            </a:extLst>
-          </a:blip>
-          <a:stretch>
-            <a:fillRect/>
-          </a:stretch>
-        </p:blipFill>
-        <p:spPr>
-          <a:xfrm>
-            <a:off x="5668994" y="765189"/>
-            <a:ext cx="819585" cy="1157128"/>
-          </a:xfrm>
-          <a:prstGeom prst="rect">
-            <a:avLst/>
-          </a:prstGeom>
-        </p:spPr>
-      </p:pic>
-      <p:pic>
-        <p:nvPicPr>
-          <p:cNvPr id="6" name="Рисунок 5"/>
-          <p:cNvPicPr>
-            <a:picLocks noChangeAspect="1"/>
-          </p:cNvPicPr>
-          <p:nvPr/>
-        </p:nvPicPr>
-        <p:blipFill>
-          <a:blip r:embed="rId5" cstate="print">
-            <a:extLst>
-              <a:ext uri="{28A0092B-C50C-407E-A947-70E740481C1C}">
-                <a14:useLocalDpi xmlns:a14="http://schemas.microsoft.com/office/drawing/2010/main" val="0"/>
-              </a:ext>
-            </a:extLst>
-          </a:blip>
-          <a:stretch>
-            <a:fillRect/>
-          </a:stretch>
-        </p:blipFill>
-        <p:spPr>
-          <a:xfrm>
-            <a:off x="6920555" y="765190"/>
-            <a:ext cx="1068988" cy="1157127"/>
-          </a:xfrm>
-          <a:prstGeom prst="rect">
-            <a:avLst/>
-          </a:prstGeom>
-        </p:spPr>
-      </p:pic>
-      <p:pic>
-        <p:nvPicPr>
-          <p:cNvPr id="2" name="Рисунок 1"/>
-          <p:cNvPicPr>
-            <a:picLocks noChangeAspect="1"/>
-          </p:cNvPicPr>
-          <p:nvPr/>
-        </p:nvPicPr>
-        <p:blipFill>
-          <a:blip r:embed="rId6" cstate="print">
-            <a:extLst>
-              <a:ext uri="{28A0092B-C50C-407E-A947-70E740481C1C}">
-                <a14:useLocalDpi xmlns:a14="http://schemas.microsoft.com/office/drawing/2010/main" val="0"/>
-              </a:ext>
-            </a:extLst>
-          </a:blip>
-          <a:stretch>
-            <a:fillRect/>
-          </a:stretch>
-        </p:blipFill>
-        <p:spPr>
-          <a:xfrm>
-            <a:off x="8421519" y="765189"/>
-            <a:ext cx="1157128" cy="1157128"/>
+            <a:off x="9902536" y="4533896"/>
+            <a:ext cx="1991980" cy="2240977"/>
           </a:xfrm>
           <a:prstGeom prst="rect">
             <a:avLst/>
@@ -4217,395 +3380,7 @@
     </p:spTree>
     <p:extLst>
       <p:ext uri="{BB962C8B-B14F-4D97-AF65-F5344CB8AC3E}">
-        <p14:creationId xmlns:p14="http://schemas.microsoft.com/office/powerpoint/2010/main" val="1095481358"/>
-      </p:ext>
-    </p:extLst>
-  </p:cSld>
-  <p:clrMapOvr>
-    <a:masterClrMapping/>
-  </p:clrMapOvr>
-  <p:timing>
-    <p:tnLst>
-      <p:par>
-        <p:cTn id="1" dur="indefinite" restart="never" nodeType="tmRoot"/>
-      </p:par>
-    </p:tnLst>
-  </p:timing>
-</p:sld>
-</file>
-
-<file path=ppt/slides/slide13.xml><?xml version="1.0" encoding="utf-8"?>
-<p:sld xmlns:a="http://schemas.openxmlformats.org/drawingml/2006/main" xmlns:r="http://schemas.openxmlformats.org/officeDocument/2006/relationships" xmlns:p="http://schemas.openxmlformats.org/presentationml/2006/main">
-  <p:cSld>
-    <p:spTree>
-      <p:nvGrpSpPr>
-        <p:cNvPr id="1" name=""/>
-        <p:cNvGrpSpPr/>
-        <p:nvPr/>
-      </p:nvGrpSpPr>
-      <p:grpSpPr>
-        <a:xfrm>
-          <a:off x="0" y="0"/>
-          <a:ext cx="0" cy="0"/>
-          <a:chOff x="0" y="0"/>
-          <a:chExt cx="0" cy="0"/>
-        </a:xfrm>
-      </p:grpSpPr>
-      <p:pic>
-        <p:nvPicPr>
-          <p:cNvPr id="4098" name="Picture 2" descr="https://habrastorage.org/getpro/habr/upload_files/213/4f2/38e/2134f238e227a57240cfc35bcbed608c.png"/>
-          <p:cNvPicPr>
-            <a:picLocks noChangeAspect="1" noChangeArrowheads="1"/>
-          </p:cNvPicPr>
-          <p:nvPr/>
-        </p:nvPicPr>
-        <p:blipFill>
-          <a:blip r:embed="rId3">
-            <a:extLst>
-              <a:ext uri="{28A0092B-C50C-407E-A947-70E740481C1C}">
-                <a14:useLocalDpi xmlns:a14="http://schemas.microsoft.com/office/drawing/2010/main" val="0"/>
-              </a:ext>
-            </a:extLst>
-          </a:blip>
-          <a:srcRect/>
-          <a:stretch>
-            <a:fillRect/>
-          </a:stretch>
-        </p:blipFill>
-        <p:spPr bwMode="auto">
-          <a:xfrm>
-            <a:off x="-1" y="-1"/>
-            <a:ext cx="8157029" cy="6830683"/>
-          </a:xfrm>
-          <a:prstGeom prst="rect">
-            <a:avLst/>
-          </a:prstGeom>
-          <a:noFill/>
-          <a:extLst>
-            <a:ext uri="{909E8E84-426E-40DD-AFC4-6F175D3DCCD1}">
-              <a14:hiddenFill xmlns:a14="http://schemas.microsoft.com/office/drawing/2010/main">
-                <a:solidFill>
-                  <a:srgbClr val="FFFFFF"/>
-                </a:solidFill>
-              </a14:hiddenFill>
-            </a:ext>
-          </a:extLst>
-        </p:spPr>
-      </p:pic>
-    </p:spTree>
-    <p:extLst>
-      <p:ext uri="{BB962C8B-B14F-4D97-AF65-F5344CB8AC3E}">
-        <p14:creationId xmlns:p14="http://schemas.microsoft.com/office/powerpoint/2010/main" val="4084483644"/>
-      </p:ext>
-    </p:extLst>
-  </p:cSld>
-  <p:clrMapOvr>
-    <a:masterClrMapping/>
-  </p:clrMapOvr>
-  <p:timing>
-    <p:tnLst>
-      <p:par>
-        <p:cTn id="1" dur="indefinite" restart="never" nodeType="tmRoot"/>
-      </p:par>
-    </p:tnLst>
-  </p:timing>
-</p:sld>
-</file>
-
-<file path=ppt/slides/slide14.xml><?xml version="1.0" encoding="utf-8"?>
-<p:sld xmlns:a="http://schemas.openxmlformats.org/drawingml/2006/main" xmlns:r="http://schemas.openxmlformats.org/officeDocument/2006/relationships" xmlns:p="http://schemas.openxmlformats.org/presentationml/2006/main">
-  <p:cSld>
-    <p:spTree>
-      <p:nvGrpSpPr>
-        <p:cNvPr id="1" name=""/>
-        <p:cNvGrpSpPr/>
-        <p:nvPr/>
-      </p:nvGrpSpPr>
-      <p:grpSpPr>
-        <a:xfrm>
-          <a:off x="0" y="0"/>
-          <a:ext cx="0" cy="0"/>
-          <a:chOff x="0" y="0"/>
-          <a:chExt cx="0" cy="0"/>
-        </a:xfrm>
-      </p:grpSpPr>
-      <p:pic>
-        <p:nvPicPr>
-          <p:cNvPr id="8194" name="Picture 2" descr="https://habrastorage.org/getpro/habr/upload_files/b52/3e8/9f4/b523e89f4d83983721ffcac346c01e66.png"/>
-          <p:cNvPicPr>
-            <a:picLocks noChangeAspect="1" noChangeArrowheads="1"/>
-          </p:cNvPicPr>
-          <p:nvPr/>
-        </p:nvPicPr>
-        <p:blipFill>
-          <a:blip r:embed="rId3">
-            <a:extLst>
-              <a:ext uri="{28A0092B-C50C-407E-A947-70E740481C1C}">
-                <a14:useLocalDpi xmlns:a14="http://schemas.microsoft.com/office/drawing/2010/main" val="0"/>
-              </a:ext>
-            </a:extLst>
-          </a:blip>
-          <a:srcRect/>
-          <a:stretch>
-            <a:fillRect/>
-          </a:stretch>
-        </p:blipFill>
-        <p:spPr bwMode="auto">
-          <a:xfrm>
-            <a:off x="856507" y="0"/>
-            <a:ext cx="10668000" cy="6822895"/>
-          </a:xfrm>
-          <a:prstGeom prst="rect">
-            <a:avLst/>
-          </a:prstGeom>
-          <a:noFill/>
-          <a:extLst>
-            <a:ext uri="{909E8E84-426E-40DD-AFC4-6F175D3DCCD1}">
-              <a14:hiddenFill xmlns:a14="http://schemas.microsoft.com/office/drawing/2010/main">
-                <a:solidFill>
-                  <a:srgbClr val="FFFFFF"/>
-                </a:solidFill>
-              </a14:hiddenFill>
-            </a:ext>
-          </a:extLst>
-        </p:spPr>
-      </p:pic>
-    </p:spTree>
-    <p:extLst>
-      <p:ext uri="{BB962C8B-B14F-4D97-AF65-F5344CB8AC3E}">
-        <p14:creationId xmlns:p14="http://schemas.microsoft.com/office/powerpoint/2010/main" val="3241485337"/>
-      </p:ext>
-    </p:extLst>
-  </p:cSld>
-  <p:clrMapOvr>
-    <a:masterClrMapping/>
-  </p:clrMapOvr>
-  <p:timing>
-    <p:tnLst>
-      <p:par>
-        <p:cTn id="1" dur="indefinite" restart="never" nodeType="tmRoot"/>
-      </p:par>
-    </p:tnLst>
-  </p:timing>
-</p:sld>
-</file>
-
-<file path=ppt/slides/slide2.xml><?xml version="1.0" encoding="utf-8"?>
-<p:sld xmlns:a="http://schemas.openxmlformats.org/drawingml/2006/main" xmlns:r="http://schemas.openxmlformats.org/officeDocument/2006/relationships" xmlns:p="http://schemas.openxmlformats.org/presentationml/2006/main">
-  <p:cSld>
-    <p:spTree>
-      <p:nvGrpSpPr>
-        <p:cNvPr id="1" name=""/>
-        <p:cNvGrpSpPr/>
-        <p:nvPr/>
-      </p:nvGrpSpPr>
-      <p:grpSpPr>
-        <a:xfrm>
-          <a:off x="0" y="0"/>
-          <a:ext cx="0" cy="0"/>
-          <a:chOff x="0" y="0"/>
-          <a:chExt cx="0" cy="0"/>
-        </a:xfrm>
-      </p:grpSpPr>
-      <p:pic>
-        <p:nvPicPr>
-          <p:cNvPr id="1026" name="Picture 2" descr="https://cdn2.hexlet.io/store/derivatives/original/82a4ddb86531c669e3505ab8069bed82.jpg"/>
-          <p:cNvPicPr>
-            <a:picLocks noChangeAspect="1" noChangeArrowheads="1"/>
-          </p:cNvPicPr>
-          <p:nvPr/>
-        </p:nvPicPr>
-        <p:blipFill>
-          <a:blip r:embed="rId3">
-            <a:extLst>
-              <a:ext uri="{28A0092B-C50C-407E-A947-70E740481C1C}">
-                <a14:useLocalDpi xmlns:a14="http://schemas.microsoft.com/office/drawing/2010/main" val="0"/>
-              </a:ext>
-            </a:extLst>
-          </a:blip>
-          <a:srcRect/>
-          <a:stretch>
-            <a:fillRect/>
-          </a:stretch>
-        </p:blipFill>
-        <p:spPr bwMode="auto">
-          <a:xfrm>
-            <a:off x="3696028" y="2084832"/>
-            <a:ext cx="8495972" cy="4773168"/>
-          </a:xfrm>
-          <a:prstGeom prst="rect">
-            <a:avLst/>
-          </a:prstGeom>
-          <a:noFill/>
-          <a:extLst>
-            <a:ext uri="{909E8E84-426E-40DD-AFC4-6F175D3DCCD1}">
-              <a14:hiddenFill xmlns:a14="http://schemas.microsoft.com/office/drawing/2010/main">
-                <a:solidFill>
-                  <a:srgbClr val="FFFFFF"/>
-                </a:solidFill>
-              </a14:hiddenFill>
-            </a:ext>
-          </a:extLst>
-        </p:spPr>
-      </p:pic>
-      <p:sp>
-        <p:nvSpPr>
-          <p:cNvPr id="11" name="Rectangle 28" descr="Светлый диагональный 2"/>
-          <p:cNvSpPr>
-            <a:spLocks noChangeArrowheads="1"/>
-          </p:cNvSpPr>
-          <p:nvPr/>
-        </p:nvSpPr>
-        <p:spPr bwMode="auto">
-          <a:xfrm>
-            <a:off x="0" y="-1"/>
-            <a:ext cx="12192000" cy="654357"/>
-          </a:xfrm>
-          <a:prstGeom prst="rect">
-            <a:avLst/>
-          </a:prstGeom>
-          <a:pattFill prst="ltUpDiag">
-            <a:fgClr>
-              <a:schemeClr val="accent1">
-                <a:lumMod val="40000"/>
-                <a:lumOff val="60000"/>
-              </a:schemeClr>
-            </a:fgClr>
-            <a:bgClr>
-              <a:srgbClr val="FFFFFF"/>
-            </a:bgClr>
-          </a:pattFill>
-          <a:ln w="15875" algn="ctr">
-            <a:solidFill>
-              <a:schemeClr val="accent5">
-                <a:lumMod val="50000"/>
-              </a:schemeClr>
-            </a:solidFill>
-            <a:miter lim="800000"/>
-            <a:headEnd/>
-            <a:tailEnd/>
-          </a:ln>
-          <a:effectLst/>
-        </p:spPr>
-        <p:txBody>
-          <a:bodyPr vert="horz" wrap="square" lIns="18000" tIns="18000" rIns="18000" bIns="18000" numCol="1" anchor="ctr" anchorCtr="0" compatLnSpc="1">
-            <a:prstTxWarp prst="textNoShape">
-              <a:avLst/>
-            </a:prstTxWarp>
-          </a:bodyPr>
-          <a:lstStyle/>
-          <a:p>
-            <a:pPr algn="ctr"/>
-            <a:r>
-              <a:rPr lang="ru-RU" sz="2800" b="1" dirty="0">
-                <a:solidFill>
-                  <a:schemeClr val="tx2">
-                    <a:lumMod val="50000"/>
-                  </a:schemeClr>
-                </a:solidFill>
-                <a:latin typeface="Bookman Old Style" panose="02050604050505020204" pitchFamily="18" charset="0"/>
-                <a:cs typeface="Times New Roman" panose="02020603050405020304" pitchFamily="18" charset="0"/>
-              </a:rPr>
-              <a:t>Классификация ПО</a:t>
-            </a:r>
-          </a:p>
-        </p:txBody>
-      </p:sp>
-      <p:sp>
-        <p:nvSpPr>
-          <p:cNvPr id="7" name="Прямоугольник 6"/>
-          <p:cNvSpPr/>
-          <p:nvPr/>
-        </p:nvSpPr>
-        <p:spPr>
-          <a:xfrm>
-            <a:off x="380390" y="654356"/>
-            <a:ext cx="4594412" cy="2308324"/>
-          </a:xfrm>
-          <a:prstGeom prst="rect">
-            <a:avLst/>
-          </a:prstGeom>
-        </p:spPr>
-        <p:txBody>
-          <a:bodyPr wrap="square">
-            <a:spAutoFit/>
-          </a:bodyPr>
-          <a:lstStyle/>
-          <a:p>
-            <a:pPr marL="342900" indent="-342900" algn="just">
-              <a:lnSpc>
-                <a:spcPct val="150000"/>
-              </a:lnSpc>
-              <a:buFont typeface="Arial" panose="020B0604020202020204" pitchFamily="34" charset="0"/>
-              <a:buChar char="•"/>
-            </a:pPr>
-            <a:r>
-              <a:rPr lang="ru-RU" sz="2400" dirty="0">
-                <a:latin typeface="Bookman Old Style" panose="02050604050505020204" pitchFamily="18" charset="0"/>
-              </a:rPr>
-              <a:t>Серверное ПО</a:t>
-            </a:r>
-          </a:p>
-          <a:p>
-            <a:pPr marL="342900" indent="-342900" algn="just">
-              <a:lnSpc>
-                <a:spcPct val="150000"/>
-              </a:lnSpc>
-              <a:buFont typeface="Arial" panose="020B0604020202020204" pitchFamily="34" charset="0"/>
-              <a:buChar char="•"/>
-            </a:pPr>
-            <a:r>
-              <a:rPr lang="ru-RU" sz="2400" dirty="0">
-                <a:latin typeface="Bookman Old Style" panose="02050604050505020204" pitchFamily="18" charset="0"/>
-              </a:rPr>
-              <a:t>Десктоп</a:t>
-            </a:r>
-          </a:p>
-          <a:p>
-            <a:pPr marL="342900" indent="-342900" algn="just">
-              <a:lnSpc>
-                <a:spcPct val="150000"/>
-              </a:lnSpc>
-              <a:buFont typeface="Arial" panose="020B0604020202020204" pitchFamily="34" charset="0"/>
-              <a:buChar char="•"/>
-            </a:pPr>
-            <a:r>
-              <a:rPr lang="ru-RU" sz="2400" dirty="0">
-                <a:latin typeface="Bookman Old Style" panose="02050604050505020204" pitchFamily="18" charset="0"/>
-              </a:rPr>
-              <a:t>Мобильная разработка</a:t>
-            </a:r>
-          </a:p>
-          <a:p>
-            <a:pPr marL="342900" indent="-342900" algn="just">
-              <a:lnSpc>
-                <a:spcPct val="150000"/>
-              </a:lnSpc>
-              <a:buFont typeface="Arial" panose="020B0604020202020204" pitchFamily="34" charset="0"/>
-              <a:buChar char="•"/>
-            </a:pPr>
-            <a:r>
-              <a:rPr lang="ru-RU" sz="2400" dirty="0" err="1" smtClean="0">
-                <a:latin typeface="Bookman Old Style" panose="02050604050505020204" pitchFamily="18" charset="0"/>
-              </a:rPr>
-              <a:t>Web</a:t>
-            </a:r>
-            <a:r>
-              <a:rPr lang="ru-RU" sz="2400" dirty="0" smtClean="0">
-                <a:latin typeface="Bookman Old Style" panose="02050604050505020204" pitchFamily="18" charset="0"/>
-              </a:rPr>
-              <a:t>-программирование</a:t>
-            </a:r>
-            <a:endParaRPr lang="ru-RU" sz="2400" dirty="0">
-              <a:latin typeface="Bookman Old Style" panose="02050604050505020204" pitchFamily="18" charset="0"/>
-            </a:endParaRPr>
-          </a:p>
-        </p:txBody>
-      </p:sp>
-    </p:spTree>
-    <p:extLst>
-      <p:ext uri="{BB962C8B-B14F-4D97-AF65-F5344CB8AC3E}">
-        <p14:creationId xmlns:p14="http://schemas.microsoft.com/office/powerpoint/2010/main" val="1458695104"/>
+        <p14:creationId xmlns:p14="http://schemas.microsoft.com/office/powerpoint/2010/main" val="3302348772"/>
       </p:ext>
     </p:extLst>
   </p:cSld>
@@ -4697,8 +3472,29 @@
                 <a:latin typeface="Bookman Old Style" panose="02050604050505020204" pitchFamily="18" charset="0"/>
                 <a:cs typeface="Times New Roman" panose="02020603050405020304" pitchFamily="18" charset="0"/>
               </a:rPr>
-              <a:t>Серверное ПО</a:t>
-            </a:r>
+              <a:t>Языки в </a:t>
+            </a:r>
+            <a:r>
+              <a:rPr lang="en-US" sz="2800" b="1" dirty="0">
+                <a:solidFill>
+                  <a:schemeClr val="tx2">
+                    <a:lumMod val="50000"/>
+                  </a:schemeClr>
+                </a:solidFill>
+                <a:latin typeface="Bookman Old Style" panose="02050604050505020204" pitchFamily="18" charset="0"/>
+                <a:cs typeface="Times New Roman" panose="02020603050405020304" pitchFamily="18" charset="0"/>
+              </a:rPr>
+              <a:t>Web</a:t>
+            </a:r>
+            <a:endParaRPr lang="ru-RU" sz="2800" b="1" dirty="0">
+              <a:solidFill>
+                <a:schemeClr val="tx2">
+                  <a:lumMod val="50000"/>
+                </a:schemeClr>
+              </a:solidFill>
+              <a:latin typeface="Bookman Old Style" panose="02050604050505020204" pitchFamily="18" charset="0"/>
+              <a:cs typeface="Times New Roman" panose="02020603050405020304" pitchFamily="18" charset="0"/>
+            </a:endParaRPr>
           </a:p>
         </p:txBody>
       </p:sp>
@@ -4711,7 +3507,7 @@
         <p:spPr>
           <a:xfrm>
             <a:off x="0" y="654355"/>
-            <a:ext cx="12192000" cy="6186309"/>
+            <a:ext cx="12192000" cy="3970318"/>
           </a:xfrm>
           <a:prstGeom prst="rect">
             <a:avLst/>
@@ -4732,129 +3528,171 @@
               <a:rPr lang="ru-RU" sz="2400" dirty="0">
                 <a:latin typeface="Bookman Old Style" panose="02050604050505020204" pitchFamily="18" charset="0"/>
               </a:rPr>
-              <a:t>В разработке серверного ПО могут использоваться абсолютно любые языки. Серверное ПО в конечном итоге пересекается и с мобильной разработкой, и с веб-разработкой, и вообще с любым видом разработки</a:t>
-            </a:r>
-            <a:r>
-              <a:rPr lang="ru-RU" sz="2400" dirty="0" smtClean="0">
-                <a:latin typeface="Bookman Old Style" panose="02050604050505020204" pitchFamily="18" charset="0"/>
-              </a:rPr>
-              <a:t>.</a:t>
-            </a:r>
-          </a:p>
-          <a:p>
-            <a:pPr algn="just">
-              <a:lnSpc>
-                <a:spcPct val="150000"/>
-              </a:lnSpc>
-            </a:pPr>
+              <a:t>Веб делится на 2 подраздела: </a:t>
+            </a:r>
+            <a:r>
+              <a:rPr lang="ru-RU" sz="2400" b="1" dirty="0" err="1">
+                <a:latin typeface="Bookman Old Style" panose="02050604050505020204" pitchFamily="18" charset="0"/>
+              </a:rPr>
+              <a:t>бэкенд</a:t>
+            </a:r>
+            <a:r>
+              <a:rPr lang="ru-RU" sz="2400" dirty="0">
+                <a:latin typeface="Bookman Old Style" panose="02050604050505020204" pitchFamily="18" charset="0"/>
+              </a:rPr>
+              <a:t> и </a:t>
+            </a:r>
+            <a:r>
+              <a:rPr lang="ru-RU" sz="2400" b="1" dirty="0" err="1">
+                <a:latin typeface="Bookman Old Style" panose="02050604050505020204" pitchFamily="18" charset="0"/>
+              </a:rPr>
+              <a:t>фронтенд</a:t>
+            </a:r>
+            <a:r>
+              <a:rPr lang="ru-RU" sz="2400" dirty="0">
+                <a:latin typeface="Bookman Old Style" panose="02050604050505020204" pitchFamily="18" charset="0"/>
+              </a:rPr>
+              <a:t>. Любое веб-приложение в конечном итоге имеет ту часть, которая взаимодействует с пользователем, и почти всегда это </a:t>
+            </a:r>
             <a:r>
               <a:rPr lang="ru-RU" sz="2400" b="1" dirty="0">
                 <a:latin typeface="Bookman Old Style" panose="02050604050505020204" pitchFamily="18" charset="0"/>
               </a:rPr>
-              <a:t>Прикладное </a:t>
-            </a:r>
-            <a:r>
-              <a:rPr lang="ru-RU" sz="2400" b="1" dirty="0" smtClean="0">
-                <a:latin typeface="Bookman Old Style" panose="02050604050505020204" pitchFamily="18" charset="0"/>
-              </a:rPr>
-              <a:t>ПО</a:t>
-            </a:r>
-          </a:p>
-          <a:p>
-            <a:pPr algn="just">
-              <a:lnSpc>
-                <a:spcPct val="150000"/>
-              </a:lnSpc>
-            </a:pPr>
+              <a:t>тонкий </a:t>
+            </a:r>
+            <a:r>
+              <a:rPr lang="ru-RU" sz="2400" b="1" dirty="0">
+                <a:latin typeface="Bookman Old Style" panose="02050604050505020204" pitchFamily="18" charset="0"/>
+              </a:rPr>
+              <a:t>клиент (</a:t>
+            </a:r>
+            <a:r>
+              <a:rPr lang="ru-RU" sz="2400" b="1" dirty="0" err="1">
+                <a:latin typeface="Bookman Old Style" panose="02050604050505020204" pitchFamily="18" charset="0"/>
+              </a:rPr>
+              <a:t>фронтенд</a:t>
+            </a:r>
+            <a:r>
+              <a:rPr lang="ru-RU" sz="2400" b="1" dirty="0">
+                <a:latin typeface="Bookman Old Style" panose="02050604050505020204" pitchFamily="18" charset="0"/>
+              </a:rPr>
+              <a:t>) </a:t>
+            </a:r>
             <a:r>
               <a:rPr lang="ru-RU" sz="2400" dirty="0">
                 <a:latin typeface="Bookman Old Style" panose="02050604050505020204" pitchFamily="18" charset="0"/>
               </a:rPr>
-              <a:t>В программировании почти всегда есть </a:t>
-            </a:r>
-            <a:r>
-              <a:rPr lang="ru-RU" sz="2400" dirty="0" err="1">
-                <a:latin typeface="Bookman Old Style" panose="02050604050505020204" pitchFamily="18" charset="0"/>
-              </a:rPr>
-              <a:t>фронтенд</a:t>
+              <a:t>— браузер, в котором крутятся приложения. Если раньше это был просто </a:t>
+            </a:r>
+            <a:r>
+              <a:rPr lang="ru-RU" sz="2400" b="1" dirty="0">
+                <a:latin typeface="Bookman Old Style" panose="02050604050505020204" pitchFamily="18" charset="0"/>
+              </a:rPr>
+              <a:t>HTML</a:t>
             </a:r>
             <a:r>
               <a:rPr lang="ru-RU" sz="2400" dirty="0">
                 <a:latin typeface="Bookman Old Style" panose="02050604050505020204" pitchFamily="18" charset="0"/>
               </a:rPr>
-              <a:t>-часть — та, с которой непосредственно взаимодействует пользователь, и </a:t>
-            </a:r>
-            <a:r>
-              <a:rPr lang="ru-RU" sz="2400" dirty="0" err="1">
-                <a:latin typeface="Bookman Old Style" panose="02050604050505020204" pitchFamily="18" charset="0"/>
-              </a:rPr>
-              <a:t>бэкенд</a:t>
-            </a:r>
-            <a:r>
-              <a:rPr lang="ru-RU" sz="2400" dirty="0">
-                <a:latin typeface="Bookman Old Style" panose="02050604050505020204" pitchFamily="18" charset="0"/>
-              </a:rPr>
-              <a:t>-часть, которая находится где-то на сервере. Самостоятельная или связанная с </a:t>
-            </a:r>
-            <a:r>
-              <a:rPr lang="ru-RU" sz="2400" dirty="0" err="1">
-                <a:latin typeface="Bookman Old Style" panose="02050604050505020204" pitchFamily="18" charset="0"/>
-              </a:rPr>
-              <a:t>фронтенд</a:t>
-            </a:r>
-            <a:r>
-              <a:rPr lang="ru-RU" sz="2400" dirty="0">
-                <a:latin typeface="Bookman Old Style" panose="02050604050505020204" pitchFamily="18" charset="0"/>
-              </a:rPr>
-              <a:t>-частью — именно она и представляет собой прикладное ПО. Это могут быть и какие-либо расчеты, вычисления, аналитика, работа с большими объемами данных, анализ, биржи — всё что угодно</a:t>
-            </a:r>
-            <a:r>
-              <a:rPr lang="ru-RU" sz="2400" dirty="0" smtClean="0">
-                <a:latin typeface="Bookman Old Style" panose="02050604050505020204" pitchFamily="18" charset="0"/>
-              </a:rPr>
-              <a:t>.</a:t>
-            </a:r>
-          </a:p>
-          <a:p>
-            <a:pPr algn="just">
-              <a:lnSpc>
-                <a:spcPct val="150000"/>
-              </a:lnSpc>
-            </a:pPr>
-            <a:r>
-              <a:rPr lang="ru-RU" sz="2400" b="1" dirty="0">
-                <a:latin typeface="Bookman Old Style" panose="02050604050505020204" pitchFamily="18" charset="0"/>
-              </a:rPr>
-              <a:t>Языки: </a:t>
-            </a:r>
-            <a:r>
-              <a:rPr lang="ru-RU" sz="2400" dirty="0">
-                <a:latin typeface="Bookman Old Style" panose="02050604050505020204" pitchFamily="18" charset="0"/>
-              </a:rPr>
-              <a:t>Почти любые, например, </a:t>
-            </a:r>
-            <a:r>
-              <a:rPr lang="en-US" sz="2400" dirty="0">
-                <a:latin typeface="Bookman Old Style" panose="02050604050505020204" pitchFamily="18" charset="0"/>
-              </a:rPr>
-              <a:t>C++, C#, Java, Python </a:t>
-            </a:r>
-            <a:r>
-              <a:rPr lang="en-US" sz="2400" dirty="0" smtClean="0">
-                <a:latin typeface="Bookman Old Style" panose="02050604050505020204" pitchFamily="18" charset="0"/>
-              </a:rPr>
-              <a:t>…</a:t>
-            </a:r>
-            <a:endParaRPr lang="ru-RU" sz="2400" dirty="0">
-              <a:latin typeface="Bookman Old Style" panose="02050604050505020204" pitchFamily="18" charset="0"/>
-            </a:endParaRPr>
+              <a:t>, и вся логика происходила на сервере, то сейчас логики в браузере становится все больше и больше, и он становится по-настоящему "толстым" и "тяжелым".</a:t>
+            </a:r>
           </a:p>
         </p:txBody>
       </p:sp>
+      <p:pic>
+        <p:nvPicPr>
+          <p:cNvPr id="2" name="Рисунок 1"/>
+          <p:cNvPicPr>
+            <a:picLocks noChangeAspect="1"/>
+          </p:cNvPicPr>
+          <p:nvPr/>
+        </p:nvPicPr>
+        <p:blipFill>
+          <a:blip r:embed="rId3">
+            <a:extLst>
+              <a:ext uri="{28A0092B-C50C-407E-A947-70E740481C1C}">
+                <a14:useLocalDpi xmlns:a14="http://schemas.microsoft.com/office/drawing/2010/main" val="0"/>
+              </a:ext>
+            </a:extLst>
+          </a:blip>
+          <a:stretch>
+            <a:fillRect/>
+          </a:stretch>
+        </p:blipFill>
+        <p:spPr>
+          <a:xfrm>
+            <a:off x="3984831" y="4082967"/>
+            <a:ext cx="2646218" cy="2646218"/>
+          </a:xfrm>
+          <a:prstGeom prst="rect">
+            <a:avLst/>
+          </a:prstGeom>
+        </p:spPr>
+      </p:pic>
+      <p:pic>
+        <p:nvPicPr>
+          <p:cNvPr id="3" name="Рисунок 2"/>
+          <p:cNvPicPr>
+            <a:picLocks noChangeAspect="1"/>
+          </p:cNvPicPr>
+          <p:nvPr/>
+        </p:nvPicPr>
+        <p:blipFill>
+          <a:blip r:embed="rId4" cstate="print">
+            <a:extLst>
+              <a:ext uri="{28A0092B-C50C-407E-A947-70E740481C1C}">
+                <a14:useLocalDpi xmlns:a14="http://schemas.microsoft.com/office/drawing/2010/main" val="0"/>
+              </a:ext>
+            </a:extLst>
+          </a:blip>
+          <a:stretch>
+            <a:fillRect/>
+          </a:stretch>
+        </p:blipFill>
+        <p:spPr>
+          <a:xfrm>
+            <a:off x="6777404" y="4082967"/>
+            <a:ext cx="1874297" cy="2646218"/>
+          </a:xfrm>
+          <a:prstGeom prst="rect">
+            <a:avLst/>
+          </a:prstGeom>
+        </p:spPr>
+      </p:pic>
+      <p:pic>
+        <p:nvPicPr>
+          <p:cNvPr id="6" name="Рисунок 5"/>
+          <p:cNvPicPr>
+            <a:picLocks noChangeAspect="1"/>
+          </p:cNvPicPr>
+          <p:nvPr/>
+        </p:nvPicPr>
+        <p:blipFill>
+          <a:blip r:embed="rId5" cstate="print">
+            <a:extLst>
+              <a:ext uri="{28A0092B-C50C-407E-A947-70E740481C1C}">
+                <a14:useLocalDpi xmlns:a14="http://schemas.microsoft.com/office/drawing/2010/main" val="0"/>
+              </a:ext>
+            </a:extLst>
+          </a:blip>
+          <a:stretch>
+            <a:fillRect/>
+          </a:stretch>
+        </p:blipFill>
+        <p:spPr>
+          <a:xfrm>
+            <a:off x="9047922" y="4082967"/>
+            <a:ext cx="2444651" cy="2646218"/>
+          </a:xfrm>
+          <a:prstGeom prst="rect">
+            <a:avLst/>
+          </a:prstGeom>
+        </p:spPr>
+      </p:pic>
     </p:spTree>
     <p:extLst>
       <p:ext uri="{BB962C8B-B14F-4D97-AF65-F5344CB8AC3E}">
-        <p14:creationId xmlns:p14="http://schemas.microsoft.com/office/powerpoint/2010/main" val="886216831"/>
+        <p14:creationId xmlns:p14="http://schemas.microsoft.com/office/powerpoint/2010/main" val="1170315594"/>
       </p:ext>
     </p:extLst>
   </p:cSld>
@@ -4890,69 +3728,6 @@
       </p:grpSpPr>
       <p:sp>
         <p:nvSpPr>
-          <p:cNvPr id="11" name="Rectangle 28" descr="Светлый диагональный 2"/>
-          <p:cNvSpPr>
-            <a:spLocks noChangeArrowheads="1"/>
-          </p:cNvSpPr>
-          <p:nvPr/>
-        </p:nvSpPr>
-        <p:spPr bwMode="auto">
-          <a:xfrm>
-            <a:off x="0" y="-1"/>
-            <a:ext cx="12192000" cy="654357"/>
-          </a:xfrm>
-          <a:prstGeom prst="rect">
-            <a:avLst/>
-          </a:prstGeom>
-          <a:pattFill prst="ltUpDiag">
-            <a:fgClr>
-              <a:schemeClr val="accent1">
-                <a:lumMod val="40000"/>
-                <a:lumOff val="60000"/>
-              </a:schemeClr>
-            </a:fgClr>
-            <a:bgClr>
-              <a:srgbClr val="FFFFFF"/>
-            </a:bgClr>
-          </a:pattFill>
-          <a:ln w="15875" algn="ctr">
-            <a:solidFill>
-              <a:schemeClr val="accent5">
-                <a:lumMod val="50000"/>
-              </a:schemeClr>
-            </a:solidFill>
-            <a:miter lim="800000"/>
-            <a:headEnd/>
-            <a:tailEnd/>
-          </a:ln>
-          <a:effectLst/>
-        </p:spPr>
-        <p:txBody>
-          <a:bodyPr vert="horz" wrap="square" lIns="18000" tIns="18000" rIns="18000" bIns="18000" numCol="1" anchor="ctr" anchorCtr="0" compatLnSpc="1">
-            <a:prstTxWarp prst="textNoShape">
-              <a:avLst/>
-            </a:prstTxWarp>
-          </a:bodyPr>
-          <a:lstStyle/>
-          <a:p>
-            <a:pPr algn="ctr"/>
-            <a:r>
-              <a:rPr lang="ru-RU" sz="2800" b="1" dirty="0">
-                <a:solidFill>
-                  <a:schemeClr val="tx2">
-                    <a:lumMod val="50000"/>
-                  </a:schemeClr>
-                </a:solidFill>
-                <a:latin typeface="Bookman Old Style" panose="02050604050505020204" pitchFamily="18" charset="0"/>
-                <a:cs typeface="Times New Roman" panose="02020603050405020304" pitchFamily="18" charset="0"/>
-              </a:rPr>
-              <a:t>Серверное ПО</a:t>
-            </a:r>
-          </a:p>
-        </p:txBody>
-      </p:sp>
-      <p:sp>
-        <p:nvSpPr>
           <p:cNvPr id="7" name="Прямоугольник 6"/>
           <p:cNvSpPr/>
           <p:nvPr/>
@@ -4960,7 +3735,7 @@
         <p:spPr>
           <a:xfrm>
             <a:off x="0" y="654355"/>
-            <a:ext cx="12192000" cy="3416320"/>
+            <a:ext cx="12192000" cy="4524315"/>
           </a:xfrm>
           <a:prstGeom prst="rect">
             <a:avLst/>
@@ -4978,16 +3753,10 @@
               </a:lnSpc>
             </a:pPr>
             <a:r>
-              <a:rPr lang="ru-RU" sz="2400" b="1" dirty="0">
-                <a:latin typeface="Bookman Old Style" panose="02050604050505020204" pitchFamily="18" charset="0"/>
-              </a:rPr>
-              <a:t>Системное </a:t>
-            </a:r>
-            <a:r>
-              <a:rPr lang="ru-RU" sz="2400" b="1" dirty="0" smtClean="0">
-                <a:latin typeface="Bookman Old Style" panose="02050604050505020204" pitchFamily="18" charset="0"/>
-              </a:rPr>
-              <a:t>ПО</a:t>
+              <a:rPr lang="en-US" sz="2400" b="1" dirty="0">
+                <a:latin typeface="Bookman Old Style" panose="02050604050505020204" pitchFamily="18" charset="0"/>
+              </a:rPr>
+              <a:t>Backend</a:t>
             </a:r>
           </a:p>
           <a:p>
@@ -4997,17 +3766,57 @@
               </a:lnSpc>
             </a:pPr>
             <a:r>
-              <a:rPr lang="ru-RU" sz="2400" dirty="0">
-                <a:latin typeface="Bookman Old Style" panose="02050604050505020204" pitchFamily="18" charset="0"/>
-              </a:rPr>
-              <a:t>Это особый тип программного обеспечения, с помощью которого компьютеры выполняют полезные задачи — это операционные системы, драйверы и иные программы, связанные непосредственно с железом</a:t>
-            </a:r>
-            <a:r>
-              <a:rPr lang="ru-RU" sz="2400" dirty="0" smtClean="0">
-                <a:latin typeface="Bookman Old Style" panose="02050604050505020204" pitchFamily="18" charset="0"/>
-              </a:rPr>
-              <a:t>.</a:t>
-            </a:r>
+              <a:rPr lang="en-US" sz="2400" dirty="0">
+                <a:latin typeface="Bookman Old Style" panose="02050604050505020204" pitchFamily="18" charset="0"/>
+              </a:rPr>
+              <a:t>PHP, Ruby, Python, JavaScript (Node), Perl</a:t>
+            </a:r>
+          </a:p>
+          <a:p>
+            <a:pPr algn="just">
+              <a:lnSpc>
+                <a:spcPct val="150000"/>
+              </a:lnSpc>
+            </a:pPr>
+            <a:r>
+              <a:rPr lang="en-US" sz="2400" dirty="0">
+                <a:latin typeface="Bookman Old Style" panose="02050604050505020204" pitchFamily="18" charset="0"/>
+              </a:rPr>
+              <a:t>Go, C#, Elixir, Rust, Java, </a:t>
+            </a:r>
+            <a:r>
+              <a:rPr lang="en-US" sz="2400" dirty="0" err="1">
+                <a:latin typeface="Bookman Old Style" panose="02050604050505020204" pitchFamily="18" charset="0"/>
+              </a:rPr>
+              <a:t>Clojure</a:t>
+            </a:r>
+            <a:r>
+              <a:rPr lang="en-US" sz="2400" dirty="0">
+                <a:latin typeface="Bookman Old Style" panose="02050604050505020204" pitchFamily="18" charset="0"/>
+              </a:rPr>
+              <a:t>, </a:t>
+            </a:r>
+            <a:r>
+              <a:rPr lang="en-US" sz="2400" dirty="0" err="1">
+                <a:latin typeface="Bookman Old Style" panose="02050604050505020204" pitchFamily="18" charset="0"/>
+              </a:rPr>
+              <a:t>Kotlin</a:t>
+            </a:r>
+            <a:r>
+              <a:rPr lang="en-US" sz="2400" dirty="0">
+                <a:latin typeface="Bookman Old Style" panose="02050604050505020204" pitchFamily="18" charset="0"/>
+              </a:rPr>
+              <a:t>, </a:t>
+            </a:r>
+            <a:r>
+              <a:rPr lang="en-US" sz="2400" dirty="0" smtClean="0">
+                <a:latin typeface="Bookman Old Style" panose="02050604050505020204" pitchFamily="18" charset="0"/>
+              </a:rPr>
+              <a:t>Scala</a:t>
+            </a:r>
+            <a:endParaRPr lang="ru-RU" sz="2400" dirty="0" smtClean="0">
+              <a:latin typeface="Bookman Old Style" panose="02050604050505020204" pitchFamily="18" charset="0"/>
+            </a:endParaRPr>
           </a:p>
           <a:p>
             <a:pPr algn="just">
@@ -5025,19 +3834,59 @@
                 <a:spcPct val="150000"/>
               </a:lnSpc>
             </a:pPr>
-            <a:r>
-              <a:rPr lang="ru-RU" sz="2400" b="1" dirty="0" smtClean="0">
-                <a:latin typeface="Bookman Old Style" panose="02050604050505020204" pitchFamily="18" charset="0"/>
-              </a:rPr>
-              <a:t>Языки: </a:t>
-            </a:r>
-            <a:r>
-              <a:rPr lang="en-US" sz="2400" dirty="0" smtClean="0">
-                <a:latin typeface="Bookman Old Style" panose="02050604050505020204" pitchFamily="18" charset="0"/>
-              </a:rPr>
-              <a:t>C, C++, Rust</a:t>
-            </a:r>
             <a:endParaRPr lang="ru-RU" sz="2400" dirty="0">
+              <a:latin typeface="Bookman Old Style" panose="02050604050505020204" pitchFamily="18" charset="0"/>
+            </a:endParaRPr>
+          </a:p>
+          <a:p>
+            <a:pPr algn="just">
+              <a:lnSpc>
+                <a:spcPct val="150000"/>
+              </a:lnSpc>
+            </a:pPr>
+            <a:r>
+              <a:rPr lang="ru-RU" sz="2400" b="1" dirty="0" err="1" smtClean="0">
+                <a:latin typeface="Bookman Old Style" panose="02050604050505020204" pitchFamily="18" charset="0"/>
+              </a:rPr>
+              <a:t>Бэкендеры</a:t>
+            </a:r>
+            <a:r>
+              <a:rPr lang="ru-RU" sz="2400" dirty="0" smtClean="0">
+                <a:latin typeface="Bookman Old Style" panose="02050604050505020204" pitchFamily="18" charset="0"/>
+              </a:rPr>
+              <a:t> </a:t>
+            </a:r>
+            <a:r>
+              <a:rPr lang="ru-RU" sz="2400" dirty="0" smtClean="0">
+                <a:latin typeface="Bookman Old Style" panose="02050604050505020204" pitchFamily="18" charset="0"/>
+              </a:rPr>
+              <a:t>ответственны </a:t>
+            </a:r>
+            <a:r>
+              <a:rPr lang="ru-RU" sz="2400" dirty="0">
+                <a:latin typeface="Bookman Old Style" panose="02050604050505020204" pitchFamily="18" charset="0"/>
+              </a:rPr>
+              <a:t>за </a:t>
+            </a:r>
+            <a:r>
+              <a:rPr lang="ru-RU" sz="2400" dirty="0" smtClean="0">
+                <a:latin typeface="Bookman Old Style" panose="02050604050505020204" pitchFamily="18" charset="0"/>
+              </a:rPr>
+              <a:t>серверную </a:t>
+            </a:r>
+            <a:r>
+              <a:rPr lang="ru-RU" sz="2400" dirty="0">
+                <a:latin typeface="Bookman Old Style" panose="02050604050505020204" pitchFamily="18" charset="0"/>
+              </a:rPr>
+              <a:t>часть, то есть за то, что обеспечивает работу сервиса — взаимодействие с базами данных, обработку информации и вычисления</a:t>
+            </a:r>
+            <a:r>
+              <a:rPr lang="ru-RU" sz="2400" dirty="0" smtClean="0">
+                <a:latin typeface="Bookman Old Style" panose="02050604050505020204" pitchFamily="18" charset="0"/>
+              </a:rPr>
+              <a:t>.</a:t>
+            </a:r>
+            <a:endParaRPr lang="en-US" sz="2400" dirty="0">
               <a:latin typeface="Bookman Old Style" panose="02050604050505020204" pitchFamily="18" charset="0"/>
             </a:endParaRPr>
           </a:p>
@@ -5065,8 +3914,8 @@
         </p:blipFill>
         <p:spPr>
           <a:xfrm>
-            <a:off x="5076514" y="4180404"/>
-            <a:ext cx="2038971" cy="2296391"/>
+            <a:off x="7808007" y="810028"/>
+            <a:ext cx="1732607" cy="1901536"/>
           </a:xfrm>
           <a:prstGeom prst="rect">
             <a:avLst/>
@@ -5082,7 +3931,7 @@
           <p:nvPr/>
         </p:nvPicPr>
         <p:blipFill>
-          <a:blip r:embed="rId4">
+          <a:blip r:embed="rId4" cstate="print">
             <a:extLst>
               <a:ext uri="{28A0092B-C50C-407E-A947-70E740481C1C}">
                 <a14:useLocalDpi xmlns:a14="http://schemas.microsoft.com/office/drawing/2010/main" val="0"/>
@@ -5095,8 +3944,8 @@
         </p:blipFill>
         <p:spPr>
           <a:xfrm>
-            <a:off x="2203572" y="4180404"/>
-            <a:ext cx="2042894" cy="2296391"/>
+            <a:off x="9540614" y="657234"/>
+            <a:ext cx="2186150" cy="1180180"/>
           </a:xfrm>
           <a:prstGeom prst="rect">
             <a:avLst/>
@@ -5112,7 +3961,7 @@
           <p:nvPr/>
         </p:nvPicPr>
         <p:blipFill>
-          <a:blip r:embed="rId5">
+          <a:blip r:embed="rId5" cstate="print">
             <a:extLst>
               <a:ext uri="{28A0092B-C50C-407E-A947-70E740481C1C}">
                 <a14:useLocalDpi xmlns:a14="http://schemas.microsoft.com/office/drawing/2010/main" val="0"/>
@@ -5125,8 +3974,38 @@
         </p:blipFill>
         <p:spPr>
           <a:xfrm>
-            <a:off x="7945533" y="4180404"/>
-            <a:ext cx="2296391" cy="2296391"/>
+            <a:off x="9690695" y="1837415"/>
+            <a:ext cx="1885988" cy="1155167"/>
+          </a:xfrm>
+          <a:prstGeom prst="rect">
+            <a:avLst/>
+          </a:prstGeom>
+        </p:spPr>
+      </p:pic>
+      <p:pic>
+        <p:nvPicPr>
+          <p:cNvPr id="5" name="Рисунок 4"/>
+          <p:cNvPicPr>
+            <a:picLocks noChangeAspect="1"/>
+          </p:cNvPicPr>
+          <p:nvPr/>
+        </p:nvPicPr>
+        <p:blipFill>
+          <a:blip r:embed="rId6" cstate="print">
+            <a:extLst>
+              <a:ext uri="{28A0092B-C50C-407E-A947-70E740481C1C}">
+                <a14:useLocalDpi xmlns:a14="http://schemas.microsoft.com/office/drawing/2010/main" val="0"/>
+              </a:ext>
+            </a:extLst>
+          </a:blip>
+          <a:stretch>
+            <a:fillRect/>
+          </a:stretch>
+        </p:blipFill>
+        <p:spPr>
+          <a:xfrm>
+            <a:off x="6889495" y="2328309"/>
+            <a:ext cx="768431" cy="766510"/>
           </a:xfrm>
           <a:prstGeom prst="rect">
             <a:avLst/>
@@ -5136,7 +4015,7 @@
     </p:spTree>
     <p:extLst>
       <p:ext uri="{BB962C8B-B14F-4D97-AF65-F5344CB8AC3E}">
-        <p14:creationId xmlns:p14="http://schemas.microsoft.com/office/powerpoint/2010/main" val="3503043409"/>
+        <p14:creationId xmlns:p14="http://schemas.microsoft.com/office/powerpoint/2010/main" val="937045272"/>
       </p:ext>
     </p:extLst>
   </p:cSld>
@@ -5219,7 +4098,7 @@
           <a:p>
             <a:pPr algn="ctr"/>
             <a:r>
-              <a:rPr lang="ru-RU" sz="2800" b="1" dirty="0">
+              <a:rPr lang="ru-RU" sz="2800" b="1" dirty="0" smtClean="0">
                 <a:solidFill>
                   <a:schemeClr val="tx2">
                     <a:lumMod val="50000"/>
@@ -5228,19 +4107,7 @@
                 <a:latin typeface="Bookman Old Style" panose="02050604050505020204" pitchFamily="18" charset="0"/>
                 <a:cs typeface="Times New Roman" panose="02020603050405020304" pitchFamily="18" charset="0"/>
               </a:rPr>
-              <a:t>Десктоп (</a:t>
-            </a:r>
-            <a:r>
-              <a:rPr lang="en-US" sz="2800" b="1" dirty="0">
-                <a:solidFill>
-                  <a:schemeClr val="tx2">
-                    <a:lumMod val="50000"/>
-                  </a:schemeClr>
-                </a:solidFill>
-                <a:latin typeface="Bookman Old Style" panose="02050604050505020204" pitchFamily="18" charset="0"/>
-                <a:cs typeface="Times New Roman" panose="02020603050405020304" pitchFamily="18" charset="0"/>
-              </a:rPr>
-              <a:t>Desktop)</a:t>
+              <a:t>Мобильная разработка</a:t>
             </a:r>
             <a:endParaRPr lang="ru-RU" sz="2800" b="1" dirty="0">
               <a:solidFill>
@@ -5275,165 +4142,331 @@
           </a:bodyPr>
           <a:lstStyle/>
           <a:p>
-            <a:pPr algn="just">
+            <a:pPr>
               <a:lnSpc>
                 <a:spcPct val="150000"/>
               </a:lnSpc>
             </a:pPr>
             <a:r>
-              <a:rPr lang="ru-RU" sz="2400" dirty="0">
-                <a:latin typeface="Bookman Old Style" panose="02050604050505020204" pitchFamily="18" charset="0"/>
-              </a:rPr>
-              <a:t>Теряющее популярность, но все еще очень активное направление — это десктоп. Это так называемые "толстые клиенты", когда программа запускается локально, чаще всего без подключения к интернету</a:t>
-            </a:r>
-            <a:r>
-              <a:rPr lang="ru-RU" sz="2400" dirty="0" smtClean="0">
-                <a:latin typeface="Bookman Old Style" panose="02050604050505020204" pitchFamily="18" charset="0"/>
-              </a:rPr>
-              <a:t>.</a:t>
-            </a:r>
-            <a:endParaRPr lang="en-US" sz="2400" dirty="0" smtClean="0">
+              <a:rPr lang="ru-RU" sz="2400" b="1" dirty="0">
+                <a:latin typeface="Bookman Old Style" panose="02050604050505020204" pitchFamily="18" charset="0"/>
+              </a:rPr>
+              <a:t>Мобильная разработка: </a:t>
+            </a:r>
+            <a:r>
+              <a:rPr lang="ru-RU" sz="2400" b="1" dirty="0" err="1">
+                <a:latin typeface="Bookman Old Style" panose="02050604050505020204" pitchFamily="18" charset="0"/>
+              </a:rPr>
+              <a:t>Нативная</a:t>
+            </a:r>
+            <a:r>
+              <a:rPr lang="ru-RU" sz="2400" b="1" dirty="0">
+                <a:latin typeface="Bookman Old Style" panose="02050604050505020204" pitchFamily="18" charset="0"/>
+              </a:rPr>
+              <a:t> и Кроссплатформенная</a:t>
+            </a:r>
+            <a:endParaRPr lang="ru-RU" sz="2400" dirty="0">
               <a:latin typeface="Bookman Old Style" panose="02050604050505020204" pitchFamily="18" charset="0"/>
             </a:endParaRPr>
           </a:p>
           <a:p>
-            <a:pPr algn="just">
+            <a:pPr>
               <a:lnSpc>
                 <a:spcPct val="150000"/>
               </a:lnSpc>
             </a:pPr>
-            <a:endParaRPr lang="en-US" sz="2400" dirty="0" smtClean="0">
+            <a:r>
+              <a:rPr lang="ru-RU" sz="2400" b="1" dirty="0" err="1">
+                <a:latin typeface="Bookman Old Style" panose="02050604050505020204" pitchFamily="18" charset="0"/>
+              </a:rPr>
+              <a:t>Нативная</a:t>
+            </a:r>
+            <a:r>
+              <a:rPr lang="ru-RU" sz="2400" b="1" dirty="0">
+                <a:latin typeface="Bookman Old Style" panose="02050604050505020204" pitchFamily="18" charset="0"/>
+              </a:rPr>
+              <a:t> разработка (под конкретную ОС):</a:t>
+            </a:r>
+            <a:endParaRPr lang="ru-RU" sz="2400" dirty="0">
               <a:latin typeface="Bookman Old Style" panose="02050604050505020204" pitchFamily="18" charset="0"/>
             </a:endParaRPr>
           </a:p>
           <a:p>
-            <a:pPr algn="just">
+            <a:pPr lvl="1">
               <a:lnSpc>
                 <a:spcPct val="150000"/>
               </a:lnSpc>
             </a:pPr>
             <a:r>
+              <a:rPr lang="en-US" sz="2400" b="1" dirty="0">
+                <a:latin typeface="Bookman Old Style" panose="02050604050505020204" pitchFamily="18" charset="0"/>
+              </a:rPr>
+              <a:t>Android:</a:t>
+            </a:r>
+            <a:r>
+              <a:rPr lang="en-US" sz="2400" dirty="0">
+                <a:latin typeface="Bookman Old Style" panose="02050604050505020204" pitchFamily="18" charset="0"/>
+              </a:rPr>
+              <a:t> </a:t>
+            </a:r>
+            <a:r>
+              <a:rPr lang="en-US" sz="2400" dirty="0" err="1">
+                <a:latin typeface="Bookman Old Style" panose="02050604050505020204" pitchFamily="18" charset="0"/>
+              </a:rPr>
+              <a:t>Kotlin</a:t>
+            </a:r>
+            <a:r>
+              <a:rPr lang="en-US" sz="2400" dirty="0">
+                <a:latin typeface="Bookman Old Style" panose="02050604050505020204" pitchFamily="18" charset="0"/>
+              </a:rPr>
+              <a:t> (</a:t>
+            </a:r>
+            <a:r>
               <a:rPr lang="ru-RU" sz="2400" dirty="0">
                 <a:latin typeface="Bookman Old Style" panose="02050604050505020204" pitchFamily="18" charset="0"/>
               </a:rPr>
-              <a:t>В этом направлении всегда были популярны такие языки, как </a:t>
-            </a:r>
-            <a:r>
-              <a:rPr lang="ru-RU" sz="2400" b="1" dirty="0">
-                <a:latin typeface="Bookman Old Style" panose="02050604050505020204" pitchFamily="18" charset="0"/>
-              </a:rPr>
-              <a:t>С++</a:t>
-            </a:r>
-            <a:r>
-              <a:rPr lang="ru-RU" sz="2400" dirty="0">
-                <a:latin typeface="Bookman Old Style" panose="02050604050505020204" pitchFamily="18" charset="0"/>
-              </a:rPr>
-              <a:t>, </a:t>
-            </a:r>
-            <a:r>
-              <a:rPr lang="ru-RU" sz="2400" b="1" dirty="0" err="1">
-                <a:latin typeface="Bookman Old Style" panose="02050604050505020204" pitchFamily="18" charset="0"/>
-              </a:rPr>
-              <a:t>Java</a:t>
-            </a:r>
-            <a:r>
-              <a:rPr lang="ru-RU" sz="2400" dirty="0">
-                <a:latin typeface="Bookman Old Style" panose="02050604050505020204" pitchFamily="18" charset="0"/>
-              </a:rPr>
-              <a:t> и </a:t>
-            </a:r>
-            <a:r>
-              <a:rPr lang="ru-RU" sz="2400" b="1" dirty="0">
-                <a:latin typeface="Bookman Old Style" panose="02050604050505020204" pitchFamily="18" charset="0"/>
-              </a:rPr>
-              <a:t>C#</a:t>
-            </a:r>
-            <a:r>
-              <a:rPr lang="ru-RU" sz="2400" dirty="0">
-                <a:latin typeface="Bookman Old Style" panose="02050604050505020204" pitchFamily="18" charset="0"/>
-              </a:rPr>
-              <a:t>, но на пятки признанным авторитетам наступают те языки, которые еще не так давно никто не планировал использовать для написания толстых клиентов</a:t>
-            </a:r>
-            <a:r>
-              <a:rPr lang="ru-RU" sz="2400" dirty="0" smtClean="0">
-                <a:latin typeface="Bookman Old Style" panose="02050604050505020204" pitchFamily="18" charset="0"/>
-              </a:rPr>
-              <a:t>.</a:t>
-            </a:r>
-            <a:r>
-              <a:rPr lang="en-US" sz="2400" dirty="0" smtClean="0">
-                <a:latin typeface="Bookman Old Style" panose="02050604050505020204" pitchFamily="18" charset="0"/>
-              </a:rPr>
-              <a:t> (</a:t>
-            </a:r>
-            <a:r>
-              <a:rPr lang="en-US" sz="2400" b="1" dirty="0" smtClean="0">
-                <a:latin typeface="Bookman Old Style" panose="02050604050505020204" pitchFamily="18" charset="0"/>
-              </a:rPr>
-              <a:t>Java Script</a:t>
-            </a:r>
-            <a:r>
-              <a:rPr lang="en-US" sz="2400" dirty="0" smtClean="0">
-                <a:latin typeface="Bookman Old Style" panose="02050604050505020204" pitchFamily="18" charset="0"/>
-              </a:rPr>
-              <a:t>)</a:t>
-            </a:r>
-            <a:r>
-              <a:rPr lang="ru-RU" sz="2400" dirty="0" smtClean="0">
-                <a:latin typeface="Bookman Old Style" panose="02050604050505020204" pitchFamily="18" charset="0"/>
-              </a:rPr>
-              <a:t>.</a:t>
-            </a:r>
-          </a:p>
-          <a:p>
-            <a:pPr algn="just">
+              <a:t>современный стандарт), </a:t>
+            </a:r>
+            <a:r>
+              <a:rPr lang="en-US" sz="2400" dirty="0">
+                <a:latin typeface="Bookman Old Style" panose="02050604050505020204" pitchFamily="18" charset="0"/>
+              </a:rPr>
+              <a:t>Java.</a:t>
+            </a:r>
+          </a:p>
+          <a:p>
+            <a:pPr lvl="1">
               <a:lnSpc>
                 <a:spcPct val="150000"/>
               </a:lnSpc>
             </a:pPr>
-            <a:endParaRPr lang="ru-RU" sz="2400" dirty="0">
-              <a:latin typeface="Bookman Old Style" panose="02050604050505020204" pitchFamily="18" charset="0"/>
-            </a:endParaRPr>
-          </a:p>
-          <a:p>
-            <a:pPr algn="just">
+            <a:r>
+              <a:rPr lang="en-US" sz="2400" b="1" dirty="0">
+                <a:latin typeface="Bookman Old Style" panose="02050604050505020204" pitchFamily="18" charset="0"/>
+              </a:rPr>
+              <a:t>iOS:</a:t>
+            </a:r>
+            <a:r>
+              <a:rPr lang="en-US" sz="2400" dirty="0">
+                <a:latin typeface="Bookman Old Style" panose="02050604050505020204" pitchFamily="18" charset="0"/>
+              </a:rPr>
+              <a:t> Swift (</a:t>
+            </a:r>
+            <a:r>
+              <a:rPr lang="ru-RU" sz="2400" dirty="0">
+                <a:latin typeface="Bookman Old Style" panose="02050604050505020204" pitchFamily="18" charset="0"/>
+              </a:rPr>
+              <a:t>быстрый </a:t>
+            </a:r>
+            <a:r>
+              <a:rPr lang="en-US" sz="2400" dirty="0">
+                <a:latin typeface="Bookman Old Style" panose="02050604050505020204" pitchFamily="18" charset="0"/>
+              </a:rPr>
+              <a:t>open-source </a:t>
+            </a:r>
+            <a:r>
+              <a:rPr lang="ru-RU" sz="2400" dirty="0">
+                <a:latin typeface="Bookman Old Style" panose="02050604050505020204" pitchFamily="18" charset="0"/>
+              </a:rPr>
+              <a:t>язык), </a:t>
+            </a:r>
+            <a:r>
+              <a:rPr lang="en-US" sz="2400" dirty="0">
+                <a:latin typeface="Bookman Old Style" panose="02050604050505020204" pitchFamily="18" charset="0"/>
+              </a:rPr>
+              <a:t>Objective-C (</a:t>
+            </a:r>
+            <a:r>
+              <a:rPr lang="ru-RU" sz="2400" dirty="0">
+                <a:latin typeface="Bookman Old Style" panose="02050604050505020204" pitchFamily="18" charset="0"/>
+              </a:rPr>
+              <a:t>устаревает).</a:t>
+            </a:r>
+          </a:p>
+          <a:p>
+            <a:pPr>
               <a:lnSpc>
                 <a:spcPct val="150000"/>
               </a:lnSpc>
             </a:pPr>
-            <a:r>
-              <a:rPr lang="ru-RU" sz="2400" dirty="0" smtClean="0">
-                <a:latin typeface="Bookman Old Style" panose="02050604050505020204" pitchFamily="18" charset="0"/>
-              </a:rPr>
-              <a:t>На </a:t>
-            </a:r>
-            <a:r>
-              <a:rPr lang="en-US" sz="2400" dirty="0" smtClean="0">
-                <a:latin typeface="Bookman Old Style" panose="02050604050505020204" pitchFamily="18" charset="0"/>
-              </a:rPr>
-              <a:t>C# </a:t>
-            </a:r>
-            <a:r>
-              <a:rPr lang="ru-RU" sz="2400" dirty="0" smtClean="0">
-                <a:latin typeface="Bookman Old Style" panose="02050604050505020204" pitchFamily="18" charset="0"/>
-              </a:rPr>
-              <a:t>удобно писать под </a:t>
-            </a:r>
-            <a:r>
-              <a:rPr lang="en-US" sz="2400" dirty="0" smtClean="0">
-                <a:latin typeface="Bookman Old Style" panose="02050604050505020204" pitchFamily="18" charset="0"/>
-              </a:rPr>
-              <a:t>Windows: </a:t>
-            </a:r>
-            <a:r>
-              <a:rPr lang="en-US" sz="2400" b="1" dirty="0" smtClean="0">
-                <a:latin typeface="Bookman Old Style" panose="02050604050505020204" pitchFamily="18" charset="0"/>
-              </a:rPr>
-              <a:t>Windows Forms, WPF.</a:t>
-            </a:r>
-            <a:endParaRPr lang="ru-RU" sz="2400" b="1" dirty="0">
+            <a:endParaRPr lang="ru-RU" sz="2400" b="1" dirty="0" smtClean="0">
               <a:latin typeface="Bookman Old Style" panose="02050604050505020204" pitchFamily="18" charset="0"/>
             </a:endParaRPr>
+          </a:p>
+          <a:p>
+            <a:pPr>
+              <a:lnSpc>
+                <a:spcPct val="150000"/>
+              </a:lnSpc>
+            </a:pPr>
+            <a:r>
+              <a:rPr lang="ru-RU" sz="2400" b="1" dirty="0" smtClean="0">
+                <a:latin typeface="Bookman Old Style" panose="02050604050505020204" pitchFamily="18" charset="0"/>
+              </a:rPr>
+              <a:t>Кроссплатформенная </a:t>
+            </a:r>
+            <a:r>
+              <a:rPr lang="ru-RU" sz="2400" b="1" dirty="0">
+                <a:latin typeface="Bookman Old Style" panose="02050604050505020204" pitchFamily="18" charset="0"/>
+              </a:rPr>
+              <a:t>разработка (один код для </a:t>
+            </a:r>
+            <a:r>
+              <a:rPr lang="en-US" sz="2400" b="1" dirty="0">
+                <a:latin typeface="Bookman Old Style" panose="02050604050505020204" pitchFamily="18" charset="0"/>
+              </a:rPr>
+              <a:t>iOS </a:t>
+            </a:r>
+            <a:r>
+              <a:rPr lang="ru-RU" sz="2400" b="1" dirty="0">
+                <a:latin typeface="Bookman Old Style" panose="02050604050505020204" pitchFamily="18" charset="0"/>
+              </a:rPr>
+              <a:t>и </a:t>
+            </a:r>
+            <a:r>
+              <a:rPr lang="en-US" sz="2400" b="1" dirty="0">
+                <a:latin typeface="Bookman Old Style" panose="02050604050505020204" pitchFamily="18" charset="0"/>
+              </a:rPr>
+              <a:t>Android):</a:t>
+            </a:r>
+            <a:endParaRPr lang="en-US" sz="2400" dirty="0">
+              <a:latin typeface="Bookman Old Style" panose="02050604050505020204" pitchFamily="18" charset="0"/>
+            </a:endParaRPr>
+          </a:p>
+          <a:p>
+            <a:pPr lvl="1">
+              <a:lnSpc>
+                <a:spcPct val="150000"/>
+              </a:lnSpc>
+            </a:pPr>
+            <a:r>
+              <a:rPr lang="en-US" sz="2400" b="1" dirty="0">
+                <a:latin typeface="Bookman Old Style" panose="02050604050505020204" pitchFamily="18" charset="0"/>
+              </a:rPr>
+              <a:t>Flutter (Dart):</a:t>
+            </a:r>
+            <a:r>
+              <a:rPr lang="en-US" sz="2400" dirty="0">
+                <a:latin typeface="Bookman Old Style" panose="02050604050505020204" pitchFamily="18" charset="0"/>
+              </a:rPr>
+              <a:t> </a:t>
+            </a:r>
+            <a:r>
+              <a:rPr lang="ru-RU" sz="2400" dirty="0">
+                <a:latin typeface="Bookman Old Style" panose="02050604050505020204" pitchFamily="18" charset="0"/>
+              </a:rPr>
+              <a:t>Популярный </a:t>
+            </a:r>
+            <a:r>
+              <a:rPr lang="ru-RU" sz="2400" dirty="0" err="1">
+                <a:latin typeface="Bookman Old Style" panose="02050604050505020204" pitchFamily="18" charset="0"/>
+              </a:rPr>
+              <a:t>фреймворк</a:t>
+            </a:r>
+            <a:r>
+              <a:rPr lang="ru-RU" sz="2400" dirty="0">
+                <a:latin typeface="Bookman Old Style" panose="02050604050505020204" pitchFamily="18" charset="0"/>
+              </a:rPr>
+              <a:t> от </a:t>
+            </a:r>
+            <a:r>
+              <a:rPr lang="en-US" sz="2400" dirty="0">
+                <a:latin typeface="Bookman Old Style" panose="02050604050505020204" pitchFamily="18" charset="0"/>
+              </a:rPr>
+              <a:t>Google.</a:t>
+            </a:r>
+          </a:p>
+          <a:p>
+            <a:pPr lvl="1">
+              <a:lnSpc>
+                <a:spcPct val="150000"/>
+              </a:lnSpc>
+            </a:pPr>
+            <a:r>
+              <a:rPr lang="en-US" sz="2400" b="1" dirty="0">
+                <a:latin typeface="Bookman Old Style" panose="02050604050505020204" pitchFamily="18" charset="0"/>
+              </a:rPr>
+              <a:t>React Native (JavaScript):</a:t>
+            </a:r>
+            <a:r>
+              <a:rPr lang="en-US" sz="2400" dirty="0">
+                <a:latin typeface="Bookman Old Style" panose="02050604050505020204" pitchFamily="18" charset="0"/>
+              </a:rPr>
+              <a:t> </a:t>
+            </a:r>
+            <a:r>
+              <a:rPr lang="ru-RU" sz="2400" dirty="0">
+                <a:latin typeface="Bookman Old Style" panose="02050604050505020204" pitchFamily="18" charset="0"/>
+              </a:rPr>
+              <a:t>Широко используемое решение от </a:t>
+            </a:r>
+            <a:r>
+              <a:rPr lang="en-US" sz="2400" dirty="0">
+                <a:latin typeface="Bookman Old Style" panose="02050604050505020204" pitchFamily="18" charset="0"/>
+              </a:rPr>
+              <a:t>Meta.</a:t>
+            </a:r>
+          </a:p>
+          <a:p>
+            <a:pPr lvl="1">
+              <a:lnSpc>
+                <a:spcPct val="150000"/>
+              </a:lnSpc>
+            </a:pPr>
+            <a:r>
+              <a:rPr lang="en-US" sz="2400" b="1" dirty="0" err="1">
+                <a:latin typeface="Bookman Old Style" panose="02050604050505020204" pitchFamily="18" charset="0"/>
+              </a:rPr>
+              <a:t>Xamarin</a:t>
+            </a:r>
+            <a:r>
+              <a:rPr lang="en-US" sz="2400" b="1" dirty="0">
+                <a:latin typeface="Bookman Old Style" panose="02050604050505020204" pitchFamily="18" charset="0"/>
+              </a:rPr>
+              <a:t> (C#):</a:t>
+            </a:r>
+            <a:r>
+              <a:rPr lang="en-US" sz="2400" dirty="0">
+                <a:latin typeface="Bookman Old Style" panose="02050604050505020204" pitchFamily="18" charset="0"/>
+              </a:rPr>
+              <a:t> </a:t>
+            </a:r>
+            <a:r>
+              <a:rPr lang="ru-RU" sz="2400" dirty="0">
+                <a:latin typeface="Bookman Old Style" panose="02050604050505020204" pitchFamily="18" charset="0"/>
+              </a:rPr>
+              <a:t>Позволяет создавать приложения для </a:t>
+            </a:r>
+            <a:r>
+              <a:rPr lang="en-US" sz="2400" dirty="0">
+                <a:latin typeface="Bookman Old Style" panose="02050604050505020204" pitchFamily="18" charset="0"/>
+              </a:rPr>
+              <a:t>iOS, Android </a:t>
+            </a:r>
+            <a:r>
+              <a:rPr lang="ru-RU" sz="2400" dirty="0">
+                <a:latin typeface="Bookman Old Style" panose="02050604050505020204" pitchFamily="18" charset="0"/>
+              </a:rPr>
+              <a:t>и </a:t>
+            </a:r>
+            <a:r>
+              <a:rPr lang="en-US" sz="2400" dirty="0">
+                <a:latin typeface="Bookman Old Style" panose="02050604050505020204" pitchFamily="18" charset="0"/>
+              </a:rPr>
+              <a:t>Windows </a:t>
+            </a:r>
+            <a:r>
+              <a:rPr lang="ru-RU" sz="2400" dirty="0">
+                <a:latin typeface="Bookman Old Style" panose="02050604050505020204" pitchFamily="18" charset="0"/>
+              </a:rPr>
+              <a:t>на базе .</a:t>
+            </a:r>
+            <a:r>
+              <a:rPr lang="en-US" sz="2400" dirty="0">
+                <a:latin typeface="Bookman Old Style" panose="02050604050505020204" pitchFamily="18" charset="0"/>
+              </a:rPr>
+              <a:t>NET.</a:t>
+            </a:r>
           </a:p>
         </p:txBody>
       </p:sp>
@@ -5459,8 +4492,187 @@
         </p:blipFill>
         <p:spPr>
           <a:xfrm>
-            <a:off x="9902536" y="4533896"/>
-            <a:ext cx="1991980" cy="2240977"/>
+            <a:off x="8360759" y="1156220"/>
+            <a:ext cx="626632" cy="1149105"/>
+          </a:xfrm>
+          <a:prstGeom prst="rect">
+            <a:avLst/>
+          </a:prstGeom>
+        </p:spPr>
+      </p:pic>
+      <p:pic>
+        <p:nvPicPr>
+          <p:cNvPr id="4" name="Рисунок 3"/>
+          <p:cNvPicPr>
+            <a:picLocks noChangeAspect="1"/>
+          </p:cNvPicPr>
+          <p:nvPr/>
+        </p:nvPicPr>
+        <p:blipFill>
+          <a:blip r:embed="rId4" cstate="print">
+            <a:extLst>
+              <a:ext uri="{28A0092B-C50C-407E-A947-70E740481C1C}">
+                <a14:useLocalDpi xmlns:a14="http://schemas.microsoft.com/office/drawing/2010/main" val="0"/>
+              </a:ext>
+            </a:extLst>
+          </a:blip>
+          <a:stretch>
+            <a:fillRect/>
+          </a:stretch>
+        </p:blipFill>
+        <p:spPr>
+          <a:xfrm>
+            <a:off x="9381020" y="1156220"/>
+            <a:ext cx="1149105" cy="1149105"/>
+          </a:xfrm>
+          <a:prstGeom prst="rect">
+            <a:avLst/>
+          </a:prstGeom>
+        </p:spPr>
+      </p:pic>
+      <p:pic>
+        <p:nvPicPr>
+          <p:cNvPr id="5" name="Рисунок 4"/>
+          <p:cNvPicPr>
+            <a:picLocks noChangeAspect="1"/>
+          </p:cNvPicPr>
+          <p:nvPr/>
+        </p:nvPicPr>
+        <p:blipFill>
+          <a:blip r:embed="rId5" cstate="print">
+            <a:extLst>
+              <a:ext uri="{28A0092B-C50C-407E-A947-70E740481C1C}">
+                <a14:useLocalDpi xmlns:a14="http://schemas.microsoft.com/office/drawing/2010/main" val="0"/>
+              </a:ext>
+            </a:extLst>
+          </a:blip>
+          <a:stretch>
+            <a:fillRect/>
+          </a:stretch>
+        </p:blipFill>
+        <p:spPr>
+          <a:xfrm>
+            <a:off x="10923754" y="1214004"/>
+            <a:ext cx="1091321" cy="1091321"/>
+          </a:xfrm>
+          <a:prstGeom prst="rect">
+            <a:avLst/>
+          </a:prstGeom>
+        </p:spPr>
+      </p:pic>
+      <p:pic>
+        <p:nvPicPr>
+          <p:cNvPr id="8" name="Рисунок 7"/>
+          <p:cNvPicPr>
+            <a:picLocks noChangeAspect="1"/>
+          </p:cNvPicPr>
+          <p:nvPr/>
+        </p:nvPicPr>
+        <p:blipFill rotWithShape="1">
+          <a:blip r:embed="rId6" cstate="print">
+            <a:extLst>
+              <a:ext uri="{28A0092B-C50C-407E-A947-70E740481C1C}">
+                <a14:useLocalDpi xmlns:a14="http://schemas.microsoft.com/office/drawing/2010/main" val="0"/>
+              </a:ext>
+            </a:extLst>
+          </a:blip>
+          <a:srcRect r="68636"/>
+          <a:stretch/>
+        </p:blipFill>
+        <p:spPr>
+          <a:xfrm>
+            <a:off x="10959283" y="2531690"/>
+            <a:ext cx="1020261" cy="1011481"/>
+          </a:xfrm>
+          <a:prstGeom prst="rect">
+            <a:avLst/>
+          </a:prstGeom>
+        </p:spPr>
+      </p:pic>
+      <p:pic>
+        <p:nvPicPr>
+          <p:cNvPr id="9" name="Рисунок 8"/>
+          <p:cNvPicPr>
+            <a:picLocks noChangeAspect="1"/>
+          </p:cNvPicPr>
+          <p:nvPr/>
+        </p:nvPicPr>
+        <p:blipFill>
+          <a:blip r:embed="rId7" cstate="print">
+            <a:extLst>
+              <a:ext uri="{28A0092B-C50C-407E-A947-70E740481C1C}">
+                <a14:useLocalDpi xmlns:a14="http://schemas.microsoft.com/office/drawing/2010/main" val="0"/>
+              </a:ext>
+            </a:extLst>
+          </a:blip>
+          <a:stretch>
+            <a:fillRect/>
+          </a:stretch>
+        </p:blipFill>
+        <p:spPr>
+          <a:xfrm>
+            <a:off x="8674075" y="3965195"/>
+            <a:ext cx="534573" cy="661600"/>
+          </a:xfrm>
+          <a:prstGeom prst="rect">
+            <a:avLst/>
+          </a:prstGeom>
+        </p:spPr>
+      </p:pic>
+      <p:pic>
+        <p:nvPicPr>
+          <p:cNvPr id="10" name="Рисунок 9"/>
+          <p:cNvPicPr>
+            <a:picLocks noChangeAspect="1"/>
+          </p:cNvPicPr>
+          <p:nvPr/>
+        </p:nvPicPr>
+        <p:blipFill>
+          <a:blip r:embed="rId8" cstate="print">
+            <a:extLst>
+              <a:ext uri="{28A0092B-C50C-407E-A947-70E740481C1C}">
+                <a14:useLocalDpi xmlns:a14="http://schemas.microsoft.com/office/drawing/2010/main" val="0"/>
+              </a:ext>
+            </a:extLst>
+          </a:blip>
+          <a:stretch>
+            <a:fillRect/>
+          </a:stretch>
+        </p:blipFill>
+        <p:spPr>
+          <a:xfrm>
+            <a:off x="11276011" y="4451379"/>
+            <a:ext cx="847889" cy="754621"/>
+          </a:xfrm>
+          <a:prstGeom prst="rect">
+            <a:avLst/>
+          </a:prstGeom>
+        </p:spPr>
+      </p:pic>
+      <p:pic>
+        <p:nvPicPr>
+          <p:cNvPr id="12" name="Рисунок 11"/>
+          <p:cNvPicPr>
+            <a:picLocks noChangeAspect="1"/>
+          </p:cNvPicPr>
+          <p:nvPr/>
+        </p:nvPicPr>
+        <p:blipFill>
+          <a:blip r:embed="rId9" cstate="print">
+            <a:extLst>
+              <a:ext uri="{28A0092B-C50C-407E-A947-70E740481C1C}">
+                <a14:useLocalDpi xmlns:a14="http://schemas.microsoft.com/office/drawing/2010/main" val="0"/>
+              </a:ext>
+            </a:extLst>
+          </a:blip>
+          <a:stretch>
+            <a:fillRect/>
+          </a:stretch>
+        </p:blipFill>
+        <p:spPr>
+          <a:xfrm>
+            <a:off x="4549487" y="5878217"/>
+            <a:ext cx="917863" cy="816897"/>
           </a:xfrm>
           <a:prstGeom prst="rect">
             <a:avLst/>
@@ -5470,7 +4682,7 @@
     </p:spTree>
     <p:extLst>
       <p:ext uri="{BB962C8B-B14F-4D97-AF65-F5344CB8AC3E}">
-        <p14:creationId xmlns:p14="http://schemas.microsoft.com/office/powerpoint/2010/main" val="4166059276"/>
+        <p14:creationId xmlns:p14="http://schemas.microsoft.com/office/powerpoint/2010/main" val="2240681748"/>
       </p:ext>
     </p:extLst>
   </p:cSld>
@@ -5553,7 +4765,7 @@
           <a:p>
             <a:pPr algn="ctr"/>
             <a:r>
-              <a:rPr lang="ru-RU" sz="2800" b="1" dirty="0" smtClean="0">
+              <a:rPr lang="ru-RU" sz="2800" b="1" dirty="0">
                 <a:solidFill>
                   <a:schemeClr val="tx2">
                     <a:lumMod val="50000"/>
@@ -5562,17 +4774,8 @@
                 <a:latin typeface="Bookman Old Style" panose="02050604050505020204" pitchFamily="18" charset="0"/>
                 <a:cs typeface="Times New Roman" panose="02020603050405020304" pitchFamily="18" charset="0"/>
               </a:rPr>
-              <a:t>Мобильная разработка</a:t>
-            </a:r>
-            <a:endParaRPr lang="ru-RU" sz="2800" b="1" dirty="0">
-              <a:solidFill>
-                <a:schemeClr val="tx2">
-                  <a:lumMod val="50000"/>
-                </a:schemeClr>
-              </a:solidFill>
-              <a:latin typeface="Bookman Old Style" panose="02050604050505020204" pitchFamily="18" charset="0"/>
-              <a:cs typeface="Times New Roman" panose="02020603050405020304" pitchFamily="18" charset="0"/>
-            </a:endParaRPr>
+              <a:t>Серверное ПО</a:t>
+            </a:r>
           </a:p>
         </p:txBody>
       </p:sp>
@@ -5585,7 +4788,7 @@
         <p:spPr>
           <a:xfrm>
             <a:off x="0" y="654355"/>
-            <a:ext cx="12192000" cy="3970318"/>
+            <a:ext cx="12192000" cy="6186309"/>
           </a:xfrm>
           <a:prstGeom prst="rect">
             <a:avLst/>
@@ -5597,118 +4800,222 @@
           </a:bodyPr>
           <a:lstStyle/>
           <a:p>
-            <a:pPr algn="just">
+            <a:pPr>
               <a:lnSpc>
                 <a:spcPct val="150000"/>
               </a:lnSpc>
             </a:pPr>
             <a:r>
-              <a:rPr lang="ru-RU" sz="2400" dirty="0">
-                <a:latin typeface="Bookman Old Style" panose="02050604050505020204" pitchFamily="18" charset="0"/>
-              </a:rPr>
-              <a:t>Следующее направление — мобильное, и здесь есть две базовых ветви разработки: </a:t>
-            </a:r>
-            <a:r>
-              <a:rPr lang="ru-RU" sz="2400" b="1" dirty="0" err="1">
-                <a:latin typeface="Bookman Old Style" panose="02050604050505020204" pitchFamily="18" charset="0"/>
-              </a:rPr>
-              <a:t>Android</a:t>
-            </a:r>
-            <a:r>
-              <a:rPr lang="ru-RU" sz="2400" dirty="0">
-                <a:latin typeface="Bookman Old Style" panose="02050604050505020204" pitchFamily="18" charset="0"/>
-              </a:rPr>
-              <a:t> и </a:t>
-            </a:r>
-            <a:r>
-              <a:rPr lang="ru-RU" sz="2400" b="1" dirty="0" err="1">
-                <a:latin typeface="Bookman Old Style" panose="02050604050505020204" pitchFamily="18" charset="0"/>
-              </a:rPr>
-              <a:t>iOS</a:t>
-            </a:r>
-            <a:r>
-              <a:rPr lang="ru-RU" sz="2400" dirty="0" smtClean="0">
-                <a:latin typeface="Bookman Old Style" panose="02050604050505020204" pitchFamily="18" charset="0"/>
-              </a:rPr>
-              <a:t>.</a:t>
-            </a:r>
-          </a:p>
-          <a:p>
-            <a:pPr algn="just">
+              <a:rPr lang="ru-RU" sz="2400" b="1" dirty="0" smtClean="0">
+                <a:latin typeface="Bookman Old Style" panose="02050604050505020204" pitchFamily="18" charset="0"/>
+              </a:rPr>
+              <a:t>Системное </a:t>
+            </a:r>
+            <a:r>
+              <a:rPr lang="ru-RU" sz="2400" b="1" dirty="0">
+                <a:latin typeface="Bookman Old Style" panose="02050604050505020204" pitchFamily="18" charset="0"/>
+              </a:rPr>
+              <a:t>и прикладное ПО</a:t>
+            </a:r>
+            <a:endParaRPr lang="ru-RU" sz="2400" dirty="0">
+              <a:latin typeface="Bookman Old Style" panose="02050604050505020204" pitchFamily="18" charset="0"/>
+            </a:endParaRPr>
+          </a:p>
+          <a:p>
+            <a:pPr>
               <a:lnSpc>
                 <a:spcPct val="150000"/>
               </a:lnSpc>
             </a:pPr>
-            <a:endParaRPr lang="ru-RU" sz="2400" dirty="0" smtClean="0">
+            <a:r>
+              <a:rPr lang="ru-RU" sz="2400" b="1" dirty="0">
+                <a:latin typeface="Bookman Old Style" panose="02050604050505020204" pitchFamily="18" charset="0"/>
+              </a:rPr>
+              <a:t>Системное ПО (работа с «железом»)</a:t>
+            </a:r>
+            <a:endParaRPr lang="ru-RU" sz="2400" dirty="0">
               <a:latin typeface="Bookman Old Style" panose="02050604050505020204" pitchFamily="18" charset="0"/>
             </a:endParaRPr>
           </a:p>
           <a:p>
-            <a:pPr algn="just">
+            <a:pPr lvl="1">
               <a:lnSpc>
                 <a:spcPct val="150000"/>
               </a:lnSpc>
             </a:pPr>
             <a:r>
-              <a:rPr lang="ru-RU" sz="2400" b="1" dirty="0" err="1" smtClean="0">
-                <a:latin typeface="Bookman Old Style" panose="02050604050505020204" pitchFamily="18" charset="0"/>
-              </a:rPr>
-              <a:t>Android</a:t>
-            </a:r>
-            <a:r>
               <a:rPr lang="ru-RU" sz="2400" b="1" dirty="0">
                 <a:latin typeface="Bookman Old Style" panose="02050604050505020204" pitchFamily="18" charset="0"/>
               </a:rPr>
-              <a:t>: </a:t>
-            </a:r>
-            <a:r>
-              <a:rPr lang="ru-RU" sz="2400" b="1" dirty="0" err="1">
-                <a:latin typeface="Bookman Old Style" panose="02050604050505020204" pitchFamily="18" charset="0"/>
-              </a:rPr>
-              <a:t>Java</a:t>
-            </a:r>
-            <a:r>
-              <a:rPr lang="ru-RU" sz="2400" b="1" dirty="0">
-                <a:latin typeface="Bookman Old Style" panose="02050604050505020204" pitchFamily="18" charset="0"/>
-              </a:rPr>
-              <a:t>, </a:t>
-            </a:r>
-            <a:r>
-              <a:rPr lang="ru-RU" sz="2400" b="1" dirty="0" err="1">
-                <a:latin typeface="Bookman Old Style" panose="02050604050505020204" pitchFamily="18" charset="0"/>
-              </a:rPr>
-              <a:t>Kotlin</a:t>
-            </a:r>
-            <a:endParaRPr lang="ru-RU" sz="2400" b="1" dirty="0">
-              <a:latin typeface="Bookman Old Style" panose="02050604050505020204" pitchFamily="18" charset="0"/>
-            </a:endParaRPr>
-          </a:p>
-          <a:p>
-            <a:pPr algn="just">
+              <a:t>Что это:</a:t>
+            </a:r>
+            <a:r>
+              <a:rPr lang="ru-RU" sz="2400" dirty="0">
+                <a:latin typeface="Bookman Old Style" panose="02050604050505020204" pitchFamily="18" charset="0"/>
+              </a:rPr>
+              <a:t> </a:t>
+            </a:r>
+            <a:r>
+              <a:rPr lang="ru-RU" sz="2400" dirty="0" smtClean="0">
+                <a:latin typeface="Bookman Old Style" panose="02050604050505020204" pitchFamily="18" charset="0"/>
+              </a:rPr>
+              <a:t>ОС, </a:t>
+            </a:r>
+            <a:r>
+              <a:rPr lang="ru-RU" sz="2400" dirty="0">
+                <a:latin typeface="Bookman Old Style" panose="02050604050505020204" pitchFamily="18" charset="0"/>
+              </a:rPr>
+              <a:t>драйверы, управление ресурсами ПК.</a:t>
+            </a:r>
+          </a:p>
+          <a:p>
+            <a:pPr lvl="1">
               <a:lnSpc>
                 <a:spcPct val="150000"/>
               </a:lnSpc>
             </a:pPr>
             <a:r>
+              <a:rPr lang="ru-RU" sz="2400" b="1" dirty="0">
+                <a:latin typeface="Bookman Old Style" panose="02050604050505020204" pitchFamily="18" charset="0"/>
+              </a:rPr>
+              <a:t>Языки:</a:t>
+            </a:r>
+            <a:r>
               <a:rPr lang="ru-RU" sz="2400" dirty="0">
                 <a:latin typeface="Bookman Old Style" panose="02050604050505020204" pitchFamily="18" charset="0"/>
               </a:rPr>
-              <a:t>В </a:t>
-            </a:r>
-            <a:r>
-              <a:rPr lang="ru-RU" sz="2400" b="1" dirty="0" err="1">
-                <a:latin typeface="Bookman Old Style" panose="02050604050505020204" pitchFamily="18" charset="0"/>
-              </a:rPr>
-              <a:t>Android</a:t>
+              <a:t> C, C++, </a:t>
+            </a:r>
+            <a:r>
+              <a:rPr lang="ru-RU" sz="2400" dirty="0" err="1">
+                <a:latin typeface="Bookman Old Style" panose="02050604050505020204" pitchFamily="18" charset="0"/>
+              </a:rPr>
+              <a:t>Rust</a:t>
+            </a:r>
+            <a:r>
+              <a:rPr lang="ru-RU" sz="2400" dirty="0" smtClean="0">
+                <a:latin typeface="Bookman Old Style" panose="02050604050505020204" pitchFamily="18" charset="0"/>
+              </a:rPr>
+              <a:t>.</a:t>
+            </a:r>
+          </a:p>
+          <a:p>
+            <a:pPr lvl="1">
+              <a:lnSpc>
+                <a:spcPct val="150000"/>
+              </a:lnSpc>
+            </a:pPr>
+            <a:endParaRPr lang="ru-RU" sz="2400" dirty="0">
+              <a:latin typeface="Bookman Old Style" panose="02050604050505020204" pitchFamily="18" charset="0"/>
+            </a:endParaRPr>
+          </a:p>
+          <a:p>
+            <a:pPr>
+              <a:lnSpc>
+                <a:spcPct val="150000"/>
+              </a:lnSpc>
+            </a:pPr>
+            <a:r>
+              <a:rPr lang="ru-RU" sz="2400" b="1" dirty="0">
+                <a:latin typeface="Bookman Old Style" panose="02050604050505020204" pitchFamily="18" charset="0"/>
+              </a:rPr>
+              <a:t>Прикладное и серверное ПО</a:t>
+            </a:r>
+            <a:endParaRPr lang="ru-RU" sz="2400" dirty="0">
+              <a:latin typeface="Bookman Old Style" panose="02050604050505020204" pitchFamily="18" charset="0"/>
+            </a:endParaRPr>
+          </a:p>
+          <a:p>
+            <a:pPr lvl="1">
+              <a:lnSpc>
+                <a:spcPct val="150000"/>
+              </a:lnSpc>
+            </a:pPr>
+            <a:r>
+              <a:rPr lang="ru-RU" sz="2400" b="1" dirty="0">
+                <a:latin typeface="Bookman Old Style" panose="02050604050505020204" pitchFamily="18" charset="0"/>
+              </a:rPr>
+              <a:t>Что это:</a:t>
             </a:r>
             <a:r>
               <a:rPr lang="ru-RU" sz="2400" dirty="0">
                 <a:latin typeface="Bookman Old Style" panose="02050604050505020204" pitchFamily="18" charset="0"/>
               </a:rPr>
-              <a:t> раньше был только </a:t>
-            </a:r>
-            <a:r>
-              <a:rPr lang="ru-RU" sz="2400" b="1" dirty="0" err="1">
+              <a:t> Программы для решения конкретных задач (аналитика, расчеты, базы данных).</a:t>
+            </a:r>
+          </a:p>
+          <a:p>
+            <a:pPr lvl="1">
+              <a:lnSpc>
+                <a:spcPct val="150000"/>
+              </a:lnSpc>
+            </a:pPr>
+            <a:r>
+              <a:rPr lang="ru-RU" sz="2400" b="1" dirty="0">
+                <a:latin typeface="Bookman Old Style" panose="02050604050505020204" pitchFamily="18" charset="0"/>
+              </a:rPr>
+              <a:t>Структура:</a:t>
+            </a:r>
+            <a:r>
+              <a:rPr lang="ru-RU" sz="2400" dirty="0">
+                <a:latin typeface="Bookman Old Style" panose="02050604050505020204" pitchFamily="18" charset="0"/>
+              </a:rPr>
+              <a:t> Состоит из </a:t>
+            </a:r>
+            <a:r>
+              <a:rPr lang="ru-RU" sz="2400" dirty="0" smtClean="0">
+                <a:latin typeface="Bookman Old Style" panose="02050604050505020204" pitchFamily="18" charset="0"/>
+              </a:rPr>
+              <a:t>интерфейса пользователя </a:t>
+            </a:r>
+            <a:r>
+              <a:rPr lang="ru-RU" sz="2400" dirty="0">
+                <a:latin typeface="Bookman Old Style" panose="02050604050505020204" pitchFamily="18" charset="0"/>
+              </a:rPr>
+              <a:t>и </a:t>
+            </a:r>
+            <a:r>
+              <a:rPr lang="ru-RU" sz="2400" dirty="0" smtClean="0">
+                <a:latin typeface="Bookman Old Style" panose="02050604050505020204" pitchFamily="18" charset="0"/>
+              </a:rPr>
+              <a:t>логики </a:t>
+            </a:r>
+            <a:r>
+              <a:rPr lang="ru-RU" sz="2400" dirty="0">
+                <a:latin typeface="Bookman Old Style" panose="02050604050505020204" pitchFamily="18" charset="0"/>
+              </a:rPr>
+              <a:t>на </a:t>
+            </a:r>
+            <a:r>
+              <a:rPr lang="ru-RU" sz="2400" dirty="0" smtClean="0">
+                <a:latin typeface="Bookman Old Style" panose="02050604050505020204" pitchFamily="18" charset="0"/>
+              </a:rPr>
+              <a:t>сервере.</a:t>
+            </a:r>
+            <a:endParaRPr lang="ru-RU" sz="2400" dirty="0">
+              <a:latin typeface="Bookman Old Style" panose="02050604050505020204" pitchFamily="18" charset="0"/>
+            </a:endParaRPr>
+          </a:p>
+          <a:p>
+            <a:pPr lvl="1">
+              <a:lnSpc>
+                <a:spcPct val="150000"/>
+              </a:lnSpc>
+            </a:pPr>
+            <a:r>
+              <a:rPr lang="ru-RU" sz="2400" b="1" dirty="0">
+                <a:latin typeface="Bookman Old Style" panose="02050604050505020204" pitchFamily="18" charset="0"/>
+              </a:rPr>
+              <a:t>Языки:</a:t>
+            </a:r>
+            <a:r>
+              <a:rPr lang="ru-RU" sz="2400" dirty="0">
+                <a:latin typeface="Bookman Old Style" panose="02050604050505020204" pitchFamily="18" charset="0"/>
+              </a:rPr>
+              <a:t> </a:t>
+            </a:r>
+            <a:r>
+              <a:rPr lang="ru-RU" sz="2400" dirty="0" err="1">
                 <a:latin typeface="Bookman Old Style" panose="02050604050505020204" pitchFamily="18" charset="0"/>
               </a:rPr>
               <a:t>Java</a:t>
@@ -5717,38 +5024,35 @@
               <a:rPr lang="ru-RU" sz="2400" dirty="0">
                 <a:latin typeface="Bookman Old Style" panose="02050604050505020204" pitchFamily="18" charset="0"/>
               </a:rPr>
-              <a:t>, но сейчас большие обороты набирает язык </a:t>
-            </a:r>
-            <a:r>
-              <a:rPr lang="ru-RU" sz="2400" b="1" dirty="0" err="1">
-                <a:latin typeface="Bookman Old Style" panose="02050604050505020204" pitchFamily="18" charset="0"/>
-              </a:rPr>
-              <a:t>Kotlin</a:t>
+              <a:t>, </a:t>
+            </a:r>
+            <a:r>
+              <a:rPr lang="ru-RU" sz="2400" dirty="0" err="1">
+                <a:latin typeface="Bookman Old Style" panose="02050604050505020204" pitchFamily="18" charset="0"/>
+              </a:rPr>
+              <a:t>Python</a:t>
             </a:r>
             <a:r>
               <a:rPr lang="ru-RU" sz="2400" dirty="0">
                 <a:latin typeface="Bookman Old Style" panose="02050604050505020204" pitchFamily="18" charset="0"/>
               </a:rPr>
-              <a:t>. Люди, использующие его в своих проектах, говорят, что теперь разработка под </a:t>
-            </a:r>
-            <a:r>
-              <a:rPr lang="ru-RU" sz="2400" b="1" dirty="0" err="1">
-                <a:latin typeface="Bookman Old Style" panose="02050604050505020204" pitchFamily="18" charset="0"/>
-              </a:rPr>
-              <a:t>Android</a:t>
-            </a:r>
-            <a:r>
-              <a:rPr lang="ru-RU" sz="2400" dirty="0">
-                <a:latin typeface="Bookman Old Style" panose="02050604050505020204" pitchFamily="18" charset="0"/>
-              </a:rPr>
-              <a:t> стала действительно приятной.</a:t>
-            </a:r>
+              <a:t>, C#, C++ и практически любые другие</a:t>
+            </a:r>
+            <a:r>
+              <a:rPr lang="ru-RU" sz="2400" dirty="0" smtClean="0">
+                <a:latin typeface="Bookman Old Style" panose="02050604050505020204" pitchFamily="18" charset="0"/>
+              </a:rPr>
+              <a:t>.</a:t>
+            </a:r>
+            <a:endParaRPr lang="ru-RU" sz="2400" dirty="0">
+              <a:latin typeface="Bookman Old Style" panose="02050604050505020204" pitchFamily="18" charset="0"/>
+            </a:endParaRPr>
           </a:p>
         </p:txBody>
       </p:sp>
       <p:pic>
         <p:nvPicPr>
-          <p:cNvPr id="2" name="Рисунок 1"/>
+          <p:cNvPr id="8" name="Рисунок 7"/>
           <p:cNvPicPr>
             <a:picLocks noChangeAspect="1"/>
           </p:cNvPicPr>
@@ -5768,8 +5072,8 @@
         </p:blipFill>
         <p:spPr>
           <a:xfrm>
-            <a:off x="3054927" y="4495223"/>
-            <a:ext cx="1288474" cy="2362777"/>
+            <a:off x="7484136" y="2431215"/>
+            <a:ext cx="922793" cy="1039296"/>
           </a:xfrm>
           <a:prstGeom prst="rect">
             <a:avLst/>
@@ -5778,7 +5082,7 @@
       </p:pic>
       <p:pic>
         <p:nvPicPr>
-          <p:cNvPr id="4" name="Рисунок 3"/>
+          <p:cNvPr id="9" name="Рисунок 8"/>
           <p:cNvPicPr>
             <a:picLocks noChangeAspect="1"/>
           </p:cNvPicPr>
@@ -5798,8 +5102,8 @@
         </p:blipFill>
         <p:spPr>
           <a:xfrm>
-            <a:off x="5124644" y="4565072"/>
-            <a:ext cx="2292928" cy="2292928"/>
+            <a:off x="5410742" y="2431215"/>
+            <a:ext cx="924569" cy="1039296"/>
           </a:xfrm>
           <a:prstGeom prst="rect">
             <a:avLst/>
@@ -5808,14 +5112,14 @@
       </p:pic>
       <p:pic>
         <p:nvPicPr>
-          <p:cNvPr id="5" name="Рисунок 4"/>
+          <p:cNvPr id="10" name="Рисунок 9"/>
           <p:cNvPicPr>
             <a:picLocks noChangeAspect="1"/>
           </p:cNvPicPr>
           <p:nvPr/>
         </p:nvPicPr>
         <p:blipFill>
-          <a:blip r:embed="rId5" cstate="print">
+          <a:blip r:embed="rId5">
             <a:extLst>
               <a:ext uri="{28A0092B-C50C-407E-A947-70E740481C1C}">
                 <a14:useLocalDpi xmlns:a14="http://schemas.microsoft.com/office/drawing/2010/main" val="0"/>
@@ -5828,8 +5132,8 @@
         </p:blipFill>
         <p:spPr>
           <a:xfrm>
-            <a:off x="7790682" y="4565072"/>
-            <a:ext cx="2327952" cy="2327952"/>
+            <a:off x="9555754" y="2431215"/>
+            <a:ext cx="1039296" cy="1039296"/>
           </a:xfrm>
           <a:prstGeom prst="rect">
             <a:avLst/>
@@ -5839,7 +5143,7 @@
     </p:spTree>
     <p:extLst>
       <p:ext uri="{BB962C8B-B14F-4D97-AF65-F5344CB8AC3E}">
-        <p14:creationId xmlns:p14="http://schemas.microsoft.com/office/powerpoint/2010/main" val="2148660490"/>
+        <p14:creationId xmlns:p14="http://schemas.microsoft.com/office/powerpoint/2010/main" val="1649103350"/>
       </p:ext>
     </p:extLst>
   </p:cSld>
@@ -5922,7 +5226,7 @@
           <a:p>
             <a:pPr algn="ctr"/>
             <a:r>
-              <a:rPr lang="ru-RU" sz="2800" b="1" dirty="0" smtClean="0">
+              <a:rPr lang="ru-RU" sz="2800" b="1" dirty="0">
                 <a:solidFill>
                   <a:schemeClr val="tx2">
                     <a:lumMod val="50000"/>
@@ -5931,7 +5235,7 @@
                 <a:latin typeface="Bookman Old Style" panose="02050604050505020204" pitchFamily="18" charset="0"/>
                 <a:cs typeface="Times New Roman" panose="02020603050405020304" pitchFamily="18" charset="0"/>
               </a:rPr>
-              <a:t>Мобильная разработка</a:t>
+              <a:t>Проблема сложности и роль архитектуры</a:t>
             </a:r>
             <a:endParaRPr lang="ru-RU" sz="2800" b="1" dirty="0">
               <a:solidFill>
@@ -5954,7 +5258,7 @@
         <p:spPr>
           <a:xfrm>
             <a:off x="0" y="654355"/>
-            <a:ext cx="12192000" cy="4524315"/>
+            <a:ext cx="12192000" cy="6054414"/>
           </a:xfrm>
           <a:prstGeom prst="rect">
             <a:avLst/>
@@ -5968,181 +5272,144 @@
           <a:p>
             <a:pPr algn="just">
               <a:lnSpc>
-                <a:spcPct val="150000"/>
+                <a:spcPct val="125000"/>
               </a:lnSpc>
             </a:pPr>
             <a:r>
-              <a:rPr lang="ru-RU" sz="2400" b="1" dirty="0" err="1">
-                <a:latin typeface="Bookman Old Style" panose="02050604050505020204" pitchFamily="18" charset="0"/>
-              </a:rPr>
-              <a:t>iOS</a:t>
-            </a:r>
-            <a:r>
-              <a:rPr lang="ru-RU" sz="2400" b="1" dirty="0">
-                <a:latin typeface="Bookman Old Style" panose="02050604050505020204" pitchFamily="18" charset="0"/>
-              </a:rPr>
-              <a:t>: </a:t>
-            </a:r>
-            <a:r>
-              <a:rPr lang="ru-RU" sz="2400" b="1" dirty="0" err="1">
-                <a:latin typeface="Bookman Old Style" panose="02050604050505020204" pitchFamily="18" charset="0"/>
-              </a:rPr>
-              <a:t>Objective</a:t>
-            </a:r>
-            <a:r>
-              <a:rPr lang="ru-RU" sz="2400" b="1" dirty="0">
-                <a:latin typeface="Bookman Old Style" panose="02050604050505020204" pitchFamily="18" charset="0"/>
-              </a:rPr>
-              <a:t>-C, </a:t>
-            </a:r>
-            <a:r>
-              <a:rPr lang="ru-RU" sz="2400" b="1" dirty="0" err="1">
-                <a:latin typeface="Bookman Old Style" panose="02050604050505020204" pitchFamily="18" charset="0"/>
-              </a:rPr>
-              <a:t>Swift</a:t>
-            </a:r>
-            <a:endParaRPr lang="ru-RU" sz="2400" b="1" dirty="0">
+              <a:rPr lang="ru-RU" sz="2400" b="1" spc="-30" dirty="0">
+                <a:latin typeface="Bookman Old Style" panose="02050604050505020204" pitchFamily="18" charset="0"/>
+              </a:rPr>
+              <a:t>Что это:</a:t>
+            </a:r>
+            <a:r>
+              <a:rPr lang="ru-RU" sz="2400" spc="-30" dirty="0">
+                <a:latin typeface="Bookman Old Style" panose="02050604050505020204" pitchFamily="18" charset="0"/>
+              </a:rPr>
+              <a:t> Проверенные временем решения типовых проблем, возникающих при проектировании программного кода.</a:t>
+            </a:r>
+          </a:p>
+          <a:p>
+            <a:pPr algn="just">
+              <a:lnSpc>
+                <a:spcPct val="125000"/>
+              </a:lnSpc>
+            </a:pPr>
+            <a:r>
+              <a:rPr lang="ru-RU" sz="2400" b="1" spc="-30" dirty="0">
+                <a:latin typeface="Bookman Old Style" panose="02050604050505020204" pitchFamily="18" charset="0"/>
+              </a:rPr>
+              <a:t>Универсальность:</a:t>
+            </a:r>
+            <a:r>
+              <a:rPr lang="ru-RU" sz="2400" spc="-30" dirty="0">
+                <a:latin typeface="Bookman Old Style" panose="02050604050505020204" pitchFamily="18" charset="0"/>
+              </a:rPr>
+              <a:t> Паттерны не зависят от конкретного языка программирования. Принципы едины для C#, </a:t>
+            </a:r>
+            <a:r>
+              <a:rPr lang="ru-RU" sz="2400" spc="-30" dirty="0" err="1">
+                <a:latin typeface="Bookman Old Style" panose="02050604050505020204" pitchFamily="18" charset="0"/>
+              </a:rPr>
+              <a:t>Java</a:t>
+            </a:r>
+            <a:r>
+              <a:rPr lang="ru-RU" sz="2400" spc="-30" dirty="0">
+                <a:latin typeface="Bookman Old Style" panose="02050604050505020204" pitchFamily="18" charset="0"/>
+              </a:rPr>
+              <a:t>, </a:t>
+            </a:r>
+            <a:r>
+              <a:rPr lang="ru-RU" sz="2400" spc="-30" dirty="0" err="1">
+                <a:latin typeface="Bookman Old Style" panose="02050604050505020204" pitchFamily="18" charset="0"/>
+              </a:rPr>
+              <a:t>Python</a:t>
+            </a:r>
+            <a:r>
+              <a:rPr lang="ru-RU" sz="2400" spc="-30" dirty="0">
+                <a:latin typeface="Bookman Old Style" panose="02050604050505020204" pitchFamily="18" charset="0"/>
+              </a:rPr>
+              <a:t> и других ООП-языков.</a:t>
+            </a:r>
+          </a:p>
+          <a:p>
+            <a:pPr algn="just">
+              <a:lnSpc>
+                <a:spcPct val="125000"/>
+              </a:lnSpc>
+            </a:pPr>
+            <a:r>
+              <a:rPr lang="ru-RU" sz="2400" b="1" spc="-30" dirty="0">
+                <a:latin typeface="Bookman Old Style" panose="02050604050505020204" pitchFamily="18" charset="0"/>
+              </a:rPr>
+              <a:t>Зачем использовать:</a:t>
+            </a:r>
+            <a:endParaRPr lang="ru-RU" sz="2400" spc="-30" dirty="0">
               <a:latin typeface="Bookman Old Style" panose="02050604050505020204" pitchFamily="18" charset="0"/>
             </a:endParaRPr>
           </a:p>
           <a:p>
-            <a:pPr algn="just">
+            <a:pPr lvl="1" algn="just">
               <a:lnSpc>
-                <a:spcPct val="150000"/>
+                <a:spcPct val="125000"/>
               </a:lnSpc>
             </a:pPr>
             <a:r>
-              <a:rPr lang="ru-RU" sz="2400" dirty="0">
-                <a:latin typeface="Bookman Old Style" panose="02050604050505020204" pitchFamily="18" charset="0"/>
-              </a:rPr>
-              <a:t>Для разработки в </a:t>
-            </a:r>
-            <a:r>
-              <a:rPr lang="ru-RU" sz="2400" b="1" dirty="0" err="1">
-                <a:latin typeface="Bookman Old Style" panose="02050604050505020204" pitchFamily="18" charset="0"/>
-              </a:rPr>
-              <a:t>iOS</a:t>
-            </a:r>
-            <a:r>
-              <a:rPr lang="ru-RU" sz="2400" dirty="0">
-                <a:latin typeface="Bookman Old Style" panose="02050604050505020204" pitchFamily="18" charset="0"/>
-              </a:rPr>
-              <a:t> используется язык </a:t>
-            </a:r>
-            <a:r>
-              <a:rPr lang="ru-RU" sz="2400" b="1" dirty="0" err="1">
-                <a:latin typeface="Bookman Old Style" panose="02050604050505020204" pitchFamily="18" charset="0"/>
-              </a:rPr>
-              <a:t>Swift</a:t>
-            </a:r>
-            <a:r>
-              <a:rPr lang="ru-RU" sz="2400" dirty="0">
-                <a:latin typeface="Bookman Old Style" panose="02050604050505020204" pitchFamily="18" charset="0"/>
-              </a:rPr>
-              <a:t>, на который мигрировало большинство разработчиков, поскольку хотя </a:t>
-            </a:r>
-            <a:r>
-              <a:rPr lang="ru-RU" sz="2400" b="1" dirty="0" err="1">
-                <a:latin typeface="Bookman Old Style" panose="02050604050505020204" pitchFamily="18" charset="0"/>
-              </a:rPr>
-              <a:t>Objective</a:t>
-            </a:r>
-            <a:r>
-              <a:rPr lang="ru-RU" sz="2400" b="1" dirty="0">
-                <a:latin typeface="Bookman Old Style" panose="02050604050505020204" pitchFamily="18" charset="0"/>
-              </a:rPr>
-              <a:t>-C</a:t>
-            </a:r>
-            <a:r>
-              <a:rPr lang="ru-RU" sz="2400" dirty="0">
-                <a:latin typeface="Bookman Old Style" panose="02050604050505020204" pitchFamily="18" charset="0"/>
-              </a:rPr>
-              <a:t> долго был главным и единственным языком, но уже морально устарел. </a:t>
-            </a:r>
-            <a:r>
-              <a:rPr lang="ru-RU" sz="2400" b="1" dirty="0" err="1">
-                <a:latin typeface="Bookman Old Style" panose="02050604050505020204" pitchFamily="18" charset="0"/>
-              </a:rPr>
-              <a:t>Swift</a:t>
-            </a:r>
-            <a:r>
-              <a:rPr lang="ru-RU" sz="2400" dirty="0">
-                <a:latin typeface="Bookman Old Style" panose="02050604050505020204" pitchFamily="18" charset="0"/>
-              </a:rPr>
-              <a:t> — это отличный свежий язык с правильными идеями, который </a:t>
-            </a:r>
-            <a:r>
-              <a:rPr lang="ru-RU" sz="2400" b="1" dirty="0" err="1">
-                <a:latin typeface="Bookman Old Style" panose="02050604050505020204" pitchFamily="18" charset="0"/>
-              </a:rPr>
-              <a:t>Apple</a:t>
-            </a:r>
-            <a:r>
-              <a:rPr lang="ru-RU" sz="2400" dirty="0">
-                <a:latin typeface="Bookman Old Style" panose="02050604050505020204" pitchFamily="18" charset="0"/>
-              </a:rPr>
-              <a:t> внезапно сделала </a:t>
-            </a:r>
-            <a:r>
-              <a:rPr lang="ru-RU" sz="2400" b="1" dirty="0" err="1">
-                <a:latin typeface="Bookman Old Style" panose="02050604050505020204" pitchFamily="18" charset="0"/>
-              </a:rPr>
-              <a:t>open-source</a:t>
-            </a:r>
-            <a:r>
-              <a:rPr lang="ru-RU" sz="2400" dirty="0">
-                <a:latin typeface="Bookman Old Style" panose="02050604050505020204" pitchFamily="18" charset="0"/>
-              </a:rPr>
-              <a:t> — а значит его скоро можно будет использовать вне </a:t>
-            </a:r>
-            <a:r>
-              <a:rPr lang="ru-RU" sz="2400" b="1" dirty="0" err="1">
-                <a:latin typeface="Bookman Old Style" panose="02050604050505020204" pitchFamily="18" charset="0"/>
-              </a:rPr>
-              <a:t>iOS</a:t>
-            </a:r>
-            <a:r>
-              <a:rPr lang="ru-RU" sz="2400" dirty="0">
-                <a:latin typeface="Bookman Old Style" panose="02050604050505020204" pitchFamily="18" charset="0"/>
-              </a:rPr>
-              <a:t>, что может быть весьма интересно, потому что этот язык обладает кучей полезных качеств.</a:t>
+              <a:rPr lang="ru-RU" sz="2400" b="1" spc="-30" dirty="0">
+                <a:latin typeface="Bookman Old Style" panose="02050604050505020204" pitchFamily="18" charset="0"/>
+              </a:rPr>
+              <a:t>Готовые шаблоны:</a:t>
+            </a:r>
+            <a:r>
+              <a:rPr lang="ru-RU" sz="2400" spc="-30" dirty="0">
+                <a:latin typeface="Bookman Old Style" panose="02050604050505020204" pitchFamily="18" charset="0"/>
+              </a:rPr>
+              <a:t> Позволяют не «изобретать велосипед», а использовать стандартные способы формализации связей между объектами.</a:t>
+            </a:r>
+          </a:p>
+          <a:p>
+            <a:pPr lvl="1" algn="just">
+              <a:lnSpc>
+                <a:spcPct val="125000"/>
+              </a:lnSpc>
+            </a:pPr>
+            <a:r>
+              <a:rPr lang="ru-RU" sz="2400" b="1" spc="-30" dirty="0">
+                <a:latin typeface="Bookman Old Style" panose="02050604050505020204" pitchFamily="18" charset="0"/>
+              </a:rPr>
+              <a:t>Чистота кода:</a:t>
+            </a:r>
+            <a:r>
+              <a:rPr lang="ru-RU" sz="2400" spc="-30" dirty="0">
+                <a:latin typeface="Bookman Old Style" panose="02050604050505020204" pitchFamily="18" charset="0"/>
+              </a:rPr>
+              <a:t> Упрощают структуру программы, делая её более гибкой.</a:t>
+            </a:r>
+          </a:p>
+          <a:p>
+            <a:pPr lvl="1" algn="just">
+              <a:lnSpc>
+                <a:spcPct val="125000"/>
+              </a:lnSpc>
+            </a:pPr>
+            <a:r>
+              <a:rPr lang="ru-RU" sz="2400" b="1" spc="-30" dirty="0">
+                <a:latin typeface="Bookman Old Style" panose="02050604050505020204" pitchFamily="18" charset="0"/>
+              </a:rPr>
+              <a:t>Командная работа:</a:t>
+            </a:r>
+            <a:r>
+              <a:rPr lang="ru-RU" sz="2400" spc="-30" dirty="0">
+                <a:latin typeface="Bookman Old Style" panose="02050604050505020204" pitchFamily="18" charset="0"/>
+              </a:rPr>
+              <a:t> Создают «общий язык» для разработчиков. Зная паттерн, другой программист мгновенно понимает архитектурный замысел.</a:t>
             </a:r>
           </a:p>
         </p:txBody>
       </p:sp>
-      <p:pic>
-        <p:nvPicPr>
-          <p:cNvPr id="2" name="Рисунок 1"/>
-          <p:cNvPicPr>
-            <a:picLocks noChangeAspect="1"/>
-          </p:cNvPicPr>
-          <p:nvPr/>
-        </p:nvPicPr>
-        <p:blipFill rotWithShape="1">
-          <a:blip r:embed="rId3" cstate="print">
-            <a:extLst>
-              <a:ext uri="{28A0092B-C50C-407E-A947-70E740481C1C}">
-                <a14:useLocalDpi xmlns:a14="http://schemas.microsoft.com/office/drawing/2010/main" val="0"/>
-              </a:ext>
-            </a:extLst>
-          </a:blip>
-          <a:srcRect r="68636"/>
-          <a:stretch/>
-        </p:blipFill>
-        <p:spPr>
-          <a:xfrm>
-            <a:off x="4945670" y="4498341"/>
-            <a:ext cx="2300659" cy="2280861"/>
-          </a:xfrm>
-          <a:prstGeom prst="rect">
-            <a:avLst/>
-          </a:prstGeom>
-        </p:spPr>
-      </p:pic>
     </p:spTree>
     <p:extLst>
       <p:ext uri="{BB962C8B-B14F-4D97-AF65-F5344CB8AC3E}">
-        <p14:creationId xmlns:p14="http://schemas.microsoft.com/office/powerpoint/2010/main" val="862916117"/>
+        <p14:creationId xmlns:p14="http://schemas.microsoft.com/office/powerpoint/2010/main" val="1415349151"/>
       </p:ext>
     </p:extLst>
   </p:cSld>
@@ -6178,7 +5445,212 @@
       </p:grpSpPr>
       <p:sp>
         <p:nvSpPr>
-          <p:cNvPr id="11" name="Rectangle 28" descr="Светлый диагональный 2"/>
+          <p:cNvPr id="7" name="Прямоугольник 6"/>
+          <p:cNvSpPr/>
+          <p:nvPr/>
+        </p:nvSpPr>
+        <p:spPr>
+          <a:xfrm>
+            <a:off x="0" y="654356"/>
+            <a:ext cx="12192000" cy="5078313"/>
+          </a:xfrm>
+          <a:prstGeom prst="rect">
+            <a:avLst/>
+          </a:prstGeom>
+        </p:spPr>
+        <p:txBody>
+          <a:bodyPr wrap="square" lIns="360000" rIns="360000">
+            <a:spAutoFit/>
+          </a:bodyPr>
+          <a:lstStyle/>
+          <a:p>
+            <a:pPr algn="just">
+              <a:lnSpc>
+                <a:spcPct val="150000"/>
+              </a:lnSpc>
+            </a:pPr>
+            <a:r>
+              <a:rPr lang="ru-RU" sz="2400" b="1" dirty="0" smtClean="0">
+                <a:latin typeface="Bookman Old Style" panose="02050604050505020204" pitchFamily="18" charset="0"/>
+              </a:rPr>
+              <a:t>1. Принцип </a:t>
+            </a:r>
+            <a:r>
+              <a:rPr lang="ru-RU" sz="2400" b="1" dirty="0">
+                <a:latin typeface="Bookman Old Style" panose="02050604050505020204" pitchFamily="18" charset="0"/>
+              </a:rPr>
+              <a:t>KISS (</a:t>
+            </a:r>
+            <a:r>
+              <a:rPr lang="ru-RU" sz="2400" b="1" dirty="0" err="1">
+                <a:latin typeface="Bookman Old Style" panose="02050604050505020204" pitchFamily="18" charset="0"/>
+              </a:rPr>
+              <a:t>Keep</a:t>
+            </a:r>
+            <a:r>
+              <a:rPr lang="ru-RU" sz="2400" b="1" dirty="0">
+                <a:latin typeface="Bookman Old Style" panose="02050604050505020204" pitchFamily="18" charset="0"/>
+              </a:rPr>
+              <a:t> </a:t>
+            </a:r>
+            <a:r>
+              <a:rPr lang="ru-RU" sz="2400" b="1" dirty="0" err="1">
+                <a:latin typeface="Bookman Old Style" panose="02050604050505020204" pitchFamily="18" charset="0"/>
+              </a:rPr>
+              <a:t>It</a:t>
+            </a:r>
+            <a:r>
+              <a:rPr lang="ru-RU" sz="2400" b="1" dirty="0">
+                <a:latin typeface="Bookman Old Style" panose="02050604050505020204" pitchFamily="18" charset="0"/>
+              </a:rPr>
+              <a:t> </a:t>
+            </a:r>
+            <a:r>
+              <a:rPr lang="ru-RU" sz="2400" b="1" dirty="0" err="1">
+                <a:latin typeface="Bookman Old Style" panose="02050604050505020204" pitchFamily="18" charset="0"/>
+              </a:rPr>
+              <a:t>Simple</a:t>
+            </a:r>
+            <a:r>
+              <a:rPr lang="ru-RU" sz="2400" b="1" dirty="0">
+                <a:latin typeface="Bookman Old Style" panose="02050604050505020204" pitchFamily="18" charset="0"/>
+              </a:rPr>
+              <a:t>, </a:t>
+            </a:r>
+            <a:r>
+              <a:rPr lang="ru-RU" sz="2400" b="1" dirty="0" err="1">
+                <a:latin typeface="Bookman Old Style" panose="02050604050505020204" pitchFamily="18" charset="0"/>
+              </a:rPr>
+              <a:t>Stupid</a:t>
+            </a:r>
+            <a:r>
+              <a:rPr lang="ru-RU" sz="2400" b="1" dirty="0">
+                <a:latin typeface="Bookman Old Style" panose="02050604050505020204" pitchFamily="18" charset="0"/>
+              </a:rPr>
+              <a:t>)</a:t>
+            </a:r>
+            <a:endParaRPr lang="ru-RU" sz="2400" dirty="0">
+              <a:latin typeface="Bookman Old Style" panose="02050604050505020204" pitchFamily="18" charset="0"/>
+            </a:endParaRPr>
+          </a:p>
+          <a:p>
+            <a:pPr algn="just">
+              <a:lnSpc>
+                <a:spcPct val="150000"/>
+              </a:lnSpc>
+            </a:pPr>
+            <a:r>
+              <a:rPr lang="ru-RU" sz="2400" b="1" dirty="0">
+                <a:latin typeface="Bookman Old Style" panose="02050604050505020204" pitchFamily="18" charset="0"/>
+              </a:rPr>
+              <a:t>Суть:</a:t>
+            </a:r>
+            <a:r>
+              <a:rPr lang="ru-RU" sz="2400" dirty="0">
+                <a:latin typeface="Bookman Old Style" panose="02050604050505020204" pitchFamily="18" charset="0"/>
+              </a:rPr>
+              <a:t> Код должен быть максимально простым и ясным.</a:t>
+            </a:r>
+          </a:p>
+          <a:p>
+            <a:pPr algn="just">
+              <a:lnSpc>
+                <a:spcPct val="150000"/>
+              </a:lnSpc>
+            </a:pPr>
+            <a:r>
+              <a:rPr lang="ru-RU" sz="2400" b="1" dirty="0">
+                <a:latin typeface="Bookman Old Style" panose="02050604050505020204" pitchFamily="18" charset="0"/>
+              </a:rPr>
+              <a:t>Главная цель паттернов:</a:t>
+            </a:r>
+            <a:r>
+              <a:rPr lang="ru-RU" sz="2400" dirty="0">
+                <a:latin typeface="Bookman Old Style" panose="02050604050505020204" pitchFamily="18" charset="0"/>
+              </a:rPr>
+              <a:t> Упрощать структуру, а не усложнять её. Если применение паттерна делает код менее понятным — он не нужен.</a:t>
+            </a:r>
+          </a:p>
+          <a:p>
+            <a:pPr algn="just">
+              <a:lnSpc>
+                <a:spcPct val="150000"/>
+              </a:lnSpc>
+            </a:pPr>
+            <a:r>
+              <a:rPr lang="ru-RU" sz="2400" b="1" dirty="0">
+                <a:latin typeface="Bookman Old Style" panose="02050604050505020204" pitchFamily="18" charset="0"/>
+              </a:rPr>
+              <a:t>2. Не злоупотребляйте паттернами («Паттерны ради паттернов»)</a:t>
+            </a:r>
+            <a:endParaRPr lang="ru-RU" sz="2400" dirty="0">
+              <a:latin typeface="Bookman Old Style" panose="02050604050505020204" pitchFamily="18" charset="0"/>
+            </a:endParaRPr>
+          </a:p>
+          <a:p>
+            <a:pPr algn="just">
+              <a:lnSpc>
+                <a:spcPct val="150000"/>
+              </a:lnSpc>
+            </a:pPr>
+            <a:r>
+              <a:rPr lang="ru-RU" sz="2400" dirty="0">
+                <a:latin typeface="Bookman Old Style" panose="02050604050505020204" pitchFamily="18" charset="0"/>
+              </a:rPr>
+              <a:t>Избегайте избыточного проектирования (</a:t>
+            </a:r>
+            <a:r>
+              <a:rPr lang="ru-RU" sz="2400" dirty="0" err="1">
+                <a:latin typeface="Bookman Old Style" panose="02050604050505020204" pitchFamily="18" charset="0"/>
+              </a:rPr>
+              <a:t>over-engineering</a:t>
+            </a:r>
+            <a:r>
+              <a:rPr lang="ru-RU" sz="2400" dirty="0">
+                <a:latin typeface="Bookman Old Style" panose="02050604050505020204" pitchFamily="18" charset="0"/>
+              </a:rPr>
+              <a:t>).</a:t>
+            </a:r>
+          </a:p>
+          <a:p>
+            <a:pPr algn="just">
+              <a:lnSpc>
+                <a:spcPct val="150000"/>
+              </a:lnSpc>
+            </a:pPr>
+            <a:r>
+              <a:rPr lang="ru-RU" sz="2400" dirty="0">
+                <a:latin typeface="Bookman Old Style" panose="02050604050505020204" pitchFamily="18" charset="0"/>
+              </a:rPr>
+              <a:t>Необоснованное использование шаблонов ведет к «раздуванию» кода и снижению его качества. Паттерн должен быть </a:t>
+            </a:r>
+            <a:r>
+              <a:rPr lang="ru-RU" sz="2400" b="1" dirty="0">
+                <a:latin typeface="Bookman Old Style" panose="02050604050505020204" pitchFamily="18" charset="0"/>
+              </a:rPr>
+              <a:t>оправданным</a:t>
+            </a:r>
+            <a:r>
+              <a:rPr lang="ru-RU" sz="2400" dirty="0">
+                <a:latin typeface="Bookman Old Style" panose="02050604050505020204" pitchFamily="18" charset="0"/>
+              </a:rPr>
+              <a:t> и эффективным способом решения конкретной задачи</a:t>
+            </a:r>
+            <a:r>
+              <a:rPr lang="ru-RU" sz="2400" dirty="0" smtClean="0">
+                <a:latin typeface="Bookman Old Style" panose="02050604050505020204" pitchFamily="18" charset="0"/>
+              </a:rPr>
+              <a:t>.</a:t>
+            </a:r>
+            <a:endParaRPr lang="ru-RU" sz="2400" dirty="0">
+              <a:latin typeface="Bookman Old Style" panose="02050604050505020204" pitchFamily="18" charset="0"/>
+            </a:endParaRPr>
+          </a:p>
+        </p:txBody>
+      </p:sp>
+      <p:sp>
+        <p:nvSpPr>
+          <p:cNvPr id="3" name="Rectangle 28" descr="Светлый диагональный 2"/>
           <p:cNvSpPr>
             <a:spLocks noChangeArrowheads="1"/>
           </p:cNvSpPr>
@@ -6225,7 +5697,7 @@
           <a:p>
             <a:pPr algn="ctr"/>
             <a:r>
-              <a:rPr lang="ru-RU" sz="2800" b="1" dirty="0" smtClean="0">
+              <a:rPr lang="ru-RU" sz="2800" b="1" dirty="0">
                 <a:solidFill>
                   <a:schemeClr val="tx2">
                     <a:lumMod val="50000"/>
@@ -6234,7 +5706,7 @@
                 <a:latin typeface="Bookman Old Style" panose="02050604050505020204" pitchFamily="18" charset="0"/>
                 <a:cs typeface="Times New Roman" panose="02020603050405020304" pitchFamily="18" charset="0"/>
               </a:rPr>
-              <a:t>Мобильная разработка</a:t>
+              <a:t>Фундаментальные принципы проектирования</a:t>
             </a:r>
             <a:endParaRPr lang="ru-RU" sz="2800" b="1" dirty="0">
               <a:solidFill>
@@ -6248,226 +5720,10 @@
           </a:p>
         </p:txBody>
       </p:sp>
-      <p:sp>
-        <p:nvSpPr>
-          <p:cNvPr id="7" name="Прямоугольник 6"/>
-          <p:cNvSpPr/>
-          <p:nvPr/>
-        </p:nvSpPr>
-        <p:spPr>
-          <a:xfrm>
-            <a:off x="0" y="654355"/>
-            <a:ext cx="12192000" cy="3416320"/>
-          </a:xfrm>
-          <a:prstGeom prst="rect">
-            <a:avLst/>
-          </a:prstGeom>
-        </p:spPr>
-        <p:txBody>
-          <a:bodyPr wrap="square" lIns="360000" rIns="360000">
-            <a:spAutoFit/>
-          </a:bodyPr>
-          <a:lstStyle/>
-          <a:p>
-            <a:pPr algn="just">
-              <a:lnSpc>
-                <a:spcPct val="150000"/>
-              </a:lnSpc>
-            </a:pPr>
-            <a:r>
-              <a:rPr lang="ru-RU" sz="2400" b="1" dirty="0" err="1">
-                <a:latin typeface="Bookman Old Style" panose="02050604050505020204" pitchFamily="18" charset="0"/>
-              </a:rPr>
-              <a:t>Flutter</a:t>
-            </a:r>
-            <a:r>
-              <a:rPr lang="ru-RU" sz="2400" b="1" dirty="0">
-                <a:latin typeface="Bookman Old Style" panose="02050604050505020204" pitchFamily="18" charset="0"/>
-              </a:rPr>
-              <a:t>, </a:t>
-            </a:r>
-            <a:r>
-              <a:rPr lang="ru-RU" sz="2400" b="1" dirty="0" err="1">
-                <a:latin typeface="Bookman Old Style" panose="02050604050505020204" pitchFamily="18" charset="0"/>
-              </a:rPr>
-              <a:t>React</a:t>
-            </a:r>
-            <a:r>
-              <a:rPr lang="ru-RU" sz="2400" b="1" dirty="0">
-                <a:latin typeface="Bookman Old Style" panose="02050604050505020204" pitchFamily="18" charset="0"/>
-              </a:rPr>
-              <a:t> </a:t>
-            </a:r>
-            <a:r>
-              <a:rPr lang="ru-RU" sz="2400" b="1" dirty="0" err="1">
-                <a:latin typeface="Bookman Old Style" panose="02050604050505020204" pitchFamily="18" charset="0"/>
-              </a:rPr>
-              <a:t>Native</a:t>
-            </a:r>
-            <a:endParaRPr lang="ru-RU" sz="2400" b="1" dirty="0">
-              <a:latin typeface="Bookman Old Style" panose="02050604050505020204" pitchFamily="18" charset="0"/>
-            </a:endParaRPr>
-          </a:p>
-          <a:p>
-            <a:pPr algn="just">
-              <a:lnSpc>
-                <a:spcPct val="150000"/>
-              </a:lnSpc>
-            </a:pPr>
-            <a:r>
-              <a:rPr lang="ru-RU" sz="2400" dirty="0">
-                <a:latin typeface="Bookman Old Style" panose="02050604050505020204" pitchFamily="18" charset="0"/>
-              </a:rPr>
-              <a:t>Кроме конкретных платформ, в мире мобильной разработки существуют кроссплатформенные решения, которые позволяют писать код сразу и для IOS и для </a:t>
-            </a:r>
-            <a:r>
-              <a:rPr lang="ru-RU" sz="2400" dirty="0" err="1">
-                <a:latin typeface="Bookman Old Style" panose="02050604050505020204" pitchFamily="18" charset="0"/>
-              </a:rPr>
-              <a:t>Android</a:t>
-            </a:r>
-            <a:r>
-              <a:rPr lang="ru-RU" sz="2400" dirty="0">
-                <a:latin typeface="Bookman Old Style" panose="02050604050505020204" pitchFamily="18" charset="0"/>
-              </a:rPr>
-              <a:t>, используя один инструмент. Из широко используемых решений можно выделить два: </a:t>
-            </a:r>
-            <a:r>
-              <a:rPr lang="ru-RU" sz="2400" dirty="0" err="1">
-                <a:latin typeface="Bookman Old Style" panose="02050604050505020204" pitchFamily="18" charset="0"/>
-              </a:rPr>
-              <a:t>фреймворк</a:t>
-            </a:r>
-            <a:r>
-              <a:rPr lang="ru-RU" sz="2400" dirty="0">
-                <a:latin typeface="Bookman Old Style" panose="02050604050505020204" pitchFamily="18" charset="0"/>
-              </a:rPr>
-              <a:t> </a:t>
-            </a:r>
-            <a:r>
-              <a:rPr lang="ru-RU" sz="2400" dirty="0" err="1">
-                <a:latin typeface="Bookman Old Style" panose="02050604050505020204" pitchFamily="18" charset="0"/>
-              </a:rPr>
-              <a:t>Flutter</a:t>
-            </a:r>
-            <a:r>
-              <a:rPr lang="ru-RU" sz="2400" dirty="0">
-                <a:latin typeface="Bookman Old Style" panose="02050604050505020204" pitchFamily="18" charset="0"/>
-              </a:rPr>
-              <a:t>, написанный на языке </a:t>
-            </a:r>
-            <a:r>
-              <a:rPr lang="ru-RU" sz="2400" dirty="0" err="1">
-                <a:latin typeface="Bookman Old Style" panose="02050604050505020204" pitchFamily="18" charset="0"/>
-              </a:rPr>
-              <a:t>Dart</a:t>
-            </a:r>
-            <a:r>
-              <a:rPr lang="ru-RU" sz="2400" dirty="0">
-                <a:latin typeface="Bookman Old Style" panose="02050604050505020204" pitchFamily="18" charset="0"/>
-              </a:rPr>
-              <a:t>, и </a:t>
-            </a:r>
-            <a:r>
-              <a:rPr lang="ru-RU" sz="2400" dirty="0" err="1">
-                <a:latin typeface="Bookman Old Style" panose="02050604050505020204" pitchFamily="18" charset="0"/>
-              </a:rPr>
-              <a:t>React</a:t>
-            </a:r>
-            <a:r>
-              <a:rPr lang="ru-RU" sz="2400" dirty="0">
-                <a:latin typeface="Bookman Old Style" panose="02050604050505020204" pitchFamily="18" charset="0"/>
-              </a:rPr>
-              <a:t> </a:t>
-            </a:r>
-            <a:r>
-              <a:rPr lang="ru-RU" sz="2400" dirty="0" err="1">
-                <a:latin typeface="Bookman Old Style" panose="02050604050505020204" pitchFamily="18" charset="0"/>
-              </a:rPr>
-              <a:t>Native</a:t>
-            </a:r>
-            <a:r>
-              <a:rPr lang="ru-RU" sz="2400" dirty="0">
-                <a:latin typeface="Bookman Old Style" panose="02050604050505020204" pitchFamily="18" charset="0"/>
-              </a:rPr>
-              <a:t>, написанный на </a:t>
-            </a:r>
-            <a:r>
-              <a:rPr lang="ru-RU" sz="2400" dirty="0" err="1" smtClean="0">
-                <a:latin typeface="Bookman Old Style" panose="02050604050505020204" pitchFamily="18" charset="0"/>
-              </a:rPr>
-              <a:t>JavaScript</a:t>
-            </a:r>
-            <a:endParaRPr lang="ru-RU" sz="2400" dirty="0" smtClean="0">
-              <a:latin typeface="Bookman Old Style" panose="02050604050505020204" pitchFamily="18" charset="0"/>
-            </a:endParaRPr>
-          </a:p>
-        </p:txBody>
-      </p:sp>
-      <p:pic>
-        <p:nvPicPr>
-          <p:cNvPr id="3" name="Рисунок 2"/>
-          <p:cNvPicPr>
-            <a:picLocks noChangeAspect="1"/>
-          </p:cNvPicPr>
-          <p:nvPr/>
-        </p:nvPicPr>
-        <p:blipFill>
-          <a:blip r:embed="rId3">
-            <a:extLst>
-              <a:ext uri="{28A0092B-C50C-407E-A947-70E740481C1C}">
-                <a14:useLocalDpi xmlns:a14="http://schemas.microsoft.com/office/drawing/2010/main" val="0"/>
-              </a:ext>
-            </a:extLst>
-          </a:blip>
-          <a:stretch>
-            <a:fillRect/>
-          </a:stretch>
-        </p:blipFill>
-        <p:spPr>
-          <a:xfrm>
-            <a:off x="3211657" y="4295773"/>
-            <a:ext cx="1924050" cy="2381250"/>
-          </a:xfrm>
-          <a:prstGeom prst="rect">
-            <a:avLst/>
-          </a:prstGeom>
-        </p:spPr>
-      </p:pic>
-      <p:pic>
-        <p:nvPicPr>
-          <p:cNvPr id="4" name="Рисунок 3"/>
-          <p:cNvPicPr>
-            <a:picLocks noChangeAspect="1"/>
-          </p:cNvPicPr>
-          <p:nvPr/>
-        </p:nvPicPr>
-        <p:blipFill>
-          <a:blip r:embed="rId4" cstate="print">
-            <a:extLst>
-              <a:ext uri="{28A0092B-C50C-407E-A947-70E740481C1C}">
-                <a14:useLocalDpi xmlns:a14="http://schemas.microsoft.com/office/drawing/2010/main" val="0"/>
-              </a:ext>
-            </a:extLst>
-          </a:blip>
-          <a:stretch>
-            <a:fillRect/>
-          </a:stretch>
-        </p:blipFill>
-        <p:spPr>
-          <a:xfrm>
-            <a:off x="6400409" y="4295772"/>
-            <a:ext cx="2675563" cy="2381251"/>
-          </a:xfrm>
-          <a:prstGeom prst="rect">
-            <a:avLst/>
-          </a:prstGeom>
-        </p:spPr>
-      </p:pic>
     </p:spTree>
     <p:extLst>
       <p:ext uri="{BB962C8B-B14F-4D97-AF65-F5344CB8AC3E}">
-        <p14:creationId xmlns:p14="http://schemas.microsoft.com/office/powerpoint/2010/main" val="3662354858"/>
+        <p14:creationId xmlns:p14="http://schemas.microsoft.com/office/powerpoint/2010/main" val="1681187473"/>
       </p:ext>
     </p:extLst>
   </p:cSld>
@@ -6503,86 +5759,14 @@
       </p:grpSpPr>
       <p:sp>
         <p:nvSpPr>
-          <p:cNvPr id="11" name="Rectangle 28" descr="Светлый диагональный 2"/>
-          <p:cNvSpPr>
-            <a:spLocks noChangeArrowheads="1"/>
-          </p:cNvSpPr>
-          <p:nvPr/>
-        </p:nvSpPr>
-        <p:spPr bwMode="auto">
-          <a:xfrm>
-            <a:off x="0" y="-1"/>
-            <a:ext cx="12192000" cy="654357"/>
-          </a:xfrm>
-          <a:prstGeom prst="rect">
-            <a:avLst/>
-          </a:prstGeom>
-          <a:pattFill prst="ltUpDiag">
-            <a:fgClr>
-              <a:schemeClr val="accent1">
-                <a:lumMod val="40000"/>
-                <a:lumOff val="60000"/>
-              </a:schemeClr>
-            </a:fgClr>
-            <a:bgClr>
-              <a:srgbClr val="FFFFFF"/>
-            </a:bgClr>
-          </a:pattFill>
-          <a:ln w="15875" algn="ctr">
-            <a:solidFill>
-              <a:schemeClr val="accent5">
-                <a:lumMod val="50000"/>
-              </a:schemeClr>
-            </a:solidFill>
-            <a:miter lim="800000"/>
-            <a:headEnd/>
-            <a:tailEnd/>
-          </a:ln>
-          <a:effectLst/>
-        </p:spPr>
-        <p:txBody>
-          <a:bodyPr vert="horz" wrap="square" lIns="18000" tIns="18000" rIns="18000" bIns="18000" numCol="1" anchor="ctr" anchorCtr="0" compatLnSpc="1">
-            <a:prstTxWarp prst="textNoShape">
-              <a:avLst/>
-            </a:prstTxWarp>
-          </a:bodyPr>
-          <a:lstStyle/>
-          <a:p>
-            <a:pPr algn="ctr"/>
-            <a:r>
-              <a:rPr lang="ru-RU" sz="2800" b="1" dirty="0" smtClean="0">
-                <a:solidFill>
-                  <a:schemeClr val="tx2">
-                    <a:lumMod val="50000"/>
-                  </a:schemeClr>
-                </a:solidFill>
-                <a:latin typeface="Bookman Old Style" panose="02050604050505020204" pitchFamily="18" charset="0"/>
-                <a:cs typeface="Times New Roman" panose="02020603050405020304" pitchFamily="18" charset="0"/>
-              </a:rPr>
-              <a:t>Мобильная разработка</a:t>
-            </a:r>
-            <a:endParaRPr lang="ru-RU" sz="2800" b="1" dirty="0">
-              <a:solidFill>
-                <a:schemeClr val="tx2">
-                  <a:lumMod val="50000"/>
-                </a:schemeClr>
-              </a:solidFill>
-              <a:latin typeface="Bookman Old Style" panose="02050604050505020204" pitchFamily="18" charset="0"/>
-              <a:cs typeface="Times New Roman" panose="02020603050405020304" pitchFamily="18" charset="0"/>
-            </a:endParaRPr>
-          </a:p>
-        </p:txBody>
-      </p:sp>
-      <p:sp>
-        <p:nvSpPr>
           <p:cNvPr id="7" name="Прямоугольник 6"/>
           <p:cNvSpPr/>
           <p:nvPr/>
         </p:nvSpPr>
         <p:spPr>
           <a:xfrm>
-            <a:off x="0" y="654355"/>
-            <a:ext cx="12192000" cy="5078313"/>
+            <a:off x="0" y="0"/>
+            <a:ext cx="12192000" cy="4524315"/>
           </a:xfrm>
           <a:prstGeom prst="rect">
             <a:avLst/>
@@ -6600,18 +5784,18 @@
               </a:lnSpc>
             </a:pPr>
             <a:r>
-              <a:rPr lang="en-US" sz="2400" b="1" dirty="0" smtClean="0">
-                <a:latin typeface="Bookman Old Style" panose="02050604050505020204" pitchFamily="18" charset="0"/>
-              </a:rPr>
-              <a:t>C# </a:t>
-            </a:r>
-            <a:r>
-              <a:rPr lang="en-US" sz="2400" b="1" dirty="0" err="1" smtClean="0">
-                <a:latin typeface="Bookman Old Style" panose="02050604050505020204" pitchFamily="18" charset="0"/>
-              </a:rPr>
-              <a:t>Xamarin</a:t>
-            </a:r>
-            <a:endParaRPr lang="en-US" sz="2400" b="1" dirty="0" smtClean="0">
+              <a:rPr lang="ru-RU" sz="2400" b="1" dirty="0" smtClean="0">
+                <a:latin typeface="Bookman Old Style" panose="02050604050505020204" pitchFamily="18" charset="0"/>
+              </a:rPr>
+              <a:t>3</a:t>
+            </a:r>
+            <a:r>
+              <a:rPr lang="ru-RU" sz="2400" b="1" dirty="0">
+                <a:latin typeface="Bookman Old Style" panose="02050604050505020204" pitchFamily="18" charset="0"/>
+              </a:rPr>
+              <a:t>. Принцип осознанности</a:t>
+            </a:r>
+            <a:endParaRPr lang="ru-RU" sz="2400" dirty="0">
               <a:latin typeface="Bookman Old Style" panose="02050604050505020204" pitchFamily="18" charset="0"/>
             </a:endParaRPr>
           </a:p>
@@ -6622,70 +5806,10 @@
               </a:lnSpc>
             </a:pPr>
             <a:r>
-              <a:rPr lang="ru-RU" sz="2400" b="1" dirty="0" err="1">
-                <a:latin typeface="Bookman Old Style" panose="02050604050505020204" pitchFamily="18" charset="0"/>
-              </a:rPr>
-              <a:t>Xamarin.Forms</a:t>
-            </a:r>
-            <a:r>
               <a:rPr lang="ru-RU" sz="2400" dirty="0">
                 <a:latin typeface="Bookman Old Style" panose="02050604050505020204" pitchFamily="18" charset="0"/>
               </a:rPr>
-              <a:t> представляет платформу, которая нацелена на создание кроссплатформенных приложений под </a:t>
-            </a:r>
-            <a:r>
-              <a:rPr lang="ru-RU" sz="2400" b="1" dirty="0" err="1">
-                <a:latin typeface="Bookman Old Style" panose="02050604050505020204" pitchFamily="18" charset="0"/>
-              </a:rPr>
-              <a:t>Android</a:t>
-            </a:r>
-            <a:r>
-              <a:rPr lang="ru-RU" sz="2400" b="1" dirty="0">
-                <a:latin typeface="Bookman Old Style" panose="02050604050505020204" pitchFamily="18" charset="0"/>
-              </a:rPr>
-              <a:t>, </a:t>
-            </a:r>
-            <a:r>
-              <a:rPr lang="ru-RU" sz="2400" b="1" dirty="0" err="1">
-                <a:latin typeface="Bookman Old Style" panose="02050604050505020204" pitchFamily="18" charset="0"/>
-              </a:rPr>
-              <a:t>iOS</a:t>
-            </a:r>
-            <a:r>
-              <a:rPr lang="ru-RU" sz="2400" b="1" dirty="0">
-                <a:latin typeface="Bookman Old Style" panose="02050604050505020204" pitchFamily="18" charset="0"/>
-              </a:rPr>
-              <a:t> </a:t>
-            </a:r>
-            <a:r>
-              <a:rPr lang="ru-RU" sz="2400" dirty="0">
-                <a:latin typeface="Bookman Old Style" panose="02050604050505020204" pitchFamily="18" charset="0"/>
-              </a:rPr>
-              <a:t>и</a:t>
-            </a:r>
-            <a:r>
-              <a:rPr lang="ru-RU" sz="2400" b="1" dirty="0">
-                <a:latin typeface="Bookman Old Style" panose="02050604050505020204" pitchFamily="18" charset="0"/>
-              </a:rPr>
-              <a:t> </a:t>
-            </a:r>
-            <a:r>
-              <a:rPr lang="ru-RU" sz="2400" b="1" dirty="0" err="1">
-                <a:latin typeface="Bookman Old Style" panose="02050604050505020204" pitchFamily="18" charset="0"/>
-              </a:rPr>
-              <a:t>Windows</a:t>
-            </a:r>
-            <a:r>
-              <a:rPr lang="ru-RU" sz="2400" b="1" dirty="0">
-                <a:latin typeface="Bookman Old Style" panose="02050604050505020204" pitchFamily="18" charset="0"/>
-              </a:rPr>
-              <a:t> 10</a:t>
-            </a:r>
-            <a:r>
-              <a:rPr lang="ru-RU" sz="2400" dirty="0">
-                <a:latin typeface="Bookman Old Style" panose="02050604050505020204" pitchFamily="18" charset="0"/>
-              </a:rPr>
-              <a:t>. </a:t>
+              <a:t>Не используйте паттерн, если не понимаете его внутреннюю логику и механику. Копирование структуры без понимания принципа работы создает архитектурные долги.</a:t>
             </a:r>
           </a:p>
           <a:p>
@@ -6695,41 +5819,14 @@
               </a:lnSpc>
             </a:pPr>
             <a:r>
-              <a:rPr lang="ru-RU" sz="2400" dirty="0" smtClean="0">
-                <a:latin typeface="Bookman Old Style" panose="02050604050505020204" pitchFamily="18" charset="0"/>
-              </a:rPr>
-              <a:t>Есть </a:t>
-            </a:r>
-            <a:r>
-              <a:rPr lang="ru-RU" sz="2400" dirty="0">
-                <a:latin typeface="Bookman Old Style" panose="02050604050505020204" pitchFamily="18" charset="0"/>
-              </a:rPr>
-              <a:t>определенные статистические данные, что значительная часть мобильных приложений создается более чем для одной платформы, например, для </a:t>
-            </a:r>
-            <a:r>
-              <a:rPr lang="ru-RU" sz="2400" b="1" dirty="0" err="1">
-                <a:latin typeface="Bookman Old Style" panose="02050604050505020204" pitchFamily="18" charset="0"/>
-              </a:rPr>
-              <a:t>Android</a:t>
-            </a:r>
-            <a:r>
-              <a:rPr lang="ru-RU" sz="2400" dirty="0">
-                <a:latin typeface="Bookman Old Style" panose="02050604050505020204" pitchFamily="18" charset="0"/>
-              </a:rPr>
-              <a:t> и </a:t>
-            </a:r>
-            <a:r>
-              <a:rPr lang="ru-RU" sz="2400" b="1" dirty="0" err="1">
-                <a:latin typeface="Bookman Old Style" panose="02050604050505020204" pitchFamily="18" charset="0"/>
-              </a:rPr>
-              <a:t>iOS</a:t>
-            </a:r>
-            <a:r>
-              <a:rPr lang="ru-RU" sz="2400" dirty="0">
-                <a:latin typeface="Bookman Old Style" panose="02050604050505020204" pitchFamily="18" charset="0"/>
-              </a:rPr>
-              <a:t>. </a:t>
-            </a:r>
+              <a:rPr lang="ru-RU" sz="2400" b="1" dirty="0">
+                <a:latin typeface="Bookman Old Style" panose="02050604050505020204" pitchFamily="18" charset="0"/>
+              </a:rPr>
+              <a:t>4. Классификация решений</a:t>
+            </a:r>
+            <a:endParaRPr lang="ru-RU" sz="2400" dirty="0">
+              <a:latin typeface="Bookman Old Style" panose="02050604050505020204" pitchFamily="18" charset="0"/>
+            </a:endParaRPr>
           </a:p>
           <a:p>
             <a:pPr algn="just">
@@ -6738,215 +5835,18 @@
               </a:lnSpc>
             </a:pPr>
             <a:r>
-              <a:rPr lang="en-US" sz="2400" b="1" dirty="0" err="1">
-                <a:latin typeface="Bookman Old Style" panose="02050604050505020204" pitchFamily="18" charset="0"/>
-              </a:rPr>
-              <a:t>Xamarin</a:t>
-            </a:r>
-            <a:r>
-              <a:rPr lang="en-US" sz="2400" dirty="0">
-                <a:latin typeface="Bookman Old Style" panose="02050604050505020204" pitchFamily="18" charset="0"/>
-              </a:rPr>
-              <a:t> </a:t>
-            </a:r>
-            <a:r>
               <a:rPr lang="ru-RU" sz="2400" dirty="0">
                 <a:latin typeface="Bookman Old Style" panose="02050604050505020204" pitchFamily="18" charset="0"/>
               </a:rPr>
-              <a:t>работает поверх </a:t>
-            </a:r>
-            <a:r>
-              <a:rPr lang="ru-RU" sz="2400" dirty="0" err="1">
-                <a:latin typeface="Bookman Old Style" panose="02050604050505020204" pitchFamily="18" charset="0"/>
-              </a:rPr>
-              <a:t>фреймворка</a:t>
-            </a:r>
-            <a:r>
-              <a:rPr lang="ru-RU" sz="2400" dirty="0">
-                <a:latin typeface="Bookman Old Style" panose="02050604050505020204" pitchFamily="18" charset="0"/>
-              </a:rPr>
-              <a:t> </a:t>
-            </a:r>
-            <a:r>
-              <a:rPr lang="en-US" sz="2400" b="1" dirty="0">
-                <a:latin typeface="Bookman Old Style" panose="02050604050505020204" pitchFamily="18" charset="0"/>
-              </a:rPr>
-              <a:t>Mono</a:t>
-            </a:r>
-            <a:r>
-              <a:rPr lang="en-US" sz="2400" dirty="0">
-                <a:latin typeface="Bookman Old Style" panose="02050604050505020204" pitchFamily="18" charset="0"/>
-              </a:rPr>
-              <a:t>, </a:t>
-            </a:r>
-            <a:r>
-              <a:rPr lang="ru-RU" sz="2400" dirty="0">
-                <a:latin typeface="Bookman Old Style" panose="02050604050505020204" pitchFamily="18" charset="0"/>
-              </a:rPr>
-              <a:t>который предоставляет </a:t>
-            </a:r>
-            <a:r>
-              <a:rPr lang="en-US" sz="2400" b="1" dirty="0" err="1">
-                <a:latin typeface="Bookman Old Style" panose="02050604050505020204" pitchFamily="18" charset="0"/>
-              </a:rPr>
-              <a:t>opensource</a:t>
-            </a:r>
-            <a:r>
-              <a:rPr lang="en-US" sz="2400" dirty="0">
-                <a:latin typeface="Bookman Old Style" panose="02050604050505020204" pitchFamily="18" charset="0"/>
-              </a:rPr>
-              <a:t>-</a:t>
-            </a:r>
-            <a:r>
-              <a:rPr lang="ru-RU" sz="2400" dirty="0">
-                <a:latin typeface="Bookman Old Style" panose="02050604050505020204" pitchFamily="18" charset="0"/>
-              </a:rPr>
-              <a:t>реализацию </a:t>
-            </a:r>
-            <a:r>
-              <a:rPr lang="ru-RU" sz="2400" b="1" dirty="0">
-                <a:latin typeface="Bookman Old Style" panose="02050604050505020204" pitchFamily="18" charset="0"/>
-              </a:rPr>
-              <a:t>.</a:t>
-            </a:r>
-            <a:r>
-              <a:rPr lang="en-US" sz="2400" b="1" dirty="0">
-                <a:latin typeface="Bookman Old Style" panose="02050604050505020204" pitchFamily="18" charset="0"/>
-              </a:rPr>
-              <a:t>NET Framework</a:t>
-            </a:r>
-            <a:r>
-              <a:rPr lang="en-US" sz="2400" dirty="0">
-                <a:latin typeface="Bookman Old Style" panose="02050604050505020204" pitchFamily="18" charset="0"/>
-              </a:rPr>
-              <a:t>. </a:t>
-            </a:r>
-            <a:r>
-              <a:rPr lang="en-US" sz="2400" b="1" dirty="0">
-                <a:latin typeface="Bookman Old Style" panose="02050604050505020204" pitchFamily="18" charset="0"/>
-              </a:rPr>
-              <a:t>Mono</a:t>
-            </a:r>
-            <a:r>
-              <a:rPr lang="en-US" sz="2400" dirty="0">
-                <a:latin typeface="Bookman Old Style" panose="02050604050505020204" pitchFamily="18" charset="0"/>
-              </a:rPr>
-              <a:t> </a:t>
-            </a:r>
-            <a:r>
-              <a:rPr lang="ru-RU" sz="2400" dirty="0">
-                <a:latin typeface="Bookman Old Style" panose="02050604050505020204" pitchFamily="18" charset="0"/>
-              </a:rPr>
-              <a:t>может работать поверх разных платформ - </a:t>
-            </a:r>
-            <a:r>
-              <a:rPr lang="en-US" sz="2400" b="1" dirty="0" err="1">
-                <a:latin typeface="Bookman Old Style" panose="02050604050505020204" pitchFamily="18" charset="0"/>
-              </a:rPr>
-              <a:t>Linix</a:t>
-            </a:r>
-            <a:r>
-              <a:rPr lang="en-US" sz="2400" dirty="0">
-                <a:latin typeface="Bookman Old Style" panose="02050604050505020204" pitchFamily="18" charset="0"/>
-              </a:rPr>
-              <a:t>, </a:t>
-            </a:r>
-            <a:r>
-              <a:rPr lang="en-US" sz="2400" b="1" dirty="0" err="1">
-                <a:latin typeface="Bookman Old Style" panose="02050604050505020204" pitchFamily="18" charset="0"/>
-              </a:rPr>
-              <a:t>MacOS</a:t>
-            </a:r>
-            <a:r>
-              <a:rPr lang="en-US" sz="2400" dirty="0">
-                <a:latin typeface="Bookman Old Style" panose="02050604050505020204" pitchFamily="18" charset="0"/>
-              </a:rPr>
-              <a:t> </a:t>
-            </a:r>
-            <a:r>
-              <a:rPr lang="ru-RU" sz="2400" dirty="0">
-                <a:latin typeface="Bookman Old Style" panose="02050604050505020204" pitchFamily="18" charset="0"/>
-              </a:rPr>
-              <a:t>и т.д.</a:t>
+              <a:t>Паттернов много, и они решают разные задачи. Для удобства их разделяют на группы (порождающие, структурные, поведенческие) в зависимости от цели, которую они преследуют.</a:t>
             </a:r>
           </a:p>
         </p:txBody>
       </p:sp>
-      <p:pic>
-        <p:nvPicPr>
-          <p:cNvPr id="3074" name="Picture 2" descr="Коты. Лучший источник вдохновения. | Пикабу"/>
-          <p:cNvPicPr>
-            <a:picLocks noChangeAspect="1" noChangeArrowheads="1"/>
-          </p:cNvPicPr>
-          <p:nvPr/>
-        </p:nvPicPr>
-        <p:blipFill>
-          <a:blip r:embed="rId3" cstate="print">
-            <a:extLst>
-              <a:ext uri="{28A0092B-C50C-407E-A947-70E740481C1C}">
-                <a14:useLocalDpi xmlns:a14="http://schemas.microsoft.com/office/drawing/2010/main" val="0"/>
-              </a:ext>
-            </a:extLst>
-          </a:blip>
-          <a:srcRect/>
-          <a:stretch>
-            <a:fillRect/>
-          </a:stretch>
-        </p:blipFill>
-        <p:spPr bwMode="auto">
-          <a:xfrm>
-            <a:off x="8870878" y="5119946"/>
-            <a:ext cx="3321122" cy="1738054"/>
-          </a:xfrm>
-          <a:prstGeom prst="rect">
-            <a:avLst/>
-          </a:prstGeom>
-          <a:noFill/>
-          <a:extLst>
-            <a:ext uri="{909E8E84-426E-40DD-AFC4-6F175D3DCCD1}">
-              <a14:hiddenFill xmlns:a14="http://schemas.microsoft.com/office/drawing/2010/main">
-                <a:solidFill>
-                  <a:srgbClr val="FFFFFF"/>
-                </a:solidFill>
-              </a14:hiddenFill>
-            </a:ext>
-          </a:extLst>
-        </p:spPr>
-      </p:pic>
-      <p:pic>
-        <p:nvPicPr>
-          <p:cNvPr id="2" name="Рисунок 1"/>
-          <p:cNvPicPr>
-            <a:picLocks noChangeAspect="1"/>
-          </p:cNvPicPr>
-          <p:nvPr/>
-        </p:nvPicPr>
-        <p:blipFill>
-          <a:blip r:embed="rId4">
-            <a:extLst>
-              <a:ext uri="{28A0092B-C50C-407E-A947-70E740481C1C}">
-                <a14:useLocalDpi xmlns:a14="http://schemas.microsoft.com/office/drawing/2010/main" val="0"/>
-              </a:ext>
-            </a:extLst>
-          </a:blip>
-          <a:stretch>
-            <a:fillRect/>
-          </a:stretch>
-        </p:blipFill>
-        <p:spPr>
-          <a:xfrm>
-            <a:off x="6816436" y="5066267"/>
-            <a:ext cx="1919111" cy="1708008"/>
-          </a:xfrm>
-          <a:prstGeom prst="rect">
-            <a:avLst/>
-          </a:prstGeom>
-        </p:spPr>
-      </p:pic>
     </p:spTree>
     <p:extLst>
       <p:ext uri="{BB962C8B-B14F-4D97-AF65-F5344CB8AC3E}">
-        <p14:creationId xmlns:p14="http://schemas.microsoft.com/office/powerpoint/2010/main" val="3332253733"/>
+        <p14:creationId xmlns:p14="http://schemas.microsoft.com/office/powerpoint/2010/main" val="3022514782"/>
       </p:ext>
     </p:extLst>
   </p:cSld>
